--- a/docs/Athenaeum_Presentation.pptx
+++ b/docs/Athenaeum_Presentation.pptx
@@ -21,6 +21,7 @@
     <p:sldId id="269" r:id="rId20"/>
     <p:sldId id="270" r:id="rId21"/>
     <p:sldId id="271" r:id="rId22"/>
+    <p:sldId id="272" r:id="rId23"/>
   </p:sldIdLst>
   <p:sldSz cx="12191695" cy="6858000" type="screen4x3"/>
   <p:notesSz cx="6858000" cy="9144000"/>
@@ -3679,7 +3680,7 @@
                 </a:solidFill>
                 <a:latin typeface="Georgia"/>
               </a:rPr>
-              <a:t>The live application</a:t>
+              <a:t>Logic inside the database</a:t>
             </a:r>
           </a:p>
         </p:txBody>
@@ -3730,18 +3731,60 @@
       </p:sp>
       <p:sp>
         <p:nvSpPr>
-          <p:cNvPr id="6" name="Rounded Rectangle 5"/>
+          <p:cNvPr id="6" name="TextBox 5"/>
+          <p:cNvSpPr txBox="1"/>
+          <p:nvPr/>
+        </p:nvSpPr>
+        <p:spPr>
+          <a:xfrm>
+            <a:off x="841248" y="1783080"/>
+            <a:ext cx="10424160" cy="548640"/>
+          </a:xfrm>
+          <a:prstGeom prst="rect">
+            <a:avLst/>
+          </a:prstGeom>
+          <a:noFill/>
+        </p:spPr>
+        <p:txBody>
+          <a:bodyPr wrap="square" anchor="t" lIns="0" rIns="0" tIns="0" bIns="0">
+            <a:spAutoFit/>
+          </a:bodyPr>
+          <a:lstStyle/>
+          <a:p>
+            <a:pPr algn="l">
+              <a:lnSpc>
+                <a:spcPct val="104000"/>
+              </a:lnSpc>
+              <a:spcAft>
+                <a:spcPts val="400"/>
+              </a:spcAft>
+            </a:pPr>
+            <a:r>
+              <a:rPr sz="1700" b="0">
+                <a:solidFill>
+                  <a:srgbClr val="2C2A26"/>
+                </a:solidFill>
+                <a:latin typeface="Calibri"/>
+              </a:rPr>
+              <a:t>Rules live in MySQL, so data stays correct however it is accessed.</a:t>
+            </a:r>
+          </a:p>
+        </p:txBody>
+      </p:sp>
+      <p:sp>
+        <p:nvSpPr>
+          <p:cNvPr id="7" name="Rounded Rectangle 6"/>
           <p:cNvSpPr/>
           <p:nvPr/>
         </p:nvSpPr>
         <p:spPr>
           <a:xfrm>
-            <a:off x="786384" y="1819655"/>
-            <a:ext cx="5458968" cy="3598438"/>
+            <a:off x="841248" y="2514600"/>
+            <a:ext cx="5166360" cy="3291840"/>
           </a:xfrm>
           <a:prstGeom prst="roundRect">
             <a:avLst>
-              <a:gd name="adj" fmla="val 3000"/>
+              <a:gd name="adj" fmla="val 5000"/>
             </a:avLst>
           </a:prstGeom>
           <a:solidFill>
@@ -3776,40 +3819,60 @@
           </a:p>
         </p:txBody>
       </p:sp>
-      <p:pic>
-        <p:nvPicPr>
-          <p:cNvPr id="7" name="Picture 6" descr="app_catalogue.png"/>
-          <p:cNvPicPr>
-            <a:picLocks noChangeAspect="1"/>
-          </p:cNvPicPr>
-          <p:nvPr/>
-        </p:nvPicPr>
-        <p:blipFill>
-          <a:blip r:embed="rId2"/>
-          <a:stretch>
-            <a:fillRect/>
-          </a:stretch>
-        </p:blipFill>
-        <p:spPr>
-          <a:xfrm>
-            <a:off x="841248" y="1874519"/>
-            <a:ext cx="5349240" cy="3488710"/>
-          </a:xfrm>
-          <a:prstGeom prst="rect">
-            <a:avLst/>
-          </a:prstGeom>
-        </p:spPr>
-      </p:pic>
-      <p:sp>
-        <p:nvSpPr>
-          <p:cNvPr id="8" name="TextBox 7"/>
-          <p:cNvSpPr txBox="1"/>
-          <p:nvPr/>
-        </p:nvSpPr>
-        <p:spPr>
-          <a:xfrm>
-            <a:off x="841248" y="5468112"/>
-            <a:ext cx="5349240" cy="365760"/>
+      <p:sp>
+        <p:nvSpPr>
+          <p:cNvPr id="8" name="Rectangle 7"/>
+          <p:cNvSpPr/>
+          <p:nvPr/>
+        </p:nvSpPr>
+        <p:spPr>
+          <a:xfrm>
+            <a:off x="841248" y="2514600"/>
+            <a:ext cx="146304" cy="3291840"/>
+          </a:xfrm>
+          <a:prstGeom prst="rect">
+            <a:avLst/>
+          </a:prstGeom>
+          <a:solidFill>
+            <a:srgbClr val="A8503A"/>
+          </a:solidFill>
+          <a:ln>
+            <a:noFill/>
+          </a:ln>
+          <a:effectLst/>
+        </p:spPr>
+        <p:style>
+          <a:lnRef idx="1">
+            <a:schemeClr val="accent1"/>
+          </a:lnRef>
+          <a:fillRef idx="3">
+            <a:schemeClr val="accent1"/>
+          </a:fillRef>
+          <a:effectRef idx="2">
+            <a:schemeClr val="accent1"/>
+          </a:effectRef>
+          <a:fontRef idx="minor">
+            <a:schemeClr val="lt1"/>
+          </a:fontRef>
+        </p:style>
+        <p:txBody>
+          <a:bodyPr rtlCol="0" anchor="ctr"/>
+          <a:lstStyle/>
+          <a:p>
+            <a:pPr algn="ctr"/>
+          </a:p>
+        </p:txBody>
+      </p:sp>
+      <p:sp>
+        <p:nvSpPr>
+          <p:cNvPr id="9" name="TextBox 8"/>
+          <p:cNvSpPr txBox="1"/>
+          <p:nvPr/>
+        </p:nvSpPr>
+        <p:spPr>
+          <a:xfrm>
+            <a:off x="1207008" y="2743200"/>
+            <a:ext cx="4572000" cy="457200"/>
           </a:xfrm>
           <a:prstGeom prst="rect">
             <a:avLst/>
@@ -3822,7 +3885,7 @@
           </a:bodyPr>
           <a:lstStyle/>
           <a:p>
-            <a:pPr algn="ctr">
+            <a:pPr algn="l">
               <a:lnSpc>
                 <a:spcPct val="104000"/>
               </a:lnSpc>
@@ -3831,31 +3894,138 @@
               </a:spcAft>
             </a:pPr>
             <a:r>
-              <a:rPr sz="1200" b="0">
-                <a:solidFill>
-                  <a:srgbClr val="7A7263"/>
-                </a:solidFill>
-                <a:latin typeface="Calibri"/>
-              </a:rPr>
-              <a:t>Catalogue — search + live availability</a:t>
-            </a:r>
-          </a:p>
-        </p:txBody>
-      </p:sp>
-      <p:sp>
-        <p:nvSpPr>
-          <p:cNvPr id="9" name="Rounded Rectangle 8"/>
+              <a:rPr sz="1900" b="1">
+                <a:solidFill>
+                  <a:srgbClr val="26415E"/>
+                </a:solidFill>
+                <a:latin typeface="Georgia"/>
+              </a:rPr>
+              <a:t>Triggers</a:t>
+            </a:r>
+          </a:p>
+        </p:txBody>
+      </p:sp>
+      <p:sp>
+        <p:nvSpPr>
+          <p:cNvPr id="10" name="TextBox 9"/>
+          <p:cNvSpPr txBox="1"/>
+          <p:nvPr/>
+        </p:nvSpPr>
+        <p:spPr>
+          <a:xfrm>
+            <a:off x="1207008" y="3383280"/>
+            <a:ext cx="4572000" cy="2286000"/>
+          </a:xfrm>
+          <a:prstGeom prst="rect">
+            <a:avLst/>
+          </a:prstGeom>
+          <a:noFill/>
+        </p:spPr>
+        <p:txBody>
+          <a:bodyPr wrap="square" lIns="0" rIns="0" tIns="0" bIns="0">
+            <a:spAutoFit/>
+          </a:bodyPr>
+          <a:lstStyle/>
+          <a:p>
+            <a:pPr>
+              <a:lnSpc>
+                <a:spcPct val="106000"/>
+              </a:lnSpc>
+              <a:spcAft>
+                <a:spcPts val="1200"/>
+              </a:spcAft>
+            </a:pPr>
+            <a:r>
+              <a:rPr sz="1500" b="1">
+                <a:solidFill>
+                  <a:srgbClr val="A8503A"/>
+                </a:solidFill>
+                <a:latin typeface="Calibri"/>
+              </a:rPr>
+              <a:t>—  </a:t>
+            </a:r>
+            <a:r>
+              <a:rPr sz="1500">
+                <a:solidFill>
+                  <a:srgbClr val="2C2A26"/>
+                </a:solidFill>
+                <a:latin typeface="Calibri"/>
+              </a:rPr>
+              <a:t>Block issuing a copy that is not Available</a:t>
+            </a:r>
+          </a:p>
+          <a:p>
+            <a:pPr>
+              <a:lnSpc>
+                <a:spcPct val="106000"/>
+              </a:lnSpc>
+              <a:spcAft>
+                <a:spcPts val="1200"/>
+              </a:spcAft>
+            </a:pPr>
+            <a:r>
+              <a:rPr sz="1500" b="1">
+                <a:solidFill>
+                  <a:srgbClr val="A8503A"/>
+                </a:solidFill>
+                <a:latin typeface="Calibri"/>
+              </a:rPr>
+              <a:t>—  </a:t>
+            </a:r>
+            <a:r>
+              <a:rPr sz="1500">
+                <a:solidFill>
+                  <a:srgbClr val="2C2A26"/>
+                </a:solidFill>
+                <a:latin typeface="Calibri"/>
+              </a:rPr>
+              <a:t>Auto-mark a copy 'Borrowed' when issued</a:t>
+            </a:r>
+          </a:p>
+          <a:p>
+            <a:pPr>
+              <a:lnSpc>
+                <a:spcPct val="106000"/>
+              </a:lnSpc>
+              <a:spcAft>
+                <a:spcPts val="1200"/>
+              </a:spcAft>
+            </a:pPr>
+            <a:r>
+              <a:rPr sz="1500" b="1">
+                <a:solidFill>
+                  <a:srgbClr val="A8503A"/>
+                </a:solidFill>
+                <a:latin typeface="Calibri"/>
+              </a:rPr>
+              <a:t>—  </a:t>
+            </a:r>
+            <a:r>
+              <a:rPr sz="1500">
+                <a:solidFill>
+                  <a:srgbClr val="2C2A26"/>
+                </a:solidFill>
+                <a:latin typeface="Calibri"/>
+              </a:rPr>
+              <a:t>Auto-free the copy + add a fine on late return</a:t>
+            </a:r>
+          </a:p>
+        </p:txBody>
+      </p:sp>
+      <p:sp>
+        <p:nvSpPr>
+          <p:cNvPr id="11" name="Rounded Rectangle 10"/>
           <p:cNvSpPr/>
           <p:nvPr/>
         </p:nvSpPr>
         <p:spPr>
           <a:xfrm>
-            <a:off x="6300216" y="1819655"/>
-            <a:ext cx="5093208" cy="3359894"/>
+            <a:off x="6281928" y="2514600"/>
+            <a:ext cx="5166360" cy="3291840"/>
           </a:xfrm>
           <a:prstGeom prst="roundRect">
             <a:avLst>
-              <a:gd name="adj" fmla="val 3000"/>
+              <a:gd name="adj" fmla="val 5000"/>
             </a:avLst>
           </a:prstGeom>
           <a:solidFill>
@@ -3890,40 +4060,60 @@
           </a:p>
         </p:txBody>
       </p:sp>
-      <p:pic>
-        <p:nvPicPr>
-          <p:cNvPr id="10" name="Picture 9" descr="app_loans.png"/>
-          <p:cNvPicPr>
-            <a:picLocks noChangeAspect="1"/>
-          </p:cNvPicPr>
-          <p:nvPr/>
-        </p:nvPicPr>
-        <p:blipFill>
-          <a:blip r:embed="rId3"/>
-          <a:stretch>
-            <a:fillRect/>
-          </a:stretch>
-        </p:blipFill>
-        <p:spPr>
-          <a:xfrm>
-            <a:off x="6355080" y="1874519"/>
-            <a:ext cx="4983480" cy="3250166"/>
-          </a:xfrm>
-          <a:prstGeom prst="rect">
-            <a:avLst/>
-          </a:prstGeom>
-        </p:spPr>
-      </p:pic>
-      <p:sp>
-        <p:nvSpPr>
-          <p:cNvPr id="11" name="TextBox 10"/>
-          <p:cNvSpPr txBox="1"/>
-          <p:nvPr/>
-        </p:nvSpPr>
-        <p:spPr>
-          <a:xfrm>
-            <a:off x="6355080" y="5248656"/>
-            <a:ext cx="4983480" cy="365760"/>
+      <p:sp>
+        <p:nvSpPr>
+          <p:cNvPr id="12" name="Rectangle 11"/>
+          <p:cNvSpPr/>
+          <p:nvPr/>
+        </p:nvSpPr>
+        <p:spPr>
+          <a:xfrm>
+            <a:off x="6281928" y="2514600"/>
+            <a:ext cx="146304" cy="3291840"/>
+          </a:xfrm>
+          <a:prstGeom prst="rect">
+            <a:avLst/>
+          </a:prstGeom>
+          <a:solidFill>
+            <a:srgbClr val="2F5170"/>
+          </a:solidFill>
+          <a:ln>
+            <a:noFill/>
+          </a:ln>
+          <a:effectLst/>
+        </p:spPr>
+        <p:style>
+          <a:lnRef idx="1">
+            <a:schemeClr val="accent1"/>
+          </a:lnRef>
+          <a:fillRef idx="3">
+            <a:schemeClr val="accent1"/>
+          </a:fillRef>
+          <a:effectRef idx="2">
+            <a:schemeClr val="accent1"/>
+          </a:effectRef>
+          <a:fontRef idx="minor">
+            <a:schemeClr val="lt1"/>
+          </a:fontRef>
+        </p:style>
+        <p:txBody>
+          <a:bodyPr rtlCol="0" anchor="ctr"/>
+          <a:lstStyle/>
+          <a:p>
+            <a:pPr algn="ctr"/>
+          </a:p>
+        </p:txBody>
+      </p:sp>
+      <p:sp>
+        <p:nvSpPr>
+          <p:cNvPr id="13" name="TextBox 12"/>
+          <p:cNvSpPr txBox="1"/>
+          <p:nvPr/>
+        </p:nvSpPr>
+        <p:spPr>
+          <a:xfrm>
+            <a:off x="6647688" y="2743200"/>
+            <a:ext cx="4572000" cy="457200"/>
           </a:xfrm>
           <a:prstGeom prst="rect">
             <a:avLst/>
@@ -3936,7 +4126,7 @@
           </a:bodyPr>
           <a:lstStyle/>
           <a:p>
-            <a:pPr algn="ctr">
+            <a:pPr algn="l">
               <a:lnSpc>
                 <a:spcPct val="104000"/>
               </a:lnSpc>
@@ -3945,20 +4135,127 @@
               </a:spcAft>
             </a:pPr>
             <a:r>
-              <a:rPr sz="1200" b="0">
-                <a:solidFill>
-                  <a:srgbClr val="7A7263"/>
-                </a:solidFill>
-                <a:latin typeface="Calibri"/>
-              </a:rPr>
-              <a:t>On Loan — overdue flagged, one-click return</a:t>
-            </a:r>
-          </a:p>
-        </p:txBody>
-      </p:sp>
-      <p:sp>
-        <p:nvSpPr>
-          <p:cNvPr id="12" name="TextBox 11"/>
+              <a:rPr sz="1900" b="1">
+                <a:solidFill>
+                  <a:srgbClr val="26415E"/>
+                </a:solidFill>
+                <a:latin typeface="Georgia"/>
+              </a:rPr>
+              <a:t>Procedures &amp; transactions</a:t>
+            </a:r>
+          </a:p>
+        </p:txBody>
+      </p:sp>
+      <p:sp>
+        <p:nvSpPr>
+          <p:cNvPr id="14" name="TextBox 13"/>
+          <p:cNvSpPr txBox="1"/>
+          <p:nvPr/>
+        </p:nvSpPr>
+        <p:spPr>
+          <a:xfrm>
+            <a:off x="6647688" y="3383280"/>
+            <a:ext cx="4572000" cy="2286000"/>
+          </a:xfrm>
+          <a:prstGeom prst="rect">
+            <a:avLst/>
+          </a:prstGeom>
+          <a:noFill/>
+        </p:spPr>
+        <p:txBody>
+          <a:bodyPr wrap="square" lIns="0" rIns="0" tIns="0" bIns="0">
+            <a:spAutoFit/>
+          </a:bodyPr>
+          <a:lstStyle/>
+          <a:p>
+            <a:pPr>
+              <a:lnSpc>
+                <a:spcPct val="106000"/>
+              </a:lnSpc>
+              <a:spcAft>
+                <a:spcPts val="1200"/>
+              </a:spcAft>
+            </a:pPr>
+            <a:r>
+              <a:rPr sz="1500" b="1">
+                <a:solidFill>
+                  <a:srgbClr val="A8503A"/>
+                </a:solidFill>
+                <a:latin typeface="Calibri"/>
+              </a:rPr>
+              <a:t>—  </a:t>
+            </a:r>
+            <a:r>
+              <a:rPr sz="1500">
+                <a:solidFill>
+                  <a:srgbClr val="2C2A26"/>
+                </a:solidFill>
+                <a:latin typeface="Calibri"/>
+              </a:rPr>
+              <a:t>sp_issue_book / sp_return_book / sp_pay_member_fines</a:t>
+            </a:r>
+          </a:p>
+          <a:p>
+            <a:pPr>
+              <a:lnSpc>
+                <a:spcPct val="106000"/>
+              </a:lnSpc>
+              <a:spcAft>
+                <a:spcPts val="1200"/>
+              </a:spcAft>
+            </a:pPr>
+            <a:r>
+              <a:rPr sz="1500" b="1">
+                <a:solidFill>
+                  <a:srgbClr val="A8503A"/>
+                </a:solidFill>
+                <a:latin typeface="Calibri"/>
+              </a:rPr>
+              <a:t>—  </a:t>
+            </a:r>
+            <a:r>
+              <a:rPr sz="1500">
+                <a:solidFill>
+                  <a:srgbClr val="2C2A26"/>
+                </a:solidFill>
+                <a:latin typeface="Calibri"/>
+              </a:rPr>
+              <a:t>fn_member_balance() — outstanding dues</a:t>
+            </a:r>
+          </a:p>
+          <a:p>
+            <a:pPr>
+              <a:lnSpc>
+                <a:spcPct val="106000"/>
+              </a:lnSpc>
+              <a:spcAft>
+                <a:spcPts val="1200"/>
+              </a:spcAft>
+            </a:pPr>
+            <a:r>
+              <a:rPr sz="1500" b="1">
+                <a:solidFill>
+                  <a:srgbClr val="A8503A"/>
+                </a:solidFill>
+                <a:latin typeface="Calibri"/>
+              </a:rPr>
+              <a:t>—  </a:t>
+            </a:r>
+            <a:r>
+              <a:rPr sz="1500">
+                <a:solidFill>
+                  <a:srgbClr val="2C2A26"/>
+                </a:solidFill>
+                <a:latin typeface="Calibri"/>
+              </a:rPr>
+              <a:t>Wrapped in transactions with ROLLBACK (ACID)</a:t>
+            </a:r>
+          </a:p>
+        </p:txBody>
+      </p:sp>
+      <p:sp>
+        <p:nvSpPr>
+          <p:cNvPr id="15" name="TextBox 14"/>
           <p:cNvSpPr txBox="1"/>
           <p:nvPr/>
         </p:nvSpPr>
@@ -4000,7 +4297,7 @@
       </p:sp>
       <p:sp>
         <p:nvSpPr>
-          <p:cNvPr id="13" name="TextBox 12"/>
+          <p:cNvPr id="16" name="TextBox 15"/>
           <p:cNvSpPr txBox="1"/>
           <p:nvPr/>
         </p:nvSpPr>
@@ -4182,7 +4479,7 @@
                 </a:solidFill>
                 <a:latin typeface="Georgia"/>
               </a:rPr>
-              <a:t>Hosting it online</a:t>
+              <a:t>The live application</a:t>
             </a:r>
           </a:p>
         </p:txBody>
@@ -4239,18 +4536,18 @@
         </p:nvSpPr>
         <p:spPr>
           <a:xfrm>
-            <a:off x="841248" y="1965960"/>
-            <a:ext cx="10515600" cy="950976"/>
+            <a:off x="786384" y="1819655"/>
+            <a:ext cx="5458968" cy="3598438"/>
           </a:xfrm>
           <a:prstGeom prst="roundRect">
             <a:avLst>
-              <a:gd name="adj" fmla="val 10000"/>
+              <a:gd name="adj" fmla="val 3000"/>
             </a:avLst>
           </a:prstGeom>
           <a:solidFill>
             <a:srgbClr val="FFFFFF"/>
           </a:solidFill>
-          <a:ln w="13970">
+          <a:ln w="15240">
             <a:solidFill>
               <a:srgbClr val="E6DCCC"/>
             </a:solidFill>
@@ -4279,25 +4576,95 @@
           </a:p>
         </p:txBody>
       </p:sp>
-      <p:sp>
-        <p:nvSpPr>
-          <p:cNvPr id="7" name="Rectangle 6"/>
+      <p:pic>
+        <p:nvPicPr>
+          <p:cNvPr id="7" name="Picture 6" descr="app_catalogue.png"/>
+          <p:cNvPicPr>
+            <a:picLocks noChangeAspect="1"/>
+          </p:cNvPicPr>
+          <p:nvPr/>
+        </p:nvPicPr>
+        <p:blipFill>
+          <a:blip r:embed="rId2"/>
+          <a:stretch>
+            <a:fillRect/>
+          </a:stretch>
+        </p:blipFill>
+        <p:spPr>
+          <a:xfrm>
+            <a:off x="841248" y="1874519"/>
+            <a:ext cx="5349240" cy="3488710"/>
+          </a:xfrm>
+          <a:prstGeom prst="rect">
+            <a:avLst/>
+          </a:prstGeom>
+        </p:spPr>
+      </p:pic>
+      <p:sp>
+        <p:nvSpPr>
+          <p:cNvPr id="8" name="TextBox 7"/>
+          <p:cNvSpPr txBox="1"/>
+          <p:nvPr/>
+        </p:nvSpPr>
+        <p:spPr>
+          <a:xfrm>
+            <a:off x="841248" y="5468112"/>
+            <a:ext cx="5349240" cy="365760"/>
+          </a:xfrm>
+          <a:prstGeom prst="rect">
+            <a:avLst/>
+          </a:prstGeom>
+          <a:noFill/>
+        </p:spPr>
+        <p:txBody>
+          <a:bodyPr wrap="square" anchor="t" lIns="0" rIns="0" tIns="0" bIns="0">
+            <a:spAutoFit/>
+          </a:bodyPr>
+          <a:lstStyle/>
+          <a:p>
+            <a:pPr algn="ctr">
+              <a:lnSpc>
+                <a:spcPct val="104000"/>
+              </a:lnSpc>
+              <a:spcAft>
+                <a:spcPts val="400"/>
+              </a:spcAft>
+            </a:pPr>
+            <a:r>
+              <a:rPr sz="1200" b="0">
+                <a:solidFill>
+                  <a:srgbClr val="7A7263"/>
+                </a:solidFill>
+                <a:latin typeface="Calibri"/>
+              </a:rPr>
+              <a:t>Catalogue — search + live availability</a:t>
+            </a:r>
+          </a:p>
+        </p:txBody>
+      </p:sp>
+      <p:sp>
+        <p:nvSpPr>
+          <p:cNvPr id="9" name="Rounded Rectangle 8"/>
           <p:cNvSpPr/>
           <p:nvPr/>
         </p:nvSpPr>
         <p:spPr>
           <a:xfrm>
-            <a:off x="841248" y="1965960"/>
-            <a:ext cx="146304" cy="950976"/>
-          </a:xfrm>
-          <a:prstGeom prst="rect">
-            <a:avLst/>
+            <a:off x="6300216" y="1819655"/>
+            <a:ext cx="5093208" cy="3359894"/>
+          </a:xfrm>
+          <a:prstGeom prst="roundRect">
+            <a:avLst>
+              <a:gd name="adj" fmla="val 3000"/>
+            </a:avLst>
           </a:prstGeom>
           <a:solidFill>
-            <a:srgbClr val="A8503A"/>
+            <a:srgbClr val="FFFFFF"/>
           </a:solidFill>
-          <a:ln>
-            <a:noFill/>
+          <a:ln w="15240">
+            <a:solidFill>
+              <a:srgbClr val="E6DCCC"/>
+            </a:solidFill>
           </a:ln>
           <a:effectLst/>
         </p:spPr>
@@ -4323,16 +4690,40 @@
           </a:p>
         </p:txBody>
       </p:sp>
-      <p:sp>
-        <p:nvSpPr>
-          <p:cNvPr id="8" name="TextBox 7"/>
-          <p:cNvSpPr txBox="1"/>
-          <p:nvPr/>
-        </p:nvSpPr>
-        <p:spPr>
-          <a:xfrm>
-            <a:off x="1188720" y="2130552"/>
-            <a:ext cx="3657600" cy="548640"/>
+      <p:pic>
+        <p:nvPicPr>
+          <p:cNvPr id="10" name="Picture 9" descr="app_loans.png"/>
+          <p:cNvPicPr>
+            <a:picLocks noChangeAspect="1"/>
+          </p:cNvPicPr>
+          <p:nvPr/>
+        </p:nvPicPr>
+        <p:blipFill>
+          <a:blip r:embed="rId3"/>
+          <a:stretch>
+            <a:fillRect/>
+          </a:stretch>
+        </p:blipFill>
+        <p:spPr>
+          <a:xfrm>
+            <a:off x="6355080" y="1874519"/>
+            <a:ext cx="4983480" cy="3250166"/>
+          </a:xfrm>
+          <a:prstGeom prst="rect">
+            <a:avLst/>
+          </a:prstGeom>
+        </p:spPr>
+      </p:pic>
+      <p:sp>
+        <p:nvSpPr>
+          <p:cNvPr id="11" name="TextBox 10"/>
+          <p:cNvSpPr txBox="1"/>
+          <p:nvPr/>
+        </p:nvSpPr>
+        <p:spPr>
+          <a:xfrm>
+            <a:off x="6355080" y="5248656"/>
+            <a:ext cx="4983480" cy="365760"/>
           </a:xfrm>
           <a:prstGeom prst="rect">
             <a:avLst/>
@@ -4345,7 +4736,7 @@
           </a:bodyPr>
           <a:lstStyle/>
           <a:p>
-            <a:pPr algn="l">
+            <a:pPr algn="ctr">
               <a:lnSpc>
                 <a:spcPct val="104000"/>
               </a:lnSpc>
@@ -4354,590 +4745,20 @@
               </a:spcAft>
             </a:pPr>
             <a:r>
-              <a:rPr sz="1700" b="1">
-                <a:solidFill>
-                  <a:srgbClr val="26415E"/>
-                </a:solidFill>
-                <a:latin typeface="Georgia"/>
-              </a:rPr>
-              <a:t>Database → Aiven</a:t>
-            </a:r>
-          </a:p>
-        </p:txBody>
-      </p:sp>
-      <p:sp>
-        <p:nvSpPr>
-          <p:cNvPr id="9" name="TextBox 8"/>
-          <p:cNvSpPr txBox="1"/>
-          <p:nvPr/>
-        </p:nvSpPr>
-        <p:spPr>
-          <a:xfrm>
-            <a:off x="4572000" y="2167128"/>
-            <a:ext cx="6583680" cy="640080"/>
-          </a:xfrm>
-          <a:prstGeom prst="rect">
-            <a:avLst/>
-          </a:prstGeom>
-          <a:noFill/>
-        </p:spPr>
-        <p:txBody>
-          <a:bodyPr wrap="square" anchor="t" lIns="0" rIns="0" tIns="0" bIns="0">
-            <a:spAutoFit/>
-          </a:bodyPr>
-          <a:lstStyle/>
-          <a:p>
-            <a:pPr algn="l">
-              <a:lnSpc>
-                <a:spcPct val="106000"/>
-              </a:lnSpc>
-              <a:spcAft>
-                <a:spcPts val="400"/>
-              </a:spcAft>
-            </a:pPr>
-            <a:r>
-              <a:rPr sz="1400" b="0">
+              <a:rPr sz="1200" b="0">
                 <a:solidFill>
                   <a:srgbClr val="7A7263"/>
                 </a:solidFill>
                 <a:latin typeface="Calibri"/>
               </a:rPr>
-              <a:t>Free cloud MySQL; imported sql/init.sql (schema + data + views + procedures).</a:t>
-            </a:r>
-          </a:p>
-        </p:txBody>
-      </p:sp>
-      <p:sp>
-        <p:nvSpPr>
-          <p:cNvPr id="10" name="Rounded Rectangle 9"/>
-          <p:cNvSpPr/>
-          <p:nvPr/>
-        </p:nvSpPr>
-        <p:spPr>
-          <a:xfrm>
-            <a:off x="841248" y="3026663"/>
-            <a:ext cx="10515600" cy="950976"/>
-          </a:xfrm>
-          <a:prstGeom prst="roundRect">
-            <a:avLst>
-              <a:gd name="adj" fmla="val 10000"/>
-            </a:avLst>
-          </a:prstGeom>
-          <a:solidFill>
-            <a:srgbClr val="FFFFFF"/>
-          </a:solidFill>
-          <a:ln w="13970">
-            <a:solidFill>
-              <a:srgbClr val="E6DCCC"/>
-            </a:solidFill>
-          </a:ln>
-          <a:effectLst/>
-        </p:spPr>
-        <p:style>
-          <a:lnRef idx="1">
-            <a:schemeClr val="accent1"/>
-          </a:lnRef>
-          <a:fillRef idx="3">
-            <a:schemeClr val="accent1"/>
-          </a:fillRef>
-          <a:effectRef idx="2">
-            <a:schemeClr val="accent1"/>
-          </a:effectRef>
-          <a:fontRef idx="minor">
-            <a:schemeClr val="lt1"/>
-          </a:fontRef>
-        </p:style>
-        <p:txBody>
-          <a:bodyPr rtlCol="0" anchor="ctr"/>
-          <a:lstStyle/>
-          <a:p>
-            <a:pPr algn="ctr"/>
-          </a:p>
-        </p:txBody>
-      </p:sp>
-      <p:sp>
-        <p:nvSpPr>
-          <p:cNvPr id="11" name="Rectangle 10"/>
-          <p:cNvSpPr/>
-          <p:nvPr/>
-        </p:nvSpPr>
-        <p:spPr>
-          <a:xfrm>
-            <a:off x="841248" y="3026663"/>
-            <a:ext cx="146304" cy="950976"/>
-          </a:xfrm>
-          <a:prstGeom prst="rect">
-            <a:avLst/>
-          </a:prstGeom>
-          <a:solidFill>
-            <a:srgbClr val="A8503A"/>
-          </a:solidFill>
-          <a:ln>
-            <a:noFill/>
-          </a:ln>
-          <a:effectLst/>
-        </p:spPr>
-        <p:style>
-          <a:lnRef idx="1">
-            <a:schemeClr val="accent1"/>
-          </a:lnRef>
-          <a:fillRef idx="3">
-            <a:schemeClr val="accent1"/>
-          </a:fillRef>
-          <a:effectRef idx="2">
-            <a:schemeClr val="accent1"/>
-          </a:effectRef>
-          <a:fontRef idx="minor">
-            <a:schemeClr val="lt1"/>
-          </a:fontRef>
-        </p:style>
-        <p:txBody>
-          <a:bodyPr rtlCol="0" anchor="ctr"/>
-          <a:lstStyle/>
-          <a:p>
-            <a:pPr algn="ctr"/>
+              <a:t>On Loan — overdue flagged, one-click return</a:t>
+            </a:r>
           </a:p>
         </p:txBody>
       </p:sp>
       <p:sp>
         <p:nvSpPr>
           <p:cNvPr id="12" name="TextBox 11"/>
-          <p:cNvSpPr txBox="1"/>
-          <p:nvPr/>
-        </p:nvSpPr>
-        <p:spPr>
-          <a:xfrm>
-            <a:off x="1188720" y="3191256"/>
-            <a:ext cx="3657600" cy="548640"/>
-          </a:xfrm>
-          <a:prstGeom prst="rect">
-            <a:avLst/>
-          </a:prstGeom>
-          <a:noFill/>
-        </p:spPr>
-        <p:txBody>
-          <a:bodyPr wrap="square" anchor="t" lIns="0" rIns="0" tIns="0" bIns="0">
-            <a:spAutoFit/>
-          </a:bodyPr>
-          <a:lstStyle/>
-          <a:p>
-            <a:pPr algn="l">
-              <a:lnSpc>
-                <a:spcPct val="104000"/>
-              </a:lnSpc>
-              <a:spcAft>
-                <a:spcPts val="400"/>
-              </a:spcAft>
-            </a:pPr>
-            <a:r>
-              <a:rPr sz="1700" b="1">
-                <a:solidFill>
-                  <a:srgbClr val="26415E"/>
-                </a:solidFill>
-                <a:latin typeface="Georgia"/>
-              </a:rPr>
-              <a:t>App → Vercel</a:t>
-            </a:r>
-          </a:p>
-        </p:txBody>
-      </p:sp>
-      <p:sp>
-        <p:nvSpPr>
-          <p:cNvPr id="13" name="TextBox 12"/>
-          <p:cNvSpPr txBox="1"/>
-          <p:nvPr/>
-        </p:nvSpPr>
-        <p:spPr>
-          <a:xfrm>
-            <a:off x="4572000" y="3227832"/>
-            <a:ext cx="6583680" cy="640080"/>
-          </a:xfrm>
-          <a:prstGeom prst="rect">
-            <a:avLst/>
-          </a:prstGeom>
-          <a:noFill/>
-        </p:spPr>
-        <p:txBody>
-          <a:bodyPr wrap="square" anchor="t" lIns="0" rIns="0" tIns="0" bIns="0">
-            <a:spAutoFit/>
-          </a:bodyPr>
-          <a:lstStyle/>
-          <a:p>
-            <a:pPr algn="l">
-              <a:lnSpc>
-                <a:spcPct val="106000"/>
-              </a:lnSpc>
-              <a:spcAft>
-                <a:spcPts val="400"/>
-              </a:spcAft>
-            </a:pPr>
-            <a:r>
-              <a:rPr sz="1400" b="0">
-                <a:solidFill>
-                  <a:srgbClr val="7A7263"/>
-                </a:solidFill>
-                <a:latin typeface="Calibri"/>
-              </a:rPr>
-              <a:t>Imported the GitHub repo; static front-end + serverless API.</a:t>
-            </a:r>
-          </a:p>
-        </p:txBody>
-      </p:sp>
-      <p:sp>
-        <p:nvSpPr>
-          <p:cNvPr id="14" name="Rounded Rectangle 13"/>
-          <p:cNvSpPr/>
-          <p:nvPr/>
-        </p:nvSpPr>
-        <p:spPr>
-          <a:xfrm>
-            <a:off x="841248" y="4087368"/>
-            <a:ext cx="10515600" cy="950976"/>
-          </a:xfrm>
-          <a:prstGeom prst="roundRect">
-            <a:avLst>
-              <a:gd name="adj" fmla="val 10000"/>
-            </a:avLst>
-          </a:prstGeom>
-          <a:solidFill>
-            <a:srgbClr val="FFFFFF"/>
-          </a:solidFill>
-          <a:ln w="13970">
-            <a:solidFill>
-              <a:srgbClr val="E6DCCC"/>
-            </a:solidFill>
-          </a:ln>
-          <a:effectLst/>
-        </p:spPr>
-        <p:style>
-          <a:lnRef idx="1">
-            <a:schemeClr val="accent1"/>
-          </a:lnRef>
-          <a:fillRef idx="3">
-            <a:schemeClr val="accent1"/>
-          </a:fillRef>
-          <a:effectRef idx="2">
-            <a:schemeClr val="accent1"/>
-          </a:effectRef>
-          <a:fontRef idx="minor">
-            <a:schemeClr val="lt1"/>
-          </a:fontRef>
-        </p:style>
-        <p:txBody>
-          <a:bodyPr rtlCol="0" anchor="ctr"/>
-          <a:lstStyle/>
-          <a:p>
-            <a:pPr algn="ctr"/>
-          </a:p>
-        </p:txBody>
-      </p:sp>
-      <p:sp>
-        <p:nvSpPr>
-          <p:cNvPr id="15" name="Rectangle 14"/>
-          <p:cNvSpPr/>
-          <p:nvPr/>
-        </p:nvSpPr>
-        <p:spPr>
-          <a:xfrm>
-            <a:off x="841248" y="4087368"/>
-            <a:ext cx="146304" cy="950976"/>
-          </a:xfrm>
-          <a:prstGeom prst="rect">
-            <a:avLst/>
-          </a:prstGeom>
-          <a:solidFill>
-            <a:srgbClr val="A8503A"/>
-          </a:solidFill>
-          <a:ln>
-            <a:noFill/>
-          </a:ln>
-          <a:effectLst/>
-        </p:spPr>
-        <p:style>
-          <a:lnRef idx="1">
-            <a:schemeClr val="accent1"/>
-          </a:lnRef>
-          <a:fillRef idx="3">
-            <a:schemeClr val="accent1"/>
-          </a:fillRef>
-          <a:effectRef idx="2">
-            <a:schemeClr val="accent1"/>
-          </a:effectRef>
-          <a:fontRef idx="minor">
-            <a:schemeClr val="lt1"/>
-          </a:fontRef>
-        </p:style>
-        <p:txBody>
-          <a:bodyPr rtlCol="0" anchor="ctr"/>
-          <a:lstStyle/>
-          <a:p>
-            <a:pPr algn="ctr"/>
-          </a:p>
-        </p:txBody>
-      </p:sp>
-      <p:sp>
-        <p:nvSpPr>
-          <p:cNvPr id="16" name="TextBox 15"/>
-          <p:cNvSpPr txBox="1"/>
-          <p:nvPr/>
-        </p:nvSpPr>
-        <p:spPr>
-          <a:xfrm>
-            <a:off x="1188720" y="4251959"/>
-            <a:ext cx="3657600" cy="548640"/>
-          </a:xfrm>
-          <a:prstGeom prst="rect">
-            <a:avLst/>
-          </a:prstGeom>
-          <a:noFill/>
-        </p:spPr>
-        <p:txBody>
-          <a:bodyPr wrap="square" anchor="t" lIns="0" rIns="0" tIns="0" bIns="0">
-            <a:spAutoFit/>
-          </a:bodyPr>
-          <a:lstStyle/>
-          <a:p>
-            <a:pPr algn="l">
-              <a:lnSpc>
-                <a:spcPct val="104000"/>
-              </a:lnSpc>
-              <a:spcAft>
-                <a:spcPts val="400"/>
-              </a:spcAft>
-            </a:pPr>
-            <a:r>
-              <a:rPr sz="1700" b="1">
-                <a:solidFill>
-                  <a:srgbClr val="26415E"/>
-                </a:solidFill>
-                <a:latin typeface="Georgia"/>
-              </a:rPr>
-              <a:t>Wiring</a:t>
-            </a:r>
-          </a:p>
-        </p:txBody>
-      </p:sp>
-      <p:sp>
-        <p:nvSpPr>
-          <p:cNvPr id="17" name="TextBox 16"/>
-          <p:cNvSpPr txBox="1"/>
-          <p:nvPr/>
-        </p:nvSpPr>
-        <p:spPr>
-          <a:xfrm>
-            <a:off x="4572000" y="4288536"/>
-            <a:ext cx="6583680" cy="640080"/>
-          </a:xfrm>
-          <a:prstGeom prst="rect">
-            <a:avLst/>
-          </a:prstGeom>
-          <a:noFill/>
-        </p:spPr>
-        <p:txBody>
-          <a:bodyPr wrap="square" anchor="t" lIns="0" rIns="0" tIns="0" bIns="0">
-            <a:spAutoFit/>
-          </a:bodyPr>
-          <a:lstStyle/>
-          <a:p>
-            <a:pPr algn="l">
-              <a:lnSpc>
-                <a:spcPct val="106000"/>
-              </a:lnSpc>
-              <a:spcAft>
-                <a:spcPts val="400"/>
-              </a:spcAft>
-            </a:pPr>
-            <a:r>
-              <a:rPr sz="1400" b="0">
-                <a:solidFill>
-                  <a:srgbClr val="7A7263"/>
-                </a:solidFill>
-                <a:latin typeface="Calibri"/>
-              </a:rPr>
-              <a:t>Set MYSQL_URL &amp; DB_SSL environment variables, then redeployed.</a:t>
-            </a:r>
-          </a:p>
-        </p:txBody>
-      </p:sp>
-      <p:sp>
-        <p:nvSpPr>
-          <p:cNvPr id="18" name="Rounded Rectangle 17"/>
-          <p:cNvSpPr/>
-          <p:nvPr/>
-        </p:nvSpPr>
-        <p:spPr>
-          <a:xfrm>
-            <a:off x="841248" y="5148072"/>
-            <a:ext cx="10515600" cy="950976"/>
-          </a:xfrm>
-          <a:prstGeom prst="roundRect">
-            <a:avLst>
-              <a:gd name="adj" fmla="val 10000"/>
-            </a:avLst>
-          </a:prstGeom>
-          <a:solidFill>
-            <a:srgbClr val="FFFFFF"/>
-          </a:solidFill>
-          <a:ln w="13970">
-            <a:solidFill>
-              <a:srgbClr val="E6DCCC"/>
-            </a:solidFill>
-          </a:ln>
-          <a:effectLst/>
-        </p:spPr>
-        <p:style>
-          <a:lnRef idx="1">
-            <a:schemeClr val="accent1"/>
-          </a:lnRef>
-          <a:fillRef idx="3">
-            <a:schemeClr val="accent1"/>
-          </a:fillRef>
-          <a:effectRef idx="2">
-            <a:schemeClr val="accent1"/>
-          </a:effectRef>
-          <a:fontRef idx="minor">
-            <a:schemeClr val="lt1"/>
-          </a:fontRef>
-        </p:style>
-        <p:txBody>
-          <a:bodyPr rtlCol="0" anchor="ctr"/>
-          <a:lstStyle/>
-          <a:p>
-            <a:pPr algn="ctr"/>
-          </a:p>
-        </p:txBody>
-      </p:sp>
-      <p:sp>
-        <p:nvSpPr>
-          <p:cNvPr id="19" name="Rectangle 18"/>
-          <p:cNvSpPr/>
-          <p:nvPr/>
-        </p:nvSpPr>
-        <p:spPr>
-          <a:xfrm>
-            <a:off x="841248" y="5148072"/>
-            <a:ext cx="146304" cy="950976"/>
-          </a:xfrm>
-          <a:prstGeom prst="rect">
-            <a:avLst/>
-          </a:prstGeom>
-          <a:solidFill>
-            <a:srgbClr val="A8503A"/>
-          </a:solidFill>
-          <a:ln>
-            <a:noFill/>
-          </a:ln>
-          <a:effectLst/>
-        </p:spPr>
-        <p:style>
-          <a:lnRef idx="1">
-            <a:schemeClr val="accent1"/>
-          </a:lnRef>
-          <a:fillRef idx="3">
-            <a:schemeClr val="accent1"/>
-          </a:fillRef>
-          <a:effectRef idx="2">
-            <a:schemeClr val="accent1"/>
-          </a:effectRef>
-          <a:fontRef idx="minor">
-            <a:schemeClr val="lt1"/>
-          </a:fontRef>
-        </p:style>
-        <p:txBody>
-          <a:bodyPr rtlCol="0" anchor="ctr"/>
-          <a:lstStyle/>
-          <a:p>
-            <a:pPr algn="ctr"/>
-          </a:p>
-        </p:txBody>
-      </p:sp>
-      <p:sp>
-        <p:nvSpPr>
-          <p:cNvPr id="20" name="TextBox 19"/>
-          <p:cNvSpPr txBox="1"/>
-          <p:nvPr/>
-        </p:nvSpPr>
-        <p:spPr>
-          <a:xfrm>
-            <a:off x="1188720" y="5312664"/>
-            <a:ext cx="3657600" cy="548640"/>
-          </a:xfrm>
-          <a:prstGeom prst="rect">
-            <a:avLst/>
-          </a:prstGeom>
-          <a:noFill/>
-        </p:spPr>
-        <p:txBody>
-          <a:bodyPr wrap="square" anchor="t" lIns="0" rIns="0" tIns="0" bIns="0">
-            <a:spAutoFit/>
-          </a:bodyPr>
-          <a:lstStyle/>
-          <a:p>
-            <a:pPr algn="l">
-              <a:lnSpc>
-                <a:spcPct val="104000"/>
-              </a:lnSpc>
-              <a:spcAft>
-                <a:spcPts val="400"/>
-              </a:spcAft>
-            </a:pPr>
-            <a:r>
-              <a:rPr sz="1700" b="1">
-                <a:solidFill>
-                  <a:srgbClr val="26415E"/>
-                </a:solidFill>
-                <a:latin typeface="Georgia"/>
-              </a:rPr>
-              <a:t>Result</a:t>
-            </a:r>
-          </a:p>
-        </p:txBody>
-      </p:sp>
-      <p:sp>
-        <p:nvSpPr>
-          <p:cNvPr id="21" name="TextBox 20"/>
-          <p:cNvSpPr txBox="1"/>
-          <p:nvPr/>
-        </p:nvSpPr>
-        <p:spPr>
-          <a:xfrm>
-            <a:off x="4572000" y="5349240"/>
-            <a:ext cx="6583680" cy="640080"/>
-          </a:xfrm>
-          <a:prstGeom prst="rect">
-            <a:avLst/>
-          </a:prstGeom>
-          <a:noFill/>
-        </p:spPr>
-        <p:txBody>
-          <a:bodyPr wrap="square" anchor="t" lIns="0" rIns="0" tIns="0" bIns="0">
-            <a:spAutoFit/>
-          </a:bodyPr>
-          <a:lstStyle/>
-          <a:p>
-            <a:pPr algn="l">
-              <a:lnSpc>
-                <a:spcPct val="106000"/>
-              </a:lnSpc>
-              <a:spcAft>
-                <a:spcPts val="400"/>
-              </a:spcAft>
-            </a:pPr>
-            <a:r>
-              <a:rPr sz="1400" b="0">
-                <a:solidFill>
-                  <a:srgbClr val="7A7263"/>
-                </a:solidFill>
-                <a:latin typeface="Calibri"/>
-              </a:rPr>
-              <a:t>A public URL — full front-end ↔ backend ↔ live database.</a:t>
-            </a:r>
-          </a:p>
-        </p:txBody>
-      </p:sp>
-      <p:sp>
-        <p:nvSpPr>
-          <p:cNvPr id="22" name="TextBox 21"/>
           <p:cNvSpPr txBox="1"/>
           <p:nvPr/>
         </p:nvSpPr>
@@ -4979,7 +4800,7 @@
       </p:sp>
       <p:sp>
         <p:nvSpPr>
-          <p:cNvPr id="23" name="TextBox 22"/>
+          <p:cNvPr id="13" name="TextBox 12"/>
           <p:cNvSpPr txBox="1"/>
           <p:nvPr/>
         </p:nvSpPr>
@@ -5110,7 +4931,7 @@
                 </a:solidFill>
                 <a:latin typeface="Calibri"/>
               </a:rPr>
-              <a:t>PART 4   </a:t>
+              <a:t>PART 3   </a:t>
             </a:r>
             <a:r>
               <a:rPr sz="1300" b="1">
@@ -5119,7 +4940,7 @@
                 </a:solidFill>
                 <a:latin typeface="Calibri"/>
               </a:rPr>
-              <a:t>WALKTHROUGH</a:t>
+              <a:t>WHAT WE BUILT</a:t>
             </a:r>
           </a:p>
         </p:txBody>
@@ -5155,13 +4976,13 @@
               </a:spcAft>
             </a:pPr>
             <a:r>
-              <a:rPr sz="3000" b="1">
+              <a:rPr sz="3400" b="1">
                 <a:solidFill>
                   <a:srgbClr val="26415E"/>
                 </a:solidFill>
                 <a:latin typeface="Georgia"/>
               </a:rPr>
-              <a:t>Step 1–4 · Plan &amp; Design</a:t>
+              <a:t>Hosting it online</a:t>
             </a:r>
           </a:p>
         </p:txBody>
@@ -5212,20 +5033,68 @@
       </p:sp>
       <p:sp>
         <p:nvSpPr>
-          <p:cNvPr id="6" name="Oval 5"/>
+          <p:cNvPr id="6" name="Rounded Rectangle 5"/>
           <p:cNvSpPr/>
           <p:nvPr/>
         </p:nvSpPr>
         <p:spPr>
           <a:xfrm>
-            <a:off x="868680" y="1965960"/>
-            <a:ext cx="502920" cy="502920"/>
-          </a:xfrm>
-          <a:prstGeom prst="ellipse">
-            <a:avLst/>
+            <a:off x="841248" y="1965960"/>
+            <a:ext cx="10515600" cy="950976"/>
+          </a:xfrm>
+          <a:prstGeom prst="roundRect">
+            <a:avLst>
+              <a:gd name="adj" fmla="val 10000"/>
+            </a:avLst>
           </a:prstGeom>
           <a:solidFill>
-            <a:srgbClr val="26415E"/>
+            <a:srgbClr val="FFFFFF"/>
+          </a:solidFill>
+          <a:ln w="13970">
+            <a:solidFill>
+              <a:srgbClr val="E6DCCC"/>
+            </a:solidFill>
+          </a:ln>
+          <a:effectLst/>
+        </p:spPr>
+        <p:style>
+          <a:lnRef idx="1">
+            <a:schemeClr val="accent1"/>
+          </a:lnRef>
+          <a:fillRef idx="3">
+            <a:schemeClr val="accent1"/>
+          </a:fillRef>
+          <a:effectRef idx="2">
+            <a:schemeClr val="accent1"/>
+          </a:effectRef>
+          <a:fontRef idx="minor">
+            <a:schemeClr val="lt1"/>
+          </a:fontRef>
+        </p:style>
+        <p:txBody>
+          <a:bodyPr rtlCol="0" anchor="ctr"/>
+          <a:lstStyle/>
+          <a:p>
+            <a:pPr algn="ctr"/>
+          </a:p>
+        </p:txBody>
+      </p:sp>
+      <p:sp>
+        <p:nvSpPr>
+          <p:cNvPr id="7" name="Rectangle 6"/>
+          <p:cNvSpPr/>
+          <p:nvPr/>
+        </p:nvSpPr>
+        <p:spPr>
+          <a:xfrm>
+            <a:off x="841248" y="1965960"/>
+            <a:ext cx="146304" cy="950976"/>
+          </a:xfrm>
+          <a:prstGeom prst="rect">
+            <a:avLst/>
+          </a:prstGeom>
+          <a:solidFill>
+            <a:srgbClr val="A8503A"/>
           </a:solidFill>
           <a:ln>
             <a:noFill/>
@@ -5251,28 +5120,19 @@
           <a:lstStyle/>
           <a:p>
             <a:pPr algn="ctr"/>
-            <a:r>
-              <a:rPr sz="1500" b="1">
-                <a:solidFill>
-                  <a:srgbClr val="FFFFFF"/>
-                </a:solidFill>
-                <a:latin typeface="Calibri"/>
-              </a:rPr>
-              <a:t>1</a:t>
-            </a:r>
-          </a:p>
-        </p:txBody>
-      </p:sp>
-      <p:sp>
-        <p:nvSpPr>
-          <p:cNvPr id="7" name="TextBox 6"/>
-          <p:cNvSpPr txBox="1"/>
-          <p:nvPr/>
-        </p:nvSpPr>
-        <p:spPr>
-          <a:xfrm>
-            <a:off x="1600200" y="1947672"/>
-            <a:ext cx="9692640" cy="457200"/>
+          </a:p>
+        </p:txBody>
+      </p:sp>
+      <p:sp>
+        <p:nvSpPr>
+          <p:cNvPr id="8" name="TextBox 7"/>
+          <p:cNvSpPr txBox="1"/>
+          <p:nvPr/>
+        </p:nvSpPr>
+        <p:spPr>
+          <a:xfrm>
+            <a:off x="1188720" y="2130552"/>
+            <a:ext cx="3657600" cy="548640"/>
           </a:xfrm>
           <a:prstGeom prst="rect">
             <a:avLst/>
@@ -5298,23 +5158,23 @@
                 <a:solidFill>
                   <a:srgbClr val="26415E"/>
                 </a:solidFill>
-                <a:latin typeface="Calibri"/>
-              </a:rPr>
-              <a:t>Understand the problem</a:t>
-            </a:r>
-          </a:p>
-        </p:txBody>
-      </p:sp>
-      <p:sp>
-        <p:nvSpPr>
-          <p:cNvPr id="8" name="TextBox 7"/>
-          <p:cNvSpPr txBox="1"/>
-          <p:nvPr/>
-        </p:nvSpPr>
-        <p:spPr>
-          <a:xfrm>
-            <a:off x="1600200" y="2368296"/>
-            <a:ext cx="9692640" cy="548640"/>
+                <a:latin typeface="Georgia"/>
+              </a:rPr>
+              <a:t>Database → Aiven</a:t>
+            </a:r>
+          </a:p>
+        </p:txBody>
+      </p:sp>
+      <p:sp>
+        <p:nvSpPr>
+          <p:cNvPr id="9" name="TextBox 8"/>
+          <p:cNvSpPr txBox="1"/>
+          <p:nvPr/>
+        </p:nvSpPr>
+        <p:spPr>
+          <a:xfrm>
+            <a:off x="4572000" y="2167128"/>
+            <a:ext cx="6583680" cy="640080"/>
           </a:xfrm>
           <a:prstGeom prst="rect">
             <a:avLst/>
@@ -5329,40 +5189,88 @@
           <a:p>
             <a:pPr algn="l">
               <a:lnSpc>
-                <a:spcPct val="105000"/>
+                <a:spcPct val="106000"/>
               </a:lnSpc>
               <a:spcAft>
                 <a:spcPts val="400"/>
               </a:spcAft>
             </a:pPr>
             <a:r>
-              <a:rPr sz="1350" b="0">
+              <a:rPr sz="1400" b="0">
                 <a:solidFill>
                   <a:srgbClr val="7A7263"/>
                 </a:solidFill>
                 <a:latin typeface="Calibri"/>
               </a:rPr>
-              <a:t>List what a library does; turn the nouns into entities (tables).</a:t>
-            </a:r>
-          </a:p>
-        </p:txBody>
-      </p:sp>
-      <p:sp>
-        <p:nvSpPr>
-          <p:cNvPr id="9" name="Oval 8"/>
+              <a:t>Free cloud MySQL; imported sql/init.sql (schema + data + views + procedures).</a:t>
+            </a:r>
+          </a:p>
+        </p:txBody>
+      </p:sp>
+      <p:sp>
+        <p:nvSpPr>
+          <p:cNvPr id="10" name="Rounded Rectangle 9"/>
           <p:cNvSpPr/>
           <p:nvPr/>
         </p:nvSpPr>
         <p:spPr>
           <a:xfrm>
-            <a:off x="868680" y="2898648"/>
-            <a:ext cx="502920" cy="502920"/>
-          </a:xfrm>
-          <a:prstGeom prst="ellipse">
-            <a:avLst/>
+            <a:off x="841248" y="3026663"/>
+            <a:ext cx="10515600" cy="950976"/>
+          </a:xfrm>
+          <a:prstGeom prst="roundRect">
+            <a:avLst>
+              <a:gd name="adj" fmla="val 10000"/>
+            </a:avLst>
           </a:prstGeom>
           <a:solidFill>
-            <a:srgbClr val="26415E"/>
+            <a:srgbClr val="FFFFFF"/>
+          </a:solidFill>
+          <a:ln w="13970">
+            <a:solidFill>
+              <a:srgbClr val="E6DCCC"/>
+            </a:solidFill>
+          </a:ln>
+          <a:effectLst/>
+        </p:spPr>
+        <p:style>
+          <a:lnRef idx="1">
+            <a:schemeClr val="accent1"/>
+          </a:lnRef>
+          <a:fillRef idx="3">
+            <a:schemeClr val="accent1"/>
+          </a:fillRef>
+          <a:effectRef idx="2">
+            <a:schemeClr val="accent1"/>
+          </a:effectRef>
+          <a:fontRef idx="minor">
+            <a:schemeClr val="lt1"/>
+          </a:fontRef>
+        </p:style>
+        <p:txBody>
+          <a:bodyPr rtlCol="0" anchor="ctr"/>
+          <a:lstStyle/>
+          <a:p>
+            <a:pPr algn="ctr"/>
+          </a:p>
+        </p:txBody>
+      </p:sp>
+      <p:sp>
+        <p:nvSpPr>
+          <p:cNvPr id="11" name="Rectangle 10"/>
+          <p:cNvSpPr/>
+          <p:nvPr/>
+        </p:nvSpPr>
+        <p:spPr>
+          <a:xfrm>
+            <a:off x="841248" y="3026663"/>
+            <a:ext cx="146304" cy="950976"/>
+          </a:xfrm>
+          <a:prstGeom prst="rect">
+            <a:avLst/>
+          </a:prstGeom>
+          <a:solidFill>
+            <a:srgbClr val="A8503A"/>
           </a:solidFill>
           <a:ln>
             <a:noFill/>
@@ -5388,28 +5296,19 @@
           <a:lstStyle/>
           <a:p>
             <a:pPr algn="ctr"/>
-            <a:r>
-              <a:rPr sz="1500" b="1">
-                <a:solidFill>
-                  <a:srgbClr val="FFFFFF"/>
-                </a:solidFill>
-                <a:latin typeface="Calibri"/>
-              </a:rPr>
-              <a:t>2</a:t>
-            </a:r>
-          </a:p>
-        </p:txBody>
-      </p:sp>
-      <p:sp>
-        <p:nvSpPr>
-          <p:cNvPr id="10" name="TextBox 9"/>
-          <p:cNvSpPr txBox="1"/>
-          <p:nvPr/>
-        </p:nvSpPr>
-        <p:spPr>
-          <a:xfrm>
-            <a:off x="1600200" y="2880360"/>
-            <a:ext cx="9692640" cy="457200"/>
+          </a:p>
+        </p:txBody>
+      </p:sp>
+      <p:sp>
+        <p:nvSpPr>
+          <p:cNvPr id="12" name="TextBox 11"/>
+          <p:cNvSpPr txBox="1"/>
+          <p:nvPr/>
+        </p:nvSpPr>
+        <p:spPr>
+          <a:xfrm>
+            <a:off x="1188720" y="3191256"/>
+            <a:ext cx="3657600" cy="548640"/>
           </a:xfrm>
           <a:prstGeom prst="rect">
             <a:avLst/>
@@ -5435,23 +5334,23 @@
                 <a:solidFill>
                   <a:srgbClr val="26415E"/>
                 </a:solidFill>
-                <a:latin typeface="Calibri"/>
-              </a:rPr>
-              <a:t>Map relationships</a:t>
-            </a:r>
-          </a:p>
-        </p:txBody>
-      </p:sp>
-      <p:sp>
-        <p:nvSpPr>
-          <p:cNvPr id="11" name="TextBox 10"/>
-          <p:cNvSpPr txBox="1"/>
-          <p:nvPr/>
-        </p:nvSpPr>
-        <p:spPr>
-          <a:xfrm>
-            <a:off x="1600200" y="3300984"/>
-            <a:ext cx="9692640" cy="548640"/>
+                <a:latin typeface="Georgia"/>
+              </a:rPr>
+              <a:t>App → Vercel</a:t>
+            </a:r>
+          </a:p>
+        </p:txBody>
+      </p:sp>
+      <p:sp>
+        <p:nvSpPr>
+          <p:cNvPr id="13" name="TextBox 12"/>
+          <p:cNvSpPr txBox="1"/>
+          <p:nvPr/>
+        </p:nvSpPr>
+        <p:spPr>
+          <a:xfrm>
+            <a:off x="4572000" y="3227832"/>
+            <a:ext cx="6583680" cy="640080"/>
           </a:xfrm>
           <a:prstGeom prst="rect">
             <a:avLst/>
@@ -5466,40 +5365,88 @@
           <a:p>
             <a:pPr algn="l">
               <a:lnSpc>
-                <a:spcPct val="105000"/>
+                <a:spcPct val="106000"/>
               </a:lnSpc>
               <a:spcAft>
                 <a:spcPts val="400"/>
               </a:spcAft>
             </a:pPr>
             <a:r>
-              <a:rPr sz="1350" b="0">
+              <a:rPr sz="1400" b="0">
                 <a:solidFill>
                   <a:srgbClr val="7A7263"/>
                 </a:solidFill>
                 <a:latin typeface="Calibri"/>
               </a:rPr>
-              <a:t>Decide 1:M, M:N, recursive and 1:1 links between entities.</a:t>
-            </a:r>
-          </a:p>
-        </p:txBody>
-      </p:sp>
-      <p:sp>
-        <p:nvSpPr>
-          <p:cNvPr id="12" name="Oval 11"/>
+              <a:t>Imported the GitHub repo; static front-end + serverless API.</a:t>
+            </a:r>
+          </a:p>
+        </p:txBody>
+      </p:sp>
+      <p:sp>
+        <p:nvSpPr>
+          <p:cNvPr id="14" name="Rounded Rectangle 13"/>
           <p:cNvSpPr/>
           <p:nvPr/>
         </p:nvSpPr>
         <p:spPr>
           <a:xfrm>
-            <a:off x="868680" y="3831335"/>
-            <a:ext cx="502920" cy="502920"/>
-          </a:xfrm>
-          <a:prstGeom prst="ellipse">
-            <a:avLst/>
+            <a:off x="841248" y="4087368"/>
+            <a:ext cx="10515600" cy="950976"/>
+          </a:xfrm>
+          <a:prstGeom prst="roundRect">
+            <a:avLst>
+              <a:gd name="adj" fmla="val 10000"/>
+            </a:avLst>
           </a:prstGeom>
           <a:solidFill>
-            <a:srgbClr val="26415E"/>
+            <a:srgbClr val="FFFFFF"/>
+          </a:solidFill>
+          <a:ln w="13970">
+            <a:solidFill>
+              <a:srgbClr val="E6DCCC"/>
+            </a:solidFill>
+          </a:ln>
+          <a:effectLst/>
+        </p:spPr>
+        <p:style>
+          <a:lnRef idx="1">
+            <a:schemeClr val="accent1"/>
+          </a:lnRef>
+          <a:fillRef idx="3">
+            <a:schemeClr val="accent1"/>
+          </a:fillRef>
+          <a:effectRef idx="2">
+            <a:schemeClr val="accent1"/>
+          </a:effectRef>
+          <a:fontRef idx="minor">
+            <a:schemeClr val="lt1"/>
+          </a:fontRef>
+        </p:style>
+        <p:txBody>
+          <a:bodyPr rtlCol="0" anchor="ctr"/>
+          <a:lstStyle/>
+          <a:p>
+            <a:pPr algn="ctr"/>
+          </a:p>
+        </p:txBody>
+      </p:sp>
+      <p:sp>
+        <p:nvSpPr>
+          <p:cNvPr id="15" name="Rectangle 14"/>
+          <p:cNvSpPr/>
+          <p:nvPr/>
+        </p:nvSpPr>
+        <p:spPr>
+          <a:xfrm>
+            <a:off x="841248" y="4087368"/>
+            <a:ext cx="146304" cy="950976"/>
+          </a:xfrm>
+          <a:prstGeom prst="rect">
+            <a:avLst/>
+          </a:prstGeom>
+          <a:solidFill>
+            <a:srgbClr val="A8503A"/>
           </a:solidFill>
           <a:ln>
             <a:noFill/>
@@ -5525,28 +5472,19 @@
           <a:lstStyle/>
           <a:p>
             <a:pPr algn="ctr"/>
-            <a:r>
-              <a:rPr sz="1500" b="1">
-                <a:solidFill>
-                  <a:srgbClr val="FFFFFF"/>
-                </a:solidFill>
-                <a:latin typeface="Calibri"/>
-              </a:rPr>
-              <a:t>3</a:t>
-            </a:r>
-          </a:p>
-        </p:txBody>
-      </p:sp>
-      <p:sp>
-        <p:nvSpPr>
-          <p:cNvPr id="13" name="TextBox 12"/>
-          <p:cNvSpPr txBox="1"/>
-          <p:nvPr/>
-        </p:nvSpPr>
-        <p:spPr>
-          <a:xfrm>
-            <a:off x="1600200" y="3813048"/>
-            <a:ext cx="9692640" cy="457200"/>
+          </a:p>
+        </p:txBody>
+      </p:sp>
+      <p:sp>
+        <p:nvSpPr>
+          <p:cNvPr id="16" name="TextBox 15"/>
+          <p:cNvSpPr txBox="1"/>
+          <p:nvPr/>
+        </p:nvSpPr>
+        <p:spPr>
+          <a:xfrm>
+            <a:off x="1188720" y="4251959"/>
+            <a:ext cx="3657600" cy="548640"/>
           </a:xfrm>
           <a:prstGeom prst="rect">
             <a:avLst/>
@@ -5572,23 +5510,23 @@
                 <a:solidFill>
                   <a:srgbClr val="26415E"/>
                 </a:solidFill>
-                <a:latin typeface="Calibri"/>
-              </a:rPr>
-              <a:t>Draw the ER diagram</a:t>
-            </a:r>
-          </a:p>
-        </p:txBody>
-      </p:sp>
-      <p:sp>
-        <p:nvSpPr>
-          <p:cNvPr id="14" name="TextBox 13"/>
-          <p:cNvSpPr txBox="1"/>
-          <p:nvPr/>
-        </p:nvSpPr>
-        <p:spPr>
-          <a:xfrm>
-            <a:off x="1600200" y="4233672"/>
-            <a:ext cx="9692640" cy="548640"/>
+                <a:latin typeface="Georgia"/>
+              </a:rPr>
+              <a:t>Wiring</a:t>
+            </a:r>
+          </a:p>
+        </p:txBody>
+      </p:sp>
+      <p:sp>
+        <p:nvSpPr>
+          <p:cNvPr id="17" name="TextBox 16"/>
+          <p:cNvSpPr txBox="1"/>
+          <p:nvPr/>
+        </p:nvSpPr>
+        <p:spPr>
+          <a:xfrm>
+            <a:off x="4572000" y="4288536"/>
+            <a:ext cx="6583680" cy="640080"/>
           </a:xfrm>
           <a:prstGeom prst="rect">
             <a:avLst/>
@@ -5603,40 +5541,88 @@
           <a:p>
             <a:pPr algn="l">
               <a:lnSpc>
-                <a:spcPct val="105000"/>
+                <a:spcPct val="106000"/>
               </a:lnSpc>
               <a:spcAft>
                 <a:spcPts val="400"/>
               </a:spcAft>
             </a:pPr>
             <a:r>
-              <a:rPr sz="1350" b="0">
+              <a:rPr sz="1400" b="0">
                 <a:solidFill>
                   <a:srgbClr val="7A7263"/>
                 </a:solidFill>
                 <a:latin typeface="Calibri"/>
               </a:rPr>
-              <a:t>Blueprint all 11 entities before writing any SQL.</a:t>
-            </a:r>
-          </a:p>
-        </p:txBody>
-      </p:sp>
-      <p:sp>
-        <p:nvSpPr>
-          <p:cNvPr id="15" name="Oval 14"/>
+              <a:t>Set MYSQL_URL &amp; DB_SSL environment variables, then redeployed.</a:t>
+            </a:r>
+          </a:p>
+        </p:txBody>
+      </p:sp>
+      <p:sp>
+        <p:nvSpPr>
+          <p:cNvPr id="18" name="Rounded Rectangle 17"/>
           <p:cNvSpPr/>
           <p:nvPr/>
         </p:nvSpPr>
         <p:spPr>
           <a:xfrm>
-            <a:off x="868680" y="4764023"/>
-            <a:ext cx="502920" cy="502920"/>
-          </a:xfrm>
-          <a:prstGeom prst="ellipse">
-            <a:avLst/>
+            <a:off x="841248" y="5148072"/>
+            <a:ext cx="10515600" cy="950976"/>
+          </a:xfrm>
+          <a:prstGeom prst="roundRect">
+            <a:avLst>
+              <a:gd name="adj" fmla="val 10000"/>
+            </a:avLst>
           </a:prstGeom>
           <a:solidFill>
-            <a:srgbClr val="26415E"/>
+            <a:srgbClr val="FFFFFF"/>
+          </a:solidFill>
+          <a:ln w="13970">
+            <a:solidFill>
+              <a:srgbClr val="E6DCCC"/>
+            </a:solidFill>
+          </a:ln>
+          <a:effectLst/>
+        </p:spPr>
+        <p:style>
+          <a:lnRef idx="1">
+            <a:schemeClr val="accent1"/>
+          </a:lnRef>
+          <a:fillRef idx="3">
+            <a:schemeClr val="accent1"/>
+          </a:fillRef>
+          <a:effectRef idx="2">
+            <a:schemeClr val="accent1"/>
+          </a:effectRef>
+          <a:fontRef idx="minor">
+            <a:schemeClr val="lt1"/>
+          </a:fontRef>
+        </p:style>
+        <p:txBody>
+          <a:bodyPr rtlCol="0" anchor="ctr"/>
+          <a:lstStyle/>
+          <a:p>
+            <a:pPr algn="ctr"/>
+          </a:p>
+        </p:txBody>
+      </p:sp>
+      <p:sp>
+        <p:nvSpPr>
+          <p:cNvPr id="19" name="Rectangle 18"/>
+          <p:cNvSpPr/>
+          <p:nvPr/>
+        </p:nvSpPr>
+        <p:spPr>
+          <a:xfrm>
+            <a:off x="841248" y="5148072"/>
+            <a:ext cx="146304" cy="950976"/>
+          </a:xfrm>
+          <a:prstGeom prst="rect">
+            <a:avLst/>
+          </a:prstGeom>
+          <a:solidFill>
+            <a:srgbClr val="A8503A"/>
           </a:solidFill>
           <a:ln>
             <a:noFill/>
@@ -5662,28 +5648,19 @@
           <a:lstStyle/>
           <a:p>
             <a:pPr algn="ctr"/>
-            <a:r>
-              <a:rPr sz="1500" b="1">
-                <a:solidFill>
-                  <a:srgbClr val="FFFFFF"/>
-                </a:solidFill>
-                <a:latin typeface="Calibri"/>
-              </a:rPr>
-              <a:t>4</a:t>
-            </a:r>
-          </a:p>
-        </p:txBody>
-      </p:sp>
-      <p:sp>
-        <p:nvSpPr>
-          <p:cNvPr id="16" name="TextBox 15"/>
-          <p:cNvSpPr txBox="1"/>
-          <p:nvPr/>
-        </p:nvSpPr>
-        <p:spPr>
-          <a:xfrm>
-            <a:off x="1600200" y="4745736"/>
-            <a:ext cx="9692640" cy="457200"/>
+          </a:p>
+        </p:txBody>
+      </p:sp>
+      <p:sp>
+        <p:nvSpPr>
+          <p:cNvPr id="20" name="TextBox 19"/>
+          <p:cNvSpPr txBox="1"/>
+          <p:nvPr/>
+        </p:nvSpPr>
+        <p:spPr>
+          <a:xfrm>
+            <a:off x="1188720" y="5312664"/>
+            <a:ext cx="3657600" cy="548640"/>
           </a:xfrm>
           <a:prstGeom prst="rect">
             <a:avLst/>
@@ -5709,23 +5686,23 @@
                 <a:solidFill>
                   <a:srgbClr val="26415E"/>
                 </a:solidFill>
-                <a:latin typeface="Calibri"/>
-              </a:rPr>
-              <a:t>Keys &amp; normalization</a:t>
-            </a:r>
-          </a:p>
-        </p:txBody>
-      </p:sp>
-      <p:sp>
-        <p:nvSpPr>
-          <p:cNvPr id="17" name="TextBox 16"/>
-          <p:cNvSpPr txBox="1"/>
-          <p:nvPr/>
-        </p:nvSpPr>
-        <p:spPr>
-          <a:xfrm>
-            <a:off x="1600200" y="5166359"/>
-            <a:ext cx="9692640" cy="548640"/>
+                <a:latin typeface="Georgia"/>
+              </a:rPr>
+              <a:t>Result</a:t>
+            </a:r>
+          </a:p>
+        </p:txBody>
+      </p:sp>
+      <p:sp>
+        <p:nvSpPr>
+          <p:cNvPr id="21" name="TextBox 20"/>
+          <p:cNvSpPr txBox="1"/>
+          <p:nvPr/>
+        </p:nvSpPr>
+        <p:spPr>
+          <a:xfrm>
+            <a:off x="4572000" y="5349240"/>
+            <a:ext cx="6583680" cy="640080"/>
           </a:xfrm>
           <a:prstGeom prst="rect">
             <a:avLst/>
@@ -5740,27 +5717,27 @@
           <a:p>
             <a:pPr algn="l">
               <a:lnSpc>
-                <a:spcPct val="105000"/>
+                <a:spcPct val="106000"/>
               </a:lnSpc>
               <a:spcAft>
                 <a:spcPts val="400"/>
               </a:spcAft>
             </a:pPr>
             <a:r>
-              <a:rPr sz="1350" b="0">
+              <a:rPr sz="1400" b="0">
                 <a:solidFill>
                   <a:srgbClr val="7A7263"/>
                 </a:solidFill>
                 <a:latin typeface="Calibri"/>
               </a:rPr>
-              <a:t>Surrogate primary keys; design straight to 3NF.</a:t>
-            </a:r>
-          </a:p>
-        </p:txBody>
-      </p:sp>
-      <p:sp>
-        <p:nvSpPr>
-          <p:cNvPr id="18" name="TextBox 17"/>
+              <a:t>A public URL — full front-end ↔ backend ↔ live database.</a:t>
+            </a:r>
+          </a:p>
+        </p:txBody>
+      </p:sp>
+      <p:sp>
+        <p:nvSpPr>
+          <p:cNvPr id="22" name="TextBox 21"/>
           <p:cNvSpPr txBox="1"/>
           <p:nvPr/>
         </p:nvSpPr>
@@ -5802,7 +5779,7 @@
       </p:sp>
       <p:sp>
         <p:nvSpPr>
-          <p:cNvPr id="19" name="TextBox 18"/>
+          <p:cNvPr id="23" name="TextBox 22"/>
           <p:cNvSpPr txBox="1"/>
           <p:nvPr/>
         </p:nvSpPr>
@@ -5984,7 +5961,7 @@
                 </a:solidFill>
                 <a:latin typeface="Georgia"/>
               </a:rPr>
-              <a:t>Step 5–9 · Build the Database</a:t>
+              <a:t>Step 1–4 · Plan &amp; Design</a:t>
             </a:r>
           </a:p>
         </p:txBody>
@@ -6081,7 +6058,7 @@
                 </a:solidFill>
                 <a:latin typeface="Calibri"/>
               </a:rPr>
-              <a:t>5</a:t>
+              <a:t>1</a:t>
             </a:r>
           </a:p>
         </p:txBody>
@@ -6123,7 +6100,7 @@
                 </a:solidFill>
                 <a:latin typeface="Calibri"/>
               </a:rPr>
-              <a:t>Create tables</a:t>
+              <a:t>Understand the problem</a:t>
             </a:r>
           </a:p>
         </p:txBody>
@@ -6165,7 +6142,7 @@
                 </a:solidFill>
                 <a:latin typeface="Calibri"/>
               </a:rPr>
-              <a:t>CREATE TABLE with PK, FK, UNIQUE, CHECK, ENUM + indexes.</a:t>
+              <a:t>List what a library does; turn the nouns into entities (tables).</a:t>
             </a:r>
           </a:p>
         </p:txBody>
@@ -6218,7 +6195,7 @@
                 </a:solidFill>
                 <a:latin typeface="Calibri"/>
               </a:rPr>
-              <a:t>6</a:t>
+              <a:t>2</a:t>
             </a:r>
           </a:p>
         </p:txBody>
@@ -6260,7 +6237,7 @@
                 </a:solidFill>
                 <a:latin typeface="Calibri"/>
               </a:rPr>
-              <a:t>Insert sample data</a:t>
+              <a:t>Map relationships</a:t>
             </a:r>
           </a:p>
         </p:txBody>
@@ -6302,7 +6279,7 @@
                 </a:solidFill>
                 <a:latin typeface="Calibri"/>
               </a:rPr>
-              <a:t>~200 rows; a mix of returned, active &amp; overdue loans.</a:t>
+              <a:t>Decide 1:M, M:N, recursive and 1:1 links between entities.</a:t>
             </a:r>
           </a:p>
         </p:txBody>
@@ -6355,7 +6332,7 @@
                 </a:solidFill>
                 <a:latin typeface="Calibri"/>
               </a:rPr>
-              <a:t>7</a:t>
+              <a:t>3</a:t>
             </a:r>
           </a:p>
         </p:txBody>
@@ -6397,7 +6374,7 @@
                 </a:solidFill>
                 <a:latin typeface="Calibri"/>
               </a:rPr>
-              <a:t>Create views</a:t>
+              <a:t>Draw the ER diagram</a:t>
             </a:r>
           </a:p>
         </p:txBody>
@@ -6439,7 +6416,7 @@
                 </a:solidFill>
                 <a:latin typeface="Calibri"/>
               </a:rPr>
-              <a:t>Reusable queries for catalogue, availability, loans, fines.</a:t>
+              <a:t>Blueprint all 11 entities before writing any SQL.</a:t>
             </a:r>
           </a:p>
         </p:txBody>
@@ -6492,7 +6469,7 @@
                 </a:solidFill>
                 <a:latin typeface="Calibri"/>
               </a:rPr>
-              <a:t>8</a:t>
+              <a:t>4</a:t>
             </a:r>
           </a:p>
         </p:txBody>
@@ -6534,7 +6511,7 @@
                 </a:solidFill>
                 <a:latin typeface="Calibri"/>
               </a:rPr>
-              <a:t>Advanced queries</a:t>
+              <a:t>Keys &amp; normalization</a:t>
             </a:r>
           </a:p>
         </p:txBody>
@@ -6576,151 +6553,14 @@
                 </a:solidFill>
                 <a:latin typeface="Calibri"/>
               </a:rPr>
-              <a:t>Joins, subqueries, aggregates, GROUP BY / HAVING.</a:t>
-            </a:r>
-          </a:p>
-        </p:txBody>
-      </p:sp>
-      <p:sp>
-        <p:nvSpPr>
-          <p:cNvPr id="18" name="Oval 17"/>
-          <p:cNvSpPr/>
-          <p:nvPr/>
-        </p:nvSpPr>
-        <p:spPr>
-          <a:xfrm>
-            <a:off x="868680" y="5696711"/>
-            <a:ext cx="502920" cy="502920"/>
-          </a:xfrm>
-          <a:prstGeom prst="ellipse">
-            <a:avLst/>
-          </a:prstGeom>
-          <a:solidFill>
-            <a:srgbClr val="26415E"/>
-          </a:solidFill>
-          <a:ln>
-            <a:noFill/>
-          </a:ln>
-          <a:effectLst/>
-        </p:spPr>
-        <p:style>
-          <a:lnRef idx="1">
-            <a:schemeClr val="accent1"/>
-          </a:lnRef>
-          <a:fillRef idx="3">
-            <a:schemeClr val="accent1"/>
-          </a:fillRef>
-          <a:effectRef idx="2">
-            <a:schemeClr val="accent1"/>
-          </a:effectRef>
-          <a:fontRef idx="minor">
-            <a:schemeClr val="lt1"/>
-          </a:fontRef>
-        </p:style>
-        <p:txBody>
-          <a:bodyPr rtlCol="0" anchor="ctr"/>
-          <a:lstStyle/>
-          <a:p>
-            <a:pPr algn="ctr"/>
-            <a:r>
-              <a:rPr sz="1500" b="1">
-                <a:solidFill>
-                  <a:srgbClr val="FFFFFF"/>
-                </a:solidFill>
-                <a:latin typeface="Calibri"/>
-              </a:rPr>
-              <a:t>9</a:t>
-            </a:r>
-          </a:p>
-        </p:txBody>
-      </p:sp>
-      <p:sp>
-        <p:nvSpPr>
-          <p:cNvPr id="19" name="TextBox 18"/>
-          <p:cNvSpPr txBox="1"/>
-          <p:nvPr/>
-        </p:nvSpPr>
-        <p:spPr>
-          <a:xfrm>
-            <a:off x="1600200" y="5678423"/>
-            <a:ext cx="9692640" cy="457200"/>
-          </a:xfrm>
-          <a:prstGeom prst="rect">
-            <a:avLst/>
-          </a:prstGeom>
-          <a:noFill/>
-        </p:spPr>
-        <p:txBody>
-          <a:bodyPr wrap="square" anchor="t" lIns="0" rIns="0" tIns="0" bIns="0">
-            <a:spAutoFit/>
-          </a:bodyPr>
-          <a:lstStyle/>
-          <a:p>
-            <a:pPr algn="l">
-              <a:lnSpc>
-                <a:spcPct val="104000"/>
-              </a:lnSpc>
-              <a:spcAft>
-                <a:spcPts val="400"/>
-              </a:spcAft>
-            </a:pPr>
-            <a:r>
-              <a:rPr sz="1700" b="1">
-                <a:solidFill>
-                  <a:srgbClr val="26415E"/>
-                </a:solidFill>
-                <a:latin typeface="Calibri"/>
-              </a:rPr>
-              <a:t>Triggers &amp; procedures</a:t>
-            </a:r>
-          </a:p>
-        </p:txBody>
-      </p:sp>
-      <p:sp>
-        <p:nvSpPr>
-          <p:cNvPr id="20" name="TextBox 19"/>
-          <p:cNvSpPr txBox="1"/>
-          <p:nvPr/>
-        </p:nvSpPr>
-        <p:spPr>
-          <a:xfrm>
-            <a:off x="1600200" y="6099047"/>
-            <a:ext cx="9692640" cy="548640"/>
-          </a:xfrm>
-          <a:prstGeom prst="rect">
-            <a:avLst/>
-          </a:prstGeom>
-          <a:noFill/>
-        </p:spPr>
-        <p:txBody>
-          <a:bodyPr wrap="square" anchor="t" lIns="0" rIns="0" tIns="0" bIns="0">
-            <a:spAutoFit/>
-          </a:bodyPr>
-          <a:lstStyle/>
-          <a:p>
-            <a:pPr algn="l">
-              <a:lnSpc>
-                <a:spcPct val="105000"/>
-              </a:lnSpc>
-              <a:spcAft>
-                <a:spcPts val="400"/>
-              </a:spcAft>
-            </a:pPr>
-            <a:r>
-              <a:rPr sz="1350" b="0">
-                <a:solidFill>
-                  <a:srgbClr val="7A7263"/>
-                </a:solidFill>
-                <a:latin typeface="Calibri"/>
-              </a:rPr>
-              <a:t>Move integrity + workflows into the DB, in transactions.</a:t>
-            </a:r>
-          </a:p>
-        </p:txBody>
-      </p:sp>
-      <p:sp>
-        <p:nvSpPr>
-          <p:cNvPr id="21" name="TextBox 20"/>
+              <a:t>Surrogate primary keys; design straight to 3NF.</a:t>
+            </a:r>
+          </a:p>
+        </p:txBody>
+      </p:sp>
+      <p:sp>
+        <p:nvSpPr>
+          <p:cNvPr id="18" name="TextBox 17"/>
           <p:cNvSpPr txBox="1"/>
           <p:nvPr/>
         </p:nvSpPr>
@@ -6762,7 +6602,7 @@
       </p:sp>
       <p:sp>
         <p:nvSpPr>
-          <p:cNvPr id="22" name="TextBox 21"/>
+          <p:cNvPr id="19" name="TextBox 18"/>
           <p:cNvSpPr txBox="1"/>
           <p:nvPr/>
         </p:nvSpPr>
@@ -6944,7 +6784,7 @@
                 </a:solidFill>
                 <a:latin typeface="Georgia"/>
               </a:rPr>
-              <a:t>Step 10–13 · Build &amp; Ship</a:t>
+              <a:t>Step 5–9 · Build the Database</a:t>
             </a:r>
           </a:p>
         </p:txBody>
@@ -7041,7 +6881,7 @@
                 </a:solidFill>
                 <a:latin typeface="Calibri"/>
               </a:rPr>
-              <a:t>10</a:t>
+              <a:t>5</a:t>
             </a:r>
           </a:p>
         </p:txBody>
@@ -7083,7 +6923,7 @@
                 </a:solidFill>
                 <a:latin typeface="Calibri"/>
               </a:rPr>
-              <a:t>Backend API</a:t>
+              <a:t>Create tables</a:t>
             </a:r>
           </a:p>
         </p:txBody>
@@ -7125,7 +6965,7 @@
                 </a:solidFill>
                 <a:latin typeface="Calibri"/>
               </a:rPr>
-              <a:t>Express endpoints that read views and call stored procedures.</a:t>
+              <a:t>CREATE TABLE with PK, FK, UNIQUE, CHECK, ENUM + indexes.</a:t>
             </a:r>
           </a:p>
         </p:txBody>
@@ -7178,7 +7018,7 @@
                 </a:solidFill>
                 <a:latin typeface="Calibri"/>
               </a:rPr>
-              <a:t>11</a:t>
+              <a:t>6</a:t>
             </a:r>
           </a:p>
         </p:txBody>
@@ -7220,7 +7060,7 @@
                 </a:solidFill>
                 <a:latin typeface="Calibri"/>
               </a:rPr>
-              <a:t>Frontend UI</a:t>
+              <a:t>Insert sample data</a:t>
             </a:r>
           </a:p>
         </p:txBody>
@@ -7262,7 +7102,7 @@
                 </a:solidFill>
                 <a:latin typeface="Calibri"/>
               </a:rPr>
-              <a:t>Vanilla HTML/CSS/JS — responsive, handmade-style design.</a:t>
+              <a:t>~200 rows; a mix of returned, active &amp; overdue loans.</a:t>
             </a:r>
           </a:p>
         </p:txBody>
@@ -7315,7 +7155,7 @@
                 </a:solidFill>
                 <a:latin typeface="Calibri"/>
               </a:rPr>
-              <a:t>12</a:t>
+              <a:t>7</a:t>
             </a:r>
           </a:p>
         </p:txBody>
@@ -7357,7 +7197,7 @@
                 </a:solidFill>
                 <a:latin typeface="Calibri"/>
               </a:rPr>
-              <a:t>Connect with fetch()</a:t>
+              <a:t>Create views</a:t>
             </a:r>
           </a:p>
         </p:txBody>
@@ -7399,7 +7239,7 @@
                 </a:solidFill>
                 <a:latin typeface="Calibri"/>
               </a:rPr>
-              <a:t>JSON over REST; database errors surfaced to the user.</a:t>
+              <a:t>Reusable queries for catalogue, availability, loans, fines.</a:t>
             </a:r>
           </a:p>
         </p:txBody>
@@ -7452,7 +7292,7 @@
                 </a:solidFill>
                 <a:latin typeface="Calibri"/>
               </a:rPr>
-              <a:t>13</a:t>
+              <a:t>8</a:t>
             </a:r>
           </a:p>
         </p:txBody>
@@ -7494,7 +7334,7 @@
                 </a:solidFill>
                 <a:latin typeface="Calibri"/>
               </a:rPr>
-              <a:t>Deploy online</a:t>
+              <a:t>Advanced queries</a:t>
             </a:r>
           </a:p>
         </p:txBody>
@@ -7536,14 +7376,151 @@
                 </a:solidFill>
                 <a:latin typeface="Calibri"/>
               </a:rPr>
-              <a:t>Database on Aiven, app on Vercel, wired via env vars.</a:t>
-            </a:r>
-          </a:p>
-        </p:txBody>
-      </p:sp>
-      <p:sp>
-        <p:nvSpPr>
-          <p:cNvPr id="18" name="TextBox 17"/>
+              <a:t>Joins, subqueries, aggregates, GROUP BY / HAVING.</a:t>
+            </a:r>
+          </a:p>
+        </p:txBody>
+      </p:sp>
+      <p:sp>
+        <p:nvSpPr>
+          <p:cNvPr id="18" name="Oval 17"/>
+          <p:cNvSpPr/>
+          <p:nvPr/>
+        </p:nvSpPr>
+        <p:spPr>
+          <a:xfrm>
+            <a:off x="868680" y="5696711"/>
+            <a:ext cx="502920" cy="502920"/>
+          </a:xfrm>
+          <a:prstGeom prst="ellipse">
+            <a:avLst/>
+          </a:prstGeom>
+          <a:solidFill>
+            <a:srgbClr val="26415E"/>
+          </a:solidFill>
+          <a:ln>
+            <a:noFill/>
+          </a:ln>
+          <a:effectLst/>
+        </p:spPr>
+        <p:style>
+          <a:lnRef idx="1">
+            <a:schemeClr val="accent1"/>
+          </a:lnRef>
+          <a:fillRef idx="3">
+            <a:schemeClr val="accent1"/>
+          </a:fillRef>
+          <a:effectRef idx="2">
+            <a:schemeClr val="accent1"/>
+          </a:effectRef>
+          <a:fontRef idx="minor">
+            <a:schemeClr val="lt1"/>
+          </a:fontRef>
+        </p:style>
+        <p:txBody>
+          <a:bodyPr rtlCol="0" anchor="ctr"/>
+          <a:lstStyle/>
+          <a:p>
+            <a:pPr algn="ctr"/>
+            <a:r>
+              <a:rPr sz="1500" b="1">
+                <a:solidFill>
+                  <a:srgbClr val="FFFFFF"/>
+                </a:solidFill>
+                <a:latin typeface="Calibri"/>
+              </a:rPr>
+              <a:t>9</a:t>
+            </a:r>
+          </a:p>
+        </p:txBody>
+      </p:sp>
+      <p:sp>
+        <p:nvSpPr>
+          <p:cNvPr id="19" name="TextBox 18"/>
+          <p:cNvSpPr txBox="1"/>
+          <p:nvPr/>
+        </p:nvSpPr>
+        <p:spPr>
+          <a:xfrm>
+            <a:off x="1600200" y="5678423"/>
+            <a:ext cx="9692640" cy="457200"/>
+          </a:xfrm>
+          <a:prstGeom prst="rect">
+            <a:avLst/>
+          </a:prstGeom>
+          <a:noFill/>
+        </p:spPr>
+        <p:txBody>
+          <a:bodyPr wrap="square" anchor="t" lIns="0" rIns="0" tIns="0" bIns="0">
+            <a:spAutoFit/>
+          </a:bodyPr>
+          <a:lstStyle/>
+          <a:p>
+            <a:pPr algn="l">
+              <a:lnSpc>
+                <a:spcPct val="104000"/>
+              </a:lnSpc>
+              <a:spcAft>
+                <a:spcPts val="400"/>
+              </a:spcAft>
+            </a:pPr>
+            <a:r>
+              <a:rPr sz="1700" b="1">
+                <a:solidFill>
+                  <a:srgbClr val="26415E"/>
+                </a:solidFill>
+                <a:latin typeface="Calibri"/>
+              </a:rPr>
+              <a:t>Triggers &amp; procedures</a:t>
+            </a:r>
+          </a:p>
+        </p:txBody>
+      </p:sp>
+      <p:sp>
+        <p:nvSpPr>
+          <p:cNvPr id="20" name="TextBox 19"/>
+          <p:cNvSpPr txBox="1"/>
+          <p:nvPr/>
+        </p:nvSpPr>
+        <p:spPr>
+          <a:xfrm>
+            <a:off x="1600200" y="6099047"/>
+            <a:ext cx="9692640" cy="548640"/>
+          </a:xfrm>
+          <a:prstGeom prst="rect">
+            <a:avLst/>
+          </a:prstGeom>
+          <a:noFill/>
+        </p:spPr>
+        <p:txBody>
+          <a:bodyPr wrap="square" anchor="t" lIns="0" rIns="0" tIns="0" bIns="0">
+            <a:spAutoFit/>
+          </a:bodyPr>
+          <a:lstStyle/>
+          <a:p>
+            <a:pPr algn="l">
+              <a:lnSpc>
+                <a:spcPct val="105000"/>
+              </a:lnSpc>
+              <a:spcAft>
+                <a:spcPts val="400"/>
+              </a:spcAft>
+            </a:pPr>
+            <a:r>
+              <a:rPr sz="1350" b="0">
+                <a:solidFill>
+                  <a:srgbClr val="7A7263"/>
+                </a:solidFill>
+                <a:latin typeface="Calibri"/>
+              </a:rPr>
+              <a:t>Move integrity + workflows into the DB, in transactions.</a:t>
+            </a:r>
+          </a:p>
+        </p:txBody>
+      </p:sp>
+      <p:sp>
+        <p:nvSpPr>
+          <p:cNvPr id="21" name="TextBox 20"/>
           <p:cNvSpPr txBox="1"/>
           <p:nvPr/>
         </p:nvSpPr>
@@ -7585,7 +7562,7 @@
       </p:sp>
       <p:sp>
         <p:nvSpPr>
-          <p:cNvPr id="19" name="TextBox 18"/>
+          <p:cNvPr id="22" name="TextBox 21"/>
           <p:cNvSpPr txBox="1"/>
           <p:nvPr/>
         </p:nvSpPr>
@@ -7712,11 +7689,20 @@
             <a:r>
               <a:rPr sz="1300" b="1">
                 <a:solidFill>
+                  <a:srgbClr val="A8503A"/>
+                </a:solidFill>
+                <a:latin typeface="Calibri"/>
+              </a:rPr>
+              <a:t>PART 4   </a:t>
+            </a:r>
+            <a:r>
+              <a:rPr sz="1300" b="1">
+                <a:solidFill>
                   <a:srgbClr val="7A7263"/>
                 </a:solidFill>
                 <a:latin typeface="Calibri"/>
               </a:rPr>
-              <a:t>SUMMARY</a:t>
+              <a:t>WALKTHROUGH</a:t>
             </a:r>
           </a:p>
         </p:txBody>
@@ -7752,13 +7738,13 @@
               </a:spcAft>
             </a:pPr>
             <a:r>
-              <a:rPr sz="3400" b="1">
+              <a:rPr sz="3000" b="1">
                 <a:solidFill>
                   <a:srgbClr val="26415E"/>
                 </a:solidFill>
                 <a:latin typeface="Georgia"/>
               </a:rPr>
-              <a:t>Deliverables &amp; technology</a:t>
+              <a:t>Step 10–13 · Build &amp; Ship</a:t>
             </a:r>
           </a:p>
         </p:txBody>
@@ -7809,260 +7795,23 @@
       </p:sp>
       <p:sp>
         <p:nvSpPr>
-          <p:cNvPr id="6" name="TextBox 5"/>
-          <p:cNvSpPr txBox="1"/>
-          <p:nvPr/>
-        </p:nvSpPr>
-        <p:spPr>
-          <a:xfrm>
-            <a:off x="841248" y="1920240"/>
-            <a:ext cx="5212080" cy="365760"/>
-          </a:xfrm>
-          <a:prstGeom prst="rect">
-            <a:avLst/>
-          </a:prstGeom>
-          <a:noFill/>
-        </p:spPr>
-        <p:txBody>
-          <a:bodyPr wrap="square" anchor="t" lIns="0" rIns="0" tIns="0" bIns="0">
-            <a:spAutoFit/>
-          </a:bodyPr>
-          <a:lstStyle/>
-          <a:p>
-            <a:pPr algn="l">
-              <a:lnSpc>
-                <a:spcPct val="104000"/>
-              </a:lnSpc>
-              <a:spcAft>
-                <a:spcPts val="400"/>
-              </a:spcAft>
-            </a:pPr>
-            <a:r>
-              <a:rPr sz="1800" b="1">
-                <a:solidFill>
-                  <a:srgbClr val="A8503A"/>
-                </a:solidFill>
-                <a:latin typeface="Calibri"/>
-              </a:rPr>
-              <a:t>Deliverables</a:t>
-            </a:r>
-          </a:p>
-        </p:txBody>
-      </p:sp>
-      <p:sp>
-        <p:nvSpPr>
-          <p:cNvPr id="7" name="TextBox 6"/>
-          <p:cNvSpPr txBox="1"/>
-          <p:nvPr/>
-        </p:nvSpPr>
-        <p:spPr>
-          <a:xfrm>
-            <a:off x="841248" y="2468880"/>
-            <a:ext cx="5212080" cy="3657600"/>
-          </a:xfrm>
-          <a:prstGeom prst="rect">
-            <a:avLst/>
-          </a:prstGeom>
-          <a:noFill/>
-        </p:spPr>
-        <p:txBody>
-          <a:bodyPr wrap="square" lIns="0" rIns="0" tIns="0" bIns="0">
-            <a:spAutoFit/>
-          </a:bodyPr>
-          <a:lstStyle/>
-          <a:p>
-            <a:pPr>
-              <a:lnSpc>
-                <a:spcPct val="106000"/>
-              </a:lnSpc>
-              <a:spcAft>
-                <a:spcPts val="1000"/>
-              </a:spcAft>
-            </a:pPr>
-            <a:r>
-              <a:rPr sz="1550" b="1">
-                <a:solidFill>
-                  <a:srgbClr val="A8503A"/>
-                </a:solidFill>
-                <a:latin typeface="Calibri"/>
-              </a:rPr>
-              <a:t>—  </a:t>
-            </a:r>
-            <a:r>
-              <a:rPr sz="1550">
-                <a:solidFill>
-                  <a:srgbClr val="2C2A26"/>
-                </a:solidFill>
-                <a:latin typeface="Calibri"/>
-              </a:rPr>
-              <a:t>Relational schema (3NF) + data dictionary</a:t>
-            </a:r>
-          </a:p>
-          <a:p>
-            <a:pPr>
-              <a:lnSpc>
-                <a:spcPct val="106000"/>
-              </a:lnSpc>
-              <a:spcAft>
-                <a:spcPts val="1000"/>
-              </a:spcAft>
-            </a:pPr>
-            <a:r>
-              <a:rPr sz="1550" b="1">
-                <a:solidFill>
-                  <a:srgbClr val="A8503A"/>
-                </a:solidFill>
-                <a:latin typeface="Calibri"/>
-              </a:rPr>
-              <a:t>—  </a:t>
-            </a:r>
-            <a:r>
-              <a:rPr sz="1550">
-                <a:solidFill>
-                  <a:srgbClr val="2C2A26"/>
-                </a:solidFill>
-                <a:latin typeface="Calibri"/>
-              </a:rPr>
-              <a:t>SQL: schema, data, views, queries, procedures</a:t>
-            </a:r>
-          </a:p>
-          <a:p>
-            <a:pPr>
-              <a:lnSpc>
-                <a:spcPct val="106000"/>
-              </a:lnSpc>
-              <a:spcAft>
-                <a:spcPts val="1000"/>
-              </a:spcAft>
-            </a:pPr>
-            <a:r>
-              <a:rPr sz="1550" b="1">
-                <a:solidFill>
-                  <a:srgbClr val="A8503A"/>
-                </a:solidFill>
-                <a:latin typeface="Calibri"/>
-              </a:rPr>
-              <a:t>—  </a:t>
-            </a:r>
-            <a:r>
-              <a:rPr sz="1550">
-                <a:solidFill>
-                  <a:srgbClr val="2C2A26"/>
-                </a:solidFill>
-                <a:latin typeface="Calibri"/>
-              </a:rPr>
-              <a:t>~200-record sample dataset</a:t>
-            </a:r>
-          </a:p>
-          <a:p>
-            <a:pPr>
-              <a:lnSpc>
-                <a:spcPct val="106000"/>
-              </a:lnSpc>
-              <a:spcAft>
-                <a:spcPts val="1000"/>
-              </a:spcAft>
-            </a:pPr>
-            <a:r>
-              <a:rPr sz="1550" b="1">
-                <a:solidFill>
-                  <a:srgbClr val="A8503A"/>
-                </a:solidFill>
-                <a:latin typeface="Calibri"/>
-              </a:rPr>
-              <a:t>—  </a:t>
-            </a:r>
-            <a:r>
-              <a:rPr sz="1550">
-                <a:solidFill>
-                  <a:srgbClr val="2C2A26"/>
-                </a:solidFill>
-                <a:latin typeface="Calibri"/>
-              </a:rPr>
-              <a:t>Working web app (frontend + API)</a:t>
-            </a:r>
-          </a:p>
-          <a:p>
-            <a:pPr>
-              <a:lnSpc>
-                <a:spcPct val="106000"/>
-              </a:lnSpc>
-              <a:spcAft>
-                <a:spcPts val="1000"/>
-              </a:spcAft>
-            </a:pPr>
-            <a:r>
-              <a:rPr sz="1550" b="1">
-                <a:solidFill>
-                  <a:srgbClr val="A8503A"/>
-                </a:solidFill>
-                <a:latin typeface="Calibri"/>
-              </a:rPr>
-              <a:t>—  </a:t>
-            </a:r>
-            <a:r>
-              <a:rPr sz="1550">
-                <a:solidFill>
-                  <a:srgbClr val="2C2A26"/>
-                </a:solidFill>
-                <a:latin typeface="Calibri"/>
-              </a:rPr>
-              <a:t>Report &amp; step-by-step walkthrough (PDF)</a:t>
-            </a:r>
-          </a:p>
-          <a:p>
-            <a:pPr>
-              <a:lnSpc>
-                <a:spcPct val="106000"/>
-              </a:lnSpc>
-              <a:spcAft>
-                <a:spcPts val="1000"/>
-              </a:spcAft>
-            </a:pPr>
-            <a:r>
-              <a:rPr sz="1550" b="1">
-                <a:solidFill>
-                  <a:srgbClr val="A8503A"/>
-                </a:solidFill>
-                <a:latin typeface="Calibri"/>
-              </a:rPr>
-              <a:t>—  </a:t>
-            </a:r>
-            <a:r>
-              <a:rPr sz="1550">
-                <a:solidFill>
-                  <a:srgbClr val="2C2A26"/>
-                </a:solidFill>
-                <a:latin typeface="Calibri"/>
-              </a:rPr>
-              <a:t>This presentation</a:t>
-            </a:r>
-          </a:p>
-        </p:txBody>
-      </p:sp>
-      <p:sp>
-        <p:nvSpPr>
-          <p:cNvPr id="8" name="Rounded Rectangle 7"/>
+          <p:cNvPr id="6" name="Oval 5"/>
           <p:cNvSpPr/>
           <p:nvPr/>
         </p:nvSpPr>
         <p:spPr>
           <a:xfrm>
-            <a:off x="6400800" y="1920240"/>
-            <a:ext cx="4937760" cy="4206240"/>
-          </a:xfrm>
-          <a:prstGeom prst="roundRect">
-            <a:avLst>
-              <a:gd name="adj" fmla="val 5000"/>
-            </a:avLst>
+            <a:off x="868680" y="1965960"/>
+            <a:ext cx="502920" cy="502920"/>
+          </a:xfrm>
+          <a:prstGeom prst="ellipse">
+            <a:avLst/>
           </a:prstGeom>
           <a:solidFill>
-            <a:srgbClr val="F6EFE4"/>
+            <a:srgbClr val="26415E"/>
           </a:solidFill>
-          <a:ln w="15240">
-            <a:solidFill>
-              <a:srgbClr val="E6DCCC"/>
-            </a:solidFill>
+          <a:ln>
+            <a:noFill/>
           </a:ln>
           <a:effectLst/>
         </p:spPr>
@@ -8085,19 +7834,28 @@
           <a:lstStyle/>
           <a:p>
             <a:pPr algn="ctr"/>
-          </a:p>
-        </p:txBody>
-      </p:sp>
-      <p:sp>
-        <p:nvSpPr>
-          <p:cNvPr id="9" name="TextBox 8"/>
-          <p:cNvSpPr txBox="1"/>
-          <p:nvPr/>
-        </p:nvSpPr>
-        <p:spPr>
-          <a:xfrm>
-            <a:off x="6675120" y="2148840"/>
-            <a:ext cx="4389120" cy="365760"/>
+            <a:r>
+              <a:rPr sz="1500" b="1">
+                <a:solidFill>
+                  <a:srgbClr val="FFFFFF"/>
+                </a:solidFill>
+                <a:latin typeface="Calibri"/>
+              </a:rPr>
+              <a:t>10</a:t>
+            </a:r>
+          </a:p>
+        </p:txBody>
+      </p:sp>
+      <p:sp>
+        <p:nvSpPr>
+          <p:cNvPr id="7" name="TextBox 6"/>
+          <p:cNvSpPr txBox="1"/>
+          <p:nvPr/>
+        </p:nvSpPr>
+        <p:spPr>
+          <a:xfrm>
+            <a:off x="1600200" y="1947672"/>
+            <a:ext cx="9692640" cy="457200"/>
           </a:xfrm>
           <a:prstGeom prst="rect">
             <a:avLst/>
@@ -8119,13 +7877,108 @@
               </a:spcAft>
             </a:pPr>
             <a:r>
-              <a:rPr sz="1800" b="1">
-                <a:solidFill>
-                  <a:srgbClr val="A8503A"/>
-                </a:solidFill>
-                <a:latin typeface="Calibri"/>
-              </a:rPr>
-              <a:t>Technology</a:t>
+              <a:rPr sz="1700" b="1">
+                <a:solidFill>
+                  <a:srgbClr val="26415E"/>
+                </a:solidFill>
+                <a:latin typeface="Calibri"/>
+              </a:rPr>
+              <a:t>Backend API</a:t>
+            </a:r>
+          </a:p>
+        </p:txBody>
+      </p:sp>
+      <p:sp>
+        <p:nvSpPr>
+          <p:cNvPr id="8" name="TextBox 7"/>
+          <p:cNvSpPr txBox="1"/>
+          <p:nvPr/>
+        </p:nvSpPr>
+        <p:spPr>
+          <a:xfrm>
+            <a:off x="1600200" y="2368296"/>
+            <a:ext cx="9692640" cy="548640"/>
+          </a:xfrm>
+          <a:prstGeom prst="rect">
+            <a:avLst/>
+          </a:prstGeom>
+          <a:noFill/>
+        </p:spPr>
+        <p:txBody>
+          <a:bodyPr wrap="square" anchor="t" lIns="0" rIns="0" tIns="0" bIns="0">
+            <a:spAutoFit/>
+          </a:bodyPr>
+          <a:lstStyle/>
+          <a:p>
+            <a:pPr algn="l">
+              <a:lnSpc>
+                <a:spcPct val="105000"/>
+              </a:lnSpc>
+              <a:spcAft>
+                <a:spcPts val="400"/>
+              </a:spcAft>
+            </a:pPr>
+            <a:r>
+              <a:rPr sz="1350" b="0">
+                <a:solidFill>
+                  <a:srgbClr val="7A7263"/>
+                </a:solidFill>
+                <a:latin typeface="Calibri"/>
+              </a:rPr>
+              <a:t>Express endpoints that read views and call stored procedures.</a:t>
+            </a:r>
+          </a:p>
+        </p:txBody>
+      </p:sp>
+      <p:sp>
+        <p:nvSpPr>
+          <p:cNvPr id="9" name="Oval 8"/>
+          <p:cNvSpPr/>
+          <p:nvPr/>
+        </p:nvSpPr>
+        <p:spPr>
+          <a:xfrm>
+            <a:off x="868680" y="2898648"/>
+            <a:ext cx="502920" cy="502920"/>
+          </a:xfrm>
+          <a:prstGeom prst="ellipse">
+            <a:avLst/>
+          </a:prstGeom>
+          <a:solidFill>
+            <a:srgbClr val="26415E"/>
+          </a:solidFill>
+          <a:ln>
+            <a:noFill/>
+          </a:ln>
+          <a:effectLst/>
+        </p:spPr>
+        <p:style>
+          <a:lnRef idx="1">
+            <a:schemeClr val="accent1"/>
+          </a:lnRef>
+          <a:fillRef idx="3">
+            <a:schemeClr val="accent1"/>
+          </a:fillRef>
+          <a:effectRef idx="2">
+            <a:schemeClr val="accent1"/>
+          </a:effectRef>
+          <a:fontRef idx="minor">
+            <a:schemeClr val="lt1"/>
+          </a:fontRef>
+        </p:style>
+        <p:txBody>
+          <a:bodyPr rtlCol="0" anchor="ctr"/>
+          <a:lstStyle/>
+          <a:p>
+            <a:pPr algn="ctr"/>
+            <a:r>
+              <a:rPr sz="1500" b="1">
+                <a:solidFill>
+                  <a:srgbClr val="FFFFFF"/>
+                </a:solidFill>
+                <a:latin typeface="Calibri"/>
+              </a:rPr>
+              <a:t>11</a:t>
             </a:r>
           </a:p>
         </p:txBody>
@@ -8138,202 +7991,36 @@
         </p:nvSpPr>
         <p:spPr>
           <a:xfrm>
-            <a:off x="6675120" y="2697480"/>
-            <a:ext cx="4434840" cy="3291840"/>
-          </a:xfrm>
-          <a:prstGeom prst="rect">
-            <a:avLst/>
-          </a:prstGeom>
-          <a:noFill/>
-        </p:spPr>
-        <p:txBody>
-          <a:bodyPr wrap="square" lIns="0" rIns="0" tIns="0" bIns="0">
-            <a:spAutoFit/>
-          </a:bodyPr>
-          <a:lstStyle/>
-          <a:p>
-            <a:pPr>
-              <a:lnSpc>
-                <a:spcPct val="106000"/>
-              </a:lnSpc>
-              <a:spcAft>
-                <a:spcPts val="1200"/>
-              </a:spcAft>
-            </a:pPr>
-            <a:r>
-              <a:rPr sz="1550" b="1">
-                <a:solidFill>
-                  <a:srgbClr val="A8503A"/>
-                </a:solidFill>
-                <a:latin typeface="Calibri"/>
-              </a:rPr>
-              <a:t>—  </a:t>
-            </a:r>
-            <a:r>
-              <a:rPr sz="1550" b="1">
-                <a:solidFill>
-                  <a:srgbClr val="2C2A26"/>
-                </a:solidFill>
-                <a:latin typeface="Calibri"/>
-              </a:rPr>
-              <a:t>Database: </a:t>
-            </a:r>
-            <a:r>
-              <a:rPr sz="1550">
-                <a:solidFill>
-                  <a:srgbClr val="2C2A26"/>
-                </a:solidFill>
-                <a:latin typeface="Calibri"/>
-              </a:rPr>
-              <a:t>MySQL 8 (InnoDB)</a:t>
-            </a:r>
-          </a:p>
-          <a:p>
-            <a:pPr>
-              <a:lnSpc>
-                <a:spcPct val="106000"/>
-              </a:lnSpc>
-              <a:spcAft>
-                <a:spcPts val="1200"/>
-              </a:spcAft>
-            </a:pPr>
-            <a:r>
-              <a:rPr sz="1550" b="1">
-                <a:solidFill>
-                  <a:srgbClr val="A8503A"/>
-                </a:solidFill>
-                <a:latin typeface="Calibri"/>
-              </a:rPr>
-              <a:t>—  </a:t>
-            </a:r>
-            <a:r>
-              <a:rPr sz="1550" b="1">
-                <a:solidFill>
-                  <a:srgbClr val="2C2A26"/>
-                </a:solidFill>
-                <a:latin typeface="Calibri"/>
-              </a:rPr>
-              <a:t>Backend: </a:t>
-            </a:r>
-            <a:r>
-              <a:rPr sz="1550">
-                <a:solidFill>
-                  <a:srgbClr val="2C2A26"/>
-                </a:solidFill>
-                <a:latin typeface="Calibri"/>
-              </a:rPr>
-              <a:t>Node.js + Express</a:t>
-            </a:r>
-          </a:p>
-          <a:p>
-            <a:pPr>
-              <a:lnSpc>
-                <a:spcPct val="106000"/>
-              </a:lnSpc>
-              <a:spcAft>
-                <a:spcPts val="1200"/>
-              </a:spcAft>
-            </a:pPr>
-            <a:r>
-              <a:rPr sz="1550" b="1">
-                <a:solidFill>
-                  <a:srgbClr val="A8503A"/>
-                </a:solidFill>
-                <a:latin typeface="Calibri"/>
-              </a:rPr>
-              <a:t>—  </a:t>
-            </a:r>
-            <a:r>
-              <a:rPr sz="1550" b="1">
-                <a:solidFill>
-                  <a:srgbClr val="2C2A26"/>
-                </a:solidFill>
-                <a:latin typeface="Calibri"/>
-              </a:rPr>
-              <a:t>Frontend: </a:t>
-            </a:r>
-            <a:r>
-              <a:rPr sz="1550">
-                <a:solidFill>
-                  <a:srgbClr val="2C2A26"/>
-                </a:solidFill>
-                <a:latin typeface="Calibri"/>
-              </a:rPr>
-              <a:t>HTML, CSS, JavaScript</a:t>
-            </a:r>
-          </a:p>
-          <a:p>
-            <a:pPr>
-              <a:lnSpc>
-                <a:spcPct val="106000"/>
-              </a:lnSpc>
-              <a:spcAft>
-                <a:spcPts val="1200"/>
-              </a:spcAft>
-            </a:pPr>
-            <a:r>
-              <a:rPr sz="1550" b="1">
-                <a:solidFill>
-                  <a:srgbClr val="A8503A"/>
-                </a:solidFill>
-                <a:latin typeface="Calibri"/>
-              </a:rPr>
-              <a:t>—  </a:t>
-            </a:r>
-            <a:r>
-              <a:rPr sz="1550" b="1">
-                <a:solidFill>
-                  <a:srgbClr val="2C2A26"/>
-                </a:solidFill>
-                <a:latin typeface="Calibri"/>
-              </a:rPr>
-              <a:t>Hosting: </a:t>
-            </a:r>
-            <a:r>
-              <a:rPr sz="1550">
-                <a:solidFill>
-                  <a:srgbClr val="2C2A26"/>
-                </a:solidFill>
-                <a:latin typeface="Calibri"/>
-              </a:rPr>
-              <a:t>Vercel + Aiven</a:t>
-            </a:r>
-          </a:p>
-          <a:p>
-            <a:pPr>
-              <a:lnSpc>
-                <a:spcPct val="106000"/>
-              </a:lnSpc>
-              <a:spcAft>
-                <a:spcPts val="1200"/>
-              </a:spcAft>
-            </a:pPr>
-            <a:r>
-              <a:rPr sz="1550" b="1">
-                <a:solidFill>
-                  <a:srgbClr val="A8503A"/>
-                </a:solidFill>
-                <a:latin typeface="Calibri"/>
-              </a:rPr>
-              <a:t>—  </a:t>
-            </a:r>
-            <a:r>
-              <a:rPr sz="1550" b="1">
-                <a:solidFill>
-                  <a:srgbClr val="2C2A26"/>
-                </a:solidFill>
-                <a:latin typeface="Calibri"/>
-              </a:rPr>
-              <a:t>Source: </a:t>
-            </a:r>
-            <a:r>
-              <a:rPr sz="1550">
-                <a:solidFill>
-                  <a:srgbClr val="2C2A26"/>
-                </a:solidFill>
-                <a:latin typeface="Calibri"/>
-              </a:rPr>
-              <a:t>GitHub</a:t>
+            <a:off x="1600200" y="2880360"/>
+            <a:ext cx="9692640" cy="457200"/>
+          </a:xfrm>
+          <a:prstGeom prst="rect">
+            <a:avLst/>
+          </a:prstGeom>
+          <a:noFill/>
+        </p:spPr>
+        <p:txBody>
+          <a:bodyPr wrap="square" anchor="t" lIns="0" rIns="0" tIns="0" bIns="0">
+            <a:spAutoFit/>
+          </a:bodyPr>
+          <a:lstStyle/>
+          <a:p>
+            <a:pPr algn="l">
+              <a:lnSpc>
+                <a:spcPct val="104000"/>
+              </a:lnSpc>
+              <a:spcAft>
+                <a:spcPts val="400"/>
+              </a:spcAft>
+            </a:pPr>
+            <a:r>
+              <a:rPr sz="1700" b="1">
+                <a:solidFill>
+                  <a:srgbClr val="26415E"/>
+                </a:solidFill>
+                <a:latin typeface="Calibri"/>
+              </a:rPr>
+              <a:t>Frontend UI</a:t>
             </a:r>
           </a:p>
         </p:txBody>
@@ -8341,6 +8028,322 @@
       <p:sp>
         <p:nvSpPr>
           <p:cNvPr id="11" name="TextBox 10"/>
+          <p:cNvSpPr txBox="1"/>
+          <p:nvPr/>
+        </p:nvSpPr>
+        <p:spPr>
+          <a:xfrm>
+            <a:off x="1600200" y="3300984"/>
+            <a:ext cx="9692640" cy="548640"/>
+          </a:xfrm>
+          <a:prstGeom prst="rect">
+            <a:avLst/>
+          </a:prstGeom>
+          <a:noFill/>
+        </p:spPr>
+        <p:txBody>
+          <a:bodyPr wrap="square" anchor="t" lIns="0" rIns="0" tIns="0" bIns="0">
+            <a:spAutoFit/>
+          </a:bodyPr>
+          <a:lstStyle/>
+          <a:p>
+            <a:pPr algn="l">
+              <a:lnSpc>
+                <a:spcPct val="105000"/>
+              </a:lnSpc>
+              <a:spcAft>
+                <a:spcPts val="400"/>
+              </a:spcAft>
+            </a:pPr>
+            <a:r>
+              <a:rPr sz="1350" b="0">
+                <a:solidFill>
+                  <a:srgbClr val="7A7263"/>
+                </a:solidFill>
+                <a:latin typeface="Calibri"/>
+              </a:rPr>
+              <a:t>Vanilla HTML/CSS/JS — responsive, handmade-style design.</a:t>
+            </a:r>
+          </a:p>
+        </p:txBody>
+      </p:sp>
+      <p:sp>
+        <p:nvSpPr>
+          <p:cNvPr id="12" name="Oval 11"/>
+          <p:cNvSpPr/>
+          <p:nvPr/>
+        </p:nvSpPr>
+        <p:spPr>
+          <a:xfrm>
+            <a:off x="868680" y="3831335"/>
+            <a:ext cx="502920" cy="502920"/>
+          </a:xfrm>
+          <a:prstGeom prst="ellipse">
+            <a:avLst/>
+          </a:prstGeom>
+          <a:solidFill>
+            <a:srgbClr val="26415E"/>
+          </a:solidFill>
+          <a:ln>
+            <a:noFill/>
+          </a:ln>
+          <a:effectLst/>
+        </p:spPr>
+        <p:style>
+          <a:lnRef idx="1">
+            <a:schemeClr val="accent1"/>
+          </a:lnRef>
+          <a:fillRef idx="3">
+            <a:schemeClr val="accent1"/>
+          </a:fillRef>
+          <a:effectRef idx="2">
+            <a:schemeClr val="accent1"/>
+          </a:effectRef>
+          <a:fontRef idx="minor">
+            <a:schemeClr val="lt1"/>
+          </a:fontRef>
+        </p:style>
+        <p:txBody>
+          <a:bodyPr rtlCol="0" anchor="ctr"/>
+          <a:lstStyle/>
+          <a:p>
+            <a:pPr algn="ctr"/>
+            <a:r>
+              <a:rPr sz="1500" b="1">
+                <a:solidFill>
+                  <a:srgbClr val="FFFFFF"/>
+                </a:solidFill>
+                <a:latin typeface="Calibri"/>
+              </a:rPr>
+              <a:t>12</a:t>
+            </a:r>
+          </a:p>
+        </p:txBody>
+      </p:sp>
+      <p:sp>
+        <p:nvSpPr>
+          <p:cNvPr id="13" name="TextBox 12"/>
+          <p:cNvSpPr txBox="1"/>
+          <p:nvPr/>
+        </p:nvSpPr>
+        <p:spPr>
+          <a:xfrm>
+            <a:off x="1600200" y="3813048"/>
+            <a:ext cx="9692640" cy="457200"/>
+          </a:xfrm>
+          <a:prstGeom prst="rect">
+            <a:avLst/>
+          </a:prstGeom>
+          <a:noFill/>
+        </p:spPr>
+        <p:txBody>
+          <a:bodyPr wrap="square" anchor="t" lIns="0" rIns="0" tIns="0" bIns="0">
+            <a:spAutoFit/>
+          </a:bodyPr>
+          <a:lstStyle/>
+          <a:p>
+            <a:pPr algn="l">
+              <a:lnSpc>
+                <a:spcPct val="104000"/>
+              </a:lnSpc>
+              <a:spcAft>
+                <a:spcPts val="400"/>
+              </a:spcAft>
+            </a:pPr>
+            <a:r>
+              <a:rPr sz="1700" b="1">
+                <a:solidFill>
+                  <a:srgbClr val="26415E"/>
+                </a:solidFill>
+                <a:latin typeface="Calibri"/>
+              </a:rPr>
+              <a:t>Connect with fetch()</a:t>
+            </a:r>
+          </a:p>
+        </p:txBody>
+      </p:sp>
+      <p:sp>
+        <p:nvSpPr>
+          <p:cNvPr id="14" name="TextBox 13"/>
+          <p:cNvSpPr txBox="1"/>
+          <p:nvPr/>
+        </p:nvSpPr>
+        <p:spPr>
+          <a:xfrm>
+            <a:off x="1600200" y="4233672"/>
+            <a:ext cx="9692640" cy="548640"/>
+          </a:xfrm>
+          <a:prstGeom prst="rect">
+            <a:avLst/>
+          </a:prstGeom>
+          <a:noFill/>
+        </p:spPr>
+        <p:txBody>
+          <a:bodyPr wrap="square" anchor="t" lIns="0" rIns="0" tIns="0" bIns="0">
+            <a:spAutoFit/>
+          </a:bodyPr>
+          <a:lstStyle/>
+          <a:p>
+            <a:pPr algn="l">
+              <a:lnSpc>
+                <a:spcPct val="105000"/>
+              </a:lnSpc>
+              <a:spcAft>
+                <a:spcPts val="400"/>
+              </a:spcAft>
+            </a:pPr>
+            <a:r>
+              <a:rPr sz="1350" b="0">
+                <a:solidFill>
+                  <a:srgbClr val="7A7263"/>
+                </a:solidFill>
+                <a:latin typeface="Calibri"/>
+              </a:rPr>
+              <a:t>JSON over REST; database errors surfaced to the user.</a:t>
+            </a:r>
+          </a:p>
+        </p:txBody>
+      </p:sp>
+      <p:sp>
+        <p:nvSpPr>
+          <p:cNvPr id="15" name="Oval 14"/>
+          <p:cNvSpPr/>
+          <p:nvPr/>
+        </p:nvSpPr>
+        <p:spPr>
+          <a:xfrm>
+            <a:off x="868680" y="4764023"/>
+            <a:ext cx="502920" cy="502920"/>
+          </a:xfrm>
+          <a:prstGeom prst="ellipse">
+            <a:avLst/>
+          </a:prstGeom>
+          <a:solidFill>
+            <a:srgbClr val="26415E"/>
+          </a:solidFill>
+          <a:ln>
+            <a:noFill/>
+          </a:ln>
+          <a:effectLst/>
+        </p:spPr>
+        <p:style>
+          <a:lnRef idx="1">
+            <a:schemeClr val="accent1"/>
+          </a:lnRef>
+          <a:fillRef idx="3">
+            <a:schemeClr val="accent1"/>
+          </a:fillRef>
+          <a:effectRef idx="2">
+            <a:schemeClr val="accent1"/>
+          </a:effectRef>
+          <a:fontRef idx="minor">
+            <a:schemeClr val="lt1"/>
+          </a:fontRef>
+        </p:style>
+        <p:txBody>
+          <a:bodyPr rtlCol="0" anchor="ctr"/>
+          <a:lstStyle/>
+          <a:p>
+            <a:pPr algn="ctr"/>
+            <a:r>
+              <a:rPr sz="1500" b="1">
+                <a:solidFill>
+                  <a:srgbClr val="FFFFFF"/>
+                </a:solidFill>
+                <a:latin typeface="Calibri"/>
+              </a:rPr>
+              <a:t>13</a:t>
+            </a:r>
+          </a:p>
+        </p:txBody>
+      </p:sp>
+      <p:sp>
+        <p:nvSpPr>
+          <p:cNvPr id="16" name="TextBox 15"/>
+          <p:cNvSpPr txBox="1"/>
+          <p:nvPr/>
+        </p:nvSpPr>
+        <p:spPr>
+          <a:xfrm>
+            <a:off x="1600200" y="4745736"/>
+            <a:ext cx="9692640" cy="457200"/>
+          </a:xfrm>
+          <a:prstGeom prst="rect">
+            <a:avLst/>
+          </a:prstGeom>
+          <a:noFill/>
+        </p:spPr>
+        <p:txBody>
+          <a:bodyPr wrap="square" anchor="t" lIns="0" rIns="0" tIns="0" bIns="0">
+            <a:spAutoFit/>
+          </a:bodyPr>
+          <a:lstStyle/>
+          <a:p>
+            <a:pPr algn="l">
+              <a:lnSpc>
+                <a:spcPct val="104000"/>
+              </a:lnSpc>
+              <a:spcAft>
+                <a:spcPts val="400"/>
+              </a:spcAft>
+            </a:pPr>
+            <a:r>
+              <a:rPr sz="1700" b="1">
+                <a:solidFill>
+                  <a:srgbClr val="26415E"/>
+                </a:solidFill>
+                <a:latin typeface="Calibri"/>
+              </a:rPr>
+              <a:t>Deploy online</a:t>
+            </a:r>
+          </a:p>
+        </p:txBody>
+      </p:sp>
+      <p:sp>
+        <p:nvSpPr>
+          <p:cNvPr id="17" name="TextBox 16"/>
+          <p:cNvSpPr txBox="1"/>
+          <p:nvPr/>
+        </p:nvSpPr>
+        <p:spPr>
+          <a:xfrm>
+            <a:off x="1600200" y="5166359"/>
+            <a:ext cx="9692640" cy="548640"/>
+          </a:xfrm>
+          <a:prstGeom prst="rect">
+            <a:avLst/>
+          </a:prstGeom>
+          <a:noFill/>
+        </p:spPr>
+        <p:txBody>
+          <a:bodyPr wrap="square" anchor="t" lIns="0" rIns="0" tIns="0" bIns="0">
+            <a:spAutoFit/>
+          </a:bodyPr>
+          <a:lstStyle/>
+          <a:p>
+            <a:pPr algn="l">
+              <a:lnSpc>
+                <a:spcPct val="105000"/>
+              </a:lnSpc>
+              <a:spcAft>
+                <a:spcPts val="400"/>
+              </a:spcAft>
+            </a:pPr>
+            <a:r>
+              <a:rPr sz="1350" b="0">
+                <a:solidFill>
+                  <a:srgbClr val="7A7263"/>
+                </a:solidFill>
+                <a:latin typeface="Calibri"/>
+              </a:rPr>
+              <a:t>Database on Aiven, app on Vercel, wired via env vars.</a:t>
+            </a:r>
+          </a:p>
+        </p:txBody>
+      </p:sp>
+      <p:sp>
+        <p:nvSpPr>
+          <p:cNvPr id="18" name="TextBox 17"/>
           <p:cNvSpPr txBox="1"/>
           <p:nvPr/>
         </p:nvSpPr>
@@ -8382,7 +8385,7 @@
       </p:sp>
       <p:sp>
         <p:nvSpPr>
-          <p:cNvPr id="12" name="TextBox 11"/>
+          <p:cNvPr id="19" name="TextBox 18"/>
           <p:cNvSpPr txBox="1"/>
           <p:nvPr/>
         </p:nvSpPr>
@@ -8455,6 +8458,803 @@
             <a:avLst/>
           </a:prstGeom>
           <a:solidFill>
+            <a:srgbClr val="FBF6EE"/>
+          </a:solidFill>
+          <a:ln>
+            <a:noFill/>
+          </a:ln>
+          <a:effectLst/>
+        </p:spPr>
+        <p:style>
+          <a:lnRef idx="1">
+            <a:schemeClr val="accent1"/>
+          </a:lnRef>
+          <a:fillRef idx="3">
+            <a:schemeClr val="accent1"/>
+          </a:fillRef>
+          <a:effectRef idx="2">
+            <a:schemeClr val="accent1"/>
+          </a:effectRef>
+          <a:fontRef idx="minor">
+            <a:schemeClr val="lt1"/>
+          </a:fontRef>
+        </p:style>
+        <p:txBody>
+          <a:bodyPr rtlCol="0" anchor="ctr"/>
+          <a:lstStyle/>
+          <a:p>
+            <a:pPr algn="ctr"/>
+          </a:p>
+        </p:txBody>
+      </p:sp>
+      <p:sp>
+        <p:nvSpPr>
+          <p:cNvPr id="3" name="TextBox 2"/>
+          <p:cNvSpPr txBox="1"/>
+          <p:nvPr/>
+        </p:nvSpPr>
+        <p:spPr>
+          <a:xfrm>
+            <a:off x="822960" y="566928"/>
+            <a:ext cx="10058400" cy="365760"/>
+          </a:xfrm>
+          <a:prstGeom prst="rect">
+            <a:avLst/>
+          </a:prstGeom>
+          <a:noFill/>
+        </p:spPr>
+        <p:txBody>
+          <a:bodyPr wrap="none" lIns="0" rIns="0" tIns="0" bIns="0">
+            <a:spAutoFit/>
+          </a:bodyPr>
+          <a:lstStyle/>
+          <a:p>
+            <a:r>
+              <a:rPr sz="1300" b="1">
+                <a:solidFill>
+                  <a:srgbClr val="7A7263"/>
+                </a:solidFill>
+                <a:latin typeface="Calibri"/>
+              </a:rPr>
+              <a:t>SUMMARY</a:t>
+            </a:r>
+          </a:p>
+        </p:txBody>
+      </p:sp>
+      <p:sp>
+        <p:nvSpPr>
+          <p:cNvPr id="4" name="TextBox 3"/>
+          <p:cNvSpPr txBox="1"/>
+          <p:nvPr/>
+        </p:nvSpPr>
+        <p:spPr>
+          <a:xfrm>
+            <a:off x="822960" y="868680"/>
+            <a:ext cx="10515600" cy="914400"/>
+          </a:xfrm>
+          <a:prstGeom prst="rect">
+            <a:avLst/>
+          </a:prstGeom>
+          <a:noFill/>
+        </p:spPr>
+        <p:txBody>
+          <a:bodyPr wrap="square" anchor="t" lIns="0" rIns="0" tIns="0" bIns="0">
+            <a:spAutoFit/>
+          </a:bodyPr>
+          <a:lstStyle/>
+          <a:p>
+            <a:pPr algn="l">
+              <a:lnSpc>
+                <a:spcPct val="104000"/>
+              </a:lnSpc>
+              <a:spcAft>
+                <a:spcPts val="400"/>
+              </a:spcAft>
+            </a:pPr>
+            <a:r>
+              <a:rPr sz="3400" b="1">
+                <a:solidFill>
+                  <a:srgbClr val="26415E"/>
+                </a:solidFill>
+                <a:latin typeface="Georgia"/>
+              </a:rPr>
+              <a:t>Deliverables &amp; technology</a:t>
+            </a:r>
+          </a:p>
+        </p:txBody>
+      </p:sp>
+      <p:sp>
+        <p:nvSpPr>
+          <p:cNvPr id="5" name="Rectangle 4"/>
+          <p:cNvSpPr/>
+          <p:nvPr/>
+        </p:nvSpPr>
+        <p:spPr>
+          <a:xfrm>
+            <a:off x="841248" y="1572768"/>
+            <a:ext cx="822960" cy="54864"/>
+          </a:xfrm>
+          <a:prstGeom prst="rect">
+            <a:avLst/>
+          </a:prstGeom>
+          <a:solidFill>
+            <a:srgbClr val="A8503A"/>
+          </a:solidFill>
+          <a:ln>
+            <a:noFill/>
+          </a:ln>
+          <a:effectLst/>
+        </p:spPr>
+        <p:style>
+          <a:lnRef idx="1">
+            <a:schemeClr val="accent1"/>
+          </a:lnRef>
+          <a:fillRef idx="3">
+            <a:schemeClr val="accent1"/>
+          </a:fillRef>
+          <a:effectRef idx="2">
+            <a:schemeClr val="accent1"/>
+          </a:effectRef>
+          <a:fontRef idx="minor">
+            <a:schemeClr val="lt1"/>
+          </a:fontRef>
+        </p:style>
+        <p:txBody>
+          <a:bodyPr rtlCol="0" anchor="ctr"/>
+          <a:lstStyle/>
+          <a:p>
+            <a:pPr algn="ctr"/>
+          </a:p>
+        </p:txBody>
+      </p:sp>
+      <p:sp>
+        <p:nvSpPr>
+          <p:cNvPr id="6" name="TextBox 5"/>
+          <p:cNvSpPr txBox="1"/>
+          <p:nvPr/>
+        </p:nvSpPr>
+        <p:spPr>
+          <a:xfrm>
+            <a:off x="841248" y="1920240"/>
+            <a:ext cx="5212080" cy="365760"/>
+          </a:xfrm>
+          <a:prstGeom prst="rect">
+            <a:avLst/>
+          </a:prstGeom>
+          <a:noFill/>
+        </p:spPr>
+        <p:txBody>
+          <a:bodyPr wrap="square" anchor="t" lIns="0" rIns="0" tIns="0" bIns="0">
+            <a:spAutoFit/>
+          </a:bodyPr>
+          <a:lstStyle/>
+          <a:p>
+            <a:pPr algn="l">
+              <a:lnSpc>
+                <a:spcPct val="104000"/>
+              </a:lnSpc>
+              <a:spcAft>
+                <a:spcPts val="400"/>
+              </a:spcAft>
+            </a:pPr>
+            <a:r>
+              <a:rPr sz="1800" b="1">
+                <a:solidFill>
+                  <a:srgbClr val="A8503A"/>
+                </a:solidFill>
+                <a:latin typeface="Calibri"/>
+              </a:rPr>
+              <a:t>Deliverables</a:t>
+            </a:r>
+          </a:p>
+        </p:txBody>
+      </p:sp>
+      <p:sp>
+        <p:nvSpPr>
+          <p:cNvPr id="7" name="TextBox 6"/>
+          <p:cNvSpPr txBox="1"/>
+          <p:nvPr/>
+        </p:nvSpPr>
+        <p:spPr>
+          <a:xfrm>
+            <a:off x="841248" y="2468880"/>
+            <a:ext cx="5212080" cy="3657600"/>
+          </a:xfrm>
+          <a:prstGeom prst="rect">
+            <a:avLst/>
+          </a:prstGeom>
+          <a:noFill/>
+        </p:spPr>
+        <p:txBody>
+          <a:bodyPr wrap="square" lIns="0" rIns="0" tIns="0" bIns="0">
+            <a:spAutoFit/>
+          </a:bodyPr>
+          <a:lstStyle/>
+          <a:p>
+            <a:pPr>
+              <a:lnSpc>
+                <a:spcPct val="106000"/>
+              </a:lnSpc>
+              <a:spcAft>
+                <a:spcPts val="1000"/>
+              </a:spcAft>
+            </a:pPr>
+            <a:r>
+              <a:rPr sz="1550" b="1">
+                <a:solidFill>
+                  <a:srgbClr val="A8503A"/>
+                </a:solidFill>
+                <a:latin typeface="Calibri"/>
+              </a:rPr>
+              <a:t>—  </a:t>
+            </a:r>
+            <a:r>
+              <a:rPr sz="1550">
+                <a:solidFill>
+                  <a:srgbClr val="2C2A26"/>
+                </a:solidFill>
+                <a:latin typeface="Calibri"/>
+              </a:rPr>
+              <a:t>Relational schema (3NF) + data dictionary</a:t>
+            </a:r>
+          </a:p>
+          <a:p>
+            <a:pPr>
+              <a:lnSpc>
+                <a:spcPct val="106000"/>
+              </a:lnSpc>
+              <a:spcAft>
+                <a:spcPts val="1000"/>
+              </a:spcAft>
+            </a:pPr>
+            <a:r>
+              <a:rPr sz="1550" b="1">
+                <a:solidFill>
+                  <a:srgbClr val="A8503A"/>
+                </a:solidFill>
+                <a:latin typeface="Calibri"/>
+              </a:rPr>
+              <a:t>—  </a:t>
+            </a:r>
+            <a:r>
+              <a:rPr sz="1550">
+                <a:solidFill>
+                  <a:srgbClr val="2C2A26"/>
+                </a:solidFill>
+                <a:latin typeface="Calibri"/>
+              </a:rPr>
+              <a:t>SQL: schema, data, views, queries, procedures</a:t>
+            </a:r>
+          </a:p>
+          <a:p>
+            <a:pPr>
+              <a:lnSpc>
+                <a:spcPct val="106000"/>
+              </a:lnSpc>
+              <a:spcAft>
+                <a:spcPts val="1000"/>
+              </a:spcAft>
+            </a:pPr>
+            <a:r>
+              <a:rPr sz="1550" b="1">
+                <a:solidFill>
+                  <a:srgbClr val="A8503A"/>
+                </a:solidFill>
+                <a:latin typeface="Calibri"/>
+              </a:rPr>
+              <a:t>—  </a:t>
+            </a:r>
+            <a:r>
+              <a:rPr sz="1550">
+                <a:solidFill>
+                  <a:srgbClr val="2C2A26"/>
+                </a:solidFill>
+                <a:latin typeface="Calibri"/>
+              </a:rPr>
+              <a:t>~200-record sample dataset</a:t>
+            </a:r>
+          </a:p>
+          <a:p>
+            <a:pPr>
+              <a:lnSpc>
+                <a:spcPct val="106000"/>
+              </a:lnSpc>
+              <a:spcAft>
+                <a:spcPts val="1000"/>
+              </a:spcAft>
+            </a:pPr>
+            <a:r>
+              <a:rPr sz="1550" b="1">
+                <a:solidFill>
+                  <a:srgbClr val="A8503A"/>
+                </a:solidFill>
+                <a:latin typeface="Calibri"/>
+              </a:rPr>
+              <a:t>—  </a:t>
+            </a:r>
+            <a:r>
+              <a:rPr sz="1550">
+                <a:solidFill>
+                  <a:srgbClr val="2C2A26"/>
+                </a:solidFill>
+                <a:latin typeface="Calibri"/>
+              </a:rPr>
+              <a:t>Working web app (frontend + API)</a:t>
+            </a:r>
+          </a:p>
+          <a:p>
+            <a:pPr>
+              <a:lnSpc>
+                <a:spcPct val="106000"/>
+              </a:lnSpc>
+              <a:spcAft>
+                <a:spcPts val="1000"/>
+              </a:spcAft>
+            </a:pPr>
+            <a:r>
+              <a:rPr sz="1550" b="1">
+                <a:solidFill>
+                  <a:srgbClr val="A8503A"/>
+                </a:solidFill>
+                <a:latin typeface="Calibri"/>
+              </a:rPr>
+              <a:t>—  </a:t>
+            </a:r>
+            <a:r>
+              <a:rPr sz="1550">
+                <a:solidFill>
+                  <a:srgbClr val="2C2A26"/>
+                </a:solidFill>
+                <a:latin typeface="Calibri"/>
+              </a:rPr>
+              <a:t>Report &amp; step-by-step walkthrough (PDF)</a:t>
+            </a:r>
+          </a:p>
+          <a:p>
+            <a:pPr>
+              <a:lnSpc>
+                <a:spcPct val="106000"/>
+              </a:lnSpc>
+              <a:spcAft>
+                <a:spcPts val="1000"/>
+              </a:spcAft>
+            </a:pPr>
+            <a:r>
+              <a:rPr sz="1550" b="1">
+                <a:solidFill>
+                  <a:srgbClr val="A8503A"/>
+                </a:solidFill>
+                <a:latin typeface="Calibri"/>
+              </a:rPr>
+              <a:t>—  </a:t>
+            </a:r>
+            <a:r>
+              <a:rPr sz="1550">
+                <a:solidFill>
+                  <a:srgbClr val="2C2A26"/>
+                </a:solidFill>
+                <a:latin typeface="Calibri"/>
+              </a:rPr>
+              <a:t>This presentation</a:t>
+            </a:r>
+          </a:p>
+        </p:txBody>
+      </p:sp>
+      <p:sp>
+        <p:nvSpPr>
+          <p:cNvPr id="8" name="Rounded Rectangle 7"/>
+          <p:cNvSpPr/>
+          <p:nvPr/>
+        </p:nvSpPr>
+        <p:spPr>
+          <a:xfrm>
+            <a:off x="6400800" y="1920240"/>
+            <a:ext cx="4937760" cy="4206240"/>
+          </a:xfrm>
+          <a:prstGeom prst="roundRect">
+            <a:avLst>
+              <a:gd name="adj" fmla="val 5000"/>
+            </a:avLst>
+          </a:prstGeom>
+          <a:solidFill>
+            <a:srgbClr val="F6EFE4"/>
+          </a:solidFill>
+          <a:ln w="15240">
+            <a:solidFill>
+              <a:srgbClr val="E6DCCC"/>
+            </a:solidFill>
+          </a:ln>
+          <a:effectLst/>
+        </p:spPr>
+        <p:style>
+          <a:lnRef idx="1">
+            <a:schemeClr val="accent1"/>
+          </a:lnRef>
+          <a:fillRef idx="3">
+            <a:schemeClr val="accent1"/>
+          </a:fillRef>
+          <a:effectRef idx="2">
+            <a:schemeClr val="accent1"/>
+          </a:effectRef>
+          <a:fontRef idx="minor">
+            <a:schemeClr val="lt1"/>
+          </a:fontRef>
+        </p:style>
+        <p:txBody>
+          <a:bodyPr rtlCol="0" anchor="ctr"/>
+          <a:lstStyle/>
+          <a:p>
+            <a:pPr algn="ctr"/>
+          </a:p>
+        </p:txBody>
+      </p:sp>
+      <p:sp>
+        <p:nvSpPr>
+          <p:cNvPr id="9" name="TextBox 8"/>
+          <p:cNvSpPr txBox="1"/>
+          <p:nvPr/>
+        </p:nvSpPr>
+        <p:spPr>
+          <a:xfrm>
+            <a:off x="6675120" y="2148840"/>
+            <a:ext cx="4389120" cy="365760"/>
+          </a:xfrm>
+          <a:prstGeom prst="rect">
+            <a:avLst/>
+          </a:prstGeom>
+          <a:noFill/>
+        </p:spPr>
+        <p:txBody>
+          <a:bodyPr wrap="square" anchor="t" lIns="0" rIns="0" tIns="0" bIns="0">
+            <a:spAutoFit/>
+          </a:bodyPr>
+          <a:lstStyle/>
+          <a:p>
+            <a:pPr algn="l">
+              <a:lnSpc>
+                <a:spcPct val="104000"/>
+              </a:lnSpc>
+              <a:spcAft>
+                <a:spcPts val="400"/>
+              </a:spcAft>
+            </a:pPr>
+            <a:r>
+              <a:rPr sz="1800" b="1">
+                <a:solidFill>
+                  <a:srgbClr val="A8503A"/>
+                </a:solidFill>
+                <a:latin typeface="Calibri"/>
+              </a:rPr>
+              <a:t>Technology</a:t>
+            </a:r>
+          </a:p>
+        </p:txBody>
+      </p:sp>
+      <p:sp>
+        <p:nvSpPr>
+          <p:cNvPr id="10" name="TextBox 9"/>
+          <p:cNvSpPr txBox="1"/>
+          <p:nvPr/>
+        </p:nvSpPr>
+        <p:spPr>
+          <a:xfrm>
+            <a:off x="6675120" y="2697480"/>
+            <a:ext cx="4434840" cy="3291840"/>
+          </a:xfrm>
+          <a:prstGeom prst="rect">
+            <a:avLst/>
+          </a:prstGeom>
+          <a:noFill/>
+        </p:spPr>
+        <p:txBody>
+          <a:bodyPr wrap="square" lIns="0" rIns="0" tIns="0" bIns="0">
+            <a:spAutoFit/>
+          </a:bodyPr>
+          <a:lstStyle/>
+          <a:p>
+            <a:pPr>
+              <a:lnSpc>
+                <a:spcPct val="106000"/>
+              </a:lnSpc>
+              <a:spcAft>
+                <a:spcPts val="1200"/>
+              </a:spcAft>
+            </a:pPr>
+            <a:r>
+              <a:rPr sz="1550" b="1">
+                <a:solidFill>
+                  <a:srgbClr val="A8503A"/>
+                </a:solidFill>
+                <a:latin typeface="Calibri"/>
+              </a:rPr>
+              <a:t>—  </a:t>
+            </a:r>
+            <a:r>
+              <a:rPr sz="1550" b="1">
+                <a:solidFill>
+                  <a:srgbClr val="2C2A26"/>
+                </a:solidFill>
+                <a:latin typeface="Calibri"/>
+              </a:rPr>
+              <a:t>Database: </a:t>
+            </a:r>
+            <a:r>
+              <a:rPr sz="1550">
+                <a:solidFill>
+                  <a:srgbClr val="2C2A26"/>
+                </a:solidFill>
+                <a:latin typeface="Calibri"/>
+              </a:rPr>
+              <a:t>MySQL 8 (InnoDB)</a:t>
+            </a:r>
+          </a:p>
+          <a:p>
+            <a:pPr>
+              <a:lnSpc>
+                <a:spcPct val="106000"/>
+              </a:lnSpc>
+              <a:spcAft>
+                <a:spcPts val="1200"/>
+              </a:spcAft>
+            </a:pPr>
+            <a:r>
+              <a:rPr sz="1550" b="1">
+                <a:solidFill>
+                  <a:srgbClr val="A8503A"/>
+                </a:solidFill>
+                <a:latin typeface="Calibri"/>
+              </a:rPr>
+              <a:t>—  </a:t>
+            </a:r>
+            <a:r>
+              <a:rPr sz="1550" b="1">
+                <a:solidFill>
+                  <a:srgbClr val="2C2A26"/>
+                </a:solidFill>
+                <a:latin typeface="Calibri"/>
+              </a:rPr>
+              <a:t>Backend: </a:t>
+            </a:r>
+            <a:r>
+              <a:rPr sz="1550">
+                <a:solidFill>
+                  <a:srgbClr val="2C2A26"/>
+                </a:solidFill>
+                <a:latin typeface="Calibri"/>
+              </a:rPr>
+              <a:t>Node.js + Express</a:t>
+            </a:r>
+          </a:p>
+          <a:p>
+            <a:pPr>
+              <a:lnSpc>
+                <a:spcPct val="106000"/>
+              </a:lnSpc>
+              <a:spcAft>
+                <a:spcPts val="1200"/>
+              </a:spcAft>
+            </a:pPr>
+            <a:r>
+              <a:rPr sz="1550" b="1">
+                <a:solidFill>
+                  <a:srgbClr val="A8503A"/>
+                </a:solidFill>
+                <a:latin typeface="Calibri"/>
+              </a:rPr>
+              <a:t>—  </a:t>
+            </a:r>
+            <a:r>
+              <a:rPr sz="1550" b="1">
+                <a:solidFill>
+                  <a:srgbClr val="2C2A26"/>
+                </a:solidFill>
+                <a:latin typeface="Calibri"/>
+              </a:rPr>
+              <a:t>Frontend: </a:t>
+            </a:r>
+            <a:r>
+              <a:rPr sz="1550">
+                <a:solidFill>
+                  <a:srgbClr val="2C2A26"/>
+                </a:solidFill>
+                <a:latin typeface="Calibri"/>
+              </a:rPr>
+              <a:t>HTML, CSS, JavaScript</a:t>
+            </a:r>
+          </a:p>
+          <a:p>
+            <a:pPr>
+              <a:lnSpc>
+                <a:spcPct val="106000"/>
+              </a:lnSpc>
+              <a:spcAft>
+                <a:spcPts val="1200"/>
+              </a:spcAft>
+            </a:pPr>
+            <a:r>
+              <a:rPr sz="1550" b="1">
+                <a:solidFill>
+                  <a:srgbClr val="A8503A"/>
+                </a:solidFill>
+                <a:latin typeface="Calibri"/>
+              </a:rPr>
+              <a:t>—  </a:t>
+            </a:r>
+            <a:r>
+              <a:rPr sz="1550" b="1">
+                <a:solidFill>
+                  <a:srgbClr val="2C2A26"/>
+                </a:solidFill>
+                <a:latin typeface="Calibri"/>
+              </a:rPr>
+              <a:t>Hosting: </a:t>
+            </a:r>
+            <a:r>
+              <a:rPr sz="1550">
+                <a:solidFill>
+                  <a:srgbClr val="2C2A26"/>
+                </a:solidFill>
+                <a:latin typeface="Calibri"/>
+              </a:rPr>
+              <a:t>Vercel + Aiven</a:t>
+            </a:r>
+          </a:p>
+          <a:p>
+            <a:pPr>
+              <a:lnSpc>
+                <a:spcPct val="106000"/>
+              </a:lnSpc>
+              <a:spcAft>
+                <a:spcPts val="1200"/>
+              </a:spcAft>
+            </a:pPr>
+            <a:r>
+              <a:rPr sz="1550" b="1">
+                <a:solidFill>
+                  <a:srgbClr val="A8503A"/>
+                </a:solidFill>
+                <a:latin typeface="Calibri"/>
+              </a:rPr>
+              <a:t>—  </a:t>
+            </a:r>
+            <a:r>
+              <a:rPr sz="1550" b="1">
+                <a:solidFill>
+                  <a:srgbClr val="2C2A26"/>
+                </a:solidFill>
+                <a:latin typeface="Calibri"/>
+              </a:rPr>
+              <a:t>Source: </a:t>
+            </a:r>
+            <a:r>
+              <a:rPr sz="1550">
+                <a:solidFill>
+                  <a:srgbClr val="2C2A26"/>
+                </a:solidFill>
+                <a:latin typeface="Calibri"/>
+              </a:rPr>
+              <a:t>GitHub</a:t>
+            </a:r>
+          </a:p>
+        </p:txBody>
+      </p:sp>
+      <p:sp>
+        <p:nvSpPr>
+          <p:cNvPr id="11" name="TextBox 10"/>
+          <p:cNvSpPr txBox="1"/>
+          <p:nvPr/>
+        </p:nvSpPr>
+        <p:spPr>
+          <a:xfrm>
+            <a:off x="822960" y="6437376"/>
+            <a:ext cx="7315200" cy="301752"/>
+          </a:xfrm>
+          <a:prstGeom prst="rect">
+            <a:avLst/>
+          </a:prstGeom>
+          <a:noFill/>
+        </p:spPr>
+        <p:txBody>
+          <a:bodyPr wrap="square" anchor="t" lIns="0" rIns="0" tIns="0" bIns="0">
+            <a:spAutoFit/>
+          </a:bodyPr>
+          <a:lstStyle/>
+          <a:p>
+            <a:pPr algn="l">
+              <a:lnSpc>
+                <a:spcPct val="104000"/>
+              </a:lnSpc>
+              <a:spcAft>
+                <a:spcPts val="400"/>
+              </a:spcAft>
+            </a:pPr>
+            <a:r>
+              <a:rPr sz="1000" b="0">
+                <a:solidFill>
+                  <a:srgbClr val="7A7263"/>
+                </a:solidFill>
+                <a:latin typeface="Calibri"/>
+              </a:rPr>
+              <a:t>Athenaeum · Library Management System</a:t>
+            </a:r>
+          </a:p>
+        </p:txBody>
+      </p:sp>
+      <p:sp>
+        <p:nvSpPr>
+          <p:cNvPr id="12" name="TextBox 11"/>
+          <p:cNvSpPr txBox="1"/>
+          <p:nvPr/>
+        </p:nvSpPr>
+        <p:spPr>
+          <a:xfrm>
+            <a:off x="10607040" y="6437376"/>
+            <a:ext cx="914400" cy="301752"/>
+          </a:xfrm>
+          <a:prstGeom prst="rect">
+            <a:avLst/>
+          </a:prstGeom>
+          <a:noFill/>
+        </p:spPr>
+        <p:txBody>
+          <a:bodyPr wrap="square" anchor="t" lIns="0" rIns="0" tIns="0" bIns="0">
+            <a:spAutoFit/>
+          </a:bodyPr>
+          <a:lstStyle/>
+          <a:p>
+            <a:pPr algn="r">
+              <a:lnSpc>
+                <a:spcPct val="104000"/>
+              </a:lnSpc>
+              <a:spcAft>
+                <a:spcPts val="400"/>
+              </a:spcAft>
+            </a:pPr>
+            <a:r>
+              <a:rPr sz="1000" b="0">
+                <a:solidFill>
+                  <a:srgbClr val="7A7263"/>
+                </a:solidFill>
+                <a:latin typeface="Calibri"/>
+              </a:rPr>
+              <a:t>16</a:t>
+            </a:r>
+          </a:p>
+        </p:txBody>
+      </p:sp>
+    </p:spTree>
+  </p:cSld>
+  <p:clrMapOvr>
+    <a:masterClrMapping/>
+  </p:clrMapOvr>
+</p:sld>
+</file>
+
+<file path=ppt/slides/slide17.xml><?xml version="1.0" encoding="utf-8"?>
+<p:sld xmlns:a="http://schemas.openxmlformats.org/drawingml/2006/main" xmlns:p="http://schemas.openxmlformats.org/presentationml/2006/main" xmlns:r="http://schemas.openxmlformats.org/officeDocument/2006/relationships">
+  <p:cSld>
+    <p:spTree>
+      <p:nvGrpSpPr>
+        <p:cNvPr id="1" name=""/>
+        <p:cNvGrpSpPr/>
+        <p:nvPr/>
+      </p:nvGrpSpPr>
+      <p:grpSpPr/>
+      <p:sp>
+        <p:nvSpPr>
+          <p:cNvPr id="2" name="Rectangle 1"/>
+          <p:cNvSpPr/>
+          <p:nvPr/>
+        </p:nvSpPr>
+        <p:spPr>
+          <a:xfrm>
+            <a:off x="0" y="0"/>
+            <a:ext cx="12191695" cy="6858000"/>
+          </a:xfrm>
+          <a:prstGeom prst="rect">
+            <a:avLst/>
+          </a:prstGeom>
+          <a:solidFill>
             <a:srgbClr val="26415E"/>
           </a:solidFill>
           <a:ln>
@@ -12734,7 +13534,7 @@
                 </a:solidFill>
                 <a:latin typeface="Georgia"/>
               </a:rPr>
-              <a:t>The data model — 11 entities</a:t>
+              <a:t>From ER diagram to 11 tables</a:t>
             </a:r>
           </a:p>
         </p:txBody>
@@ -12791,8 +13591,8 @@
         </p:nvSpPr>
         <p:spPr>
           <a:xfrm>
-            <a:off x="841248" y="1783080"/>
-            <a:ext cx="5212080" cy="457200"/>
+            <a:off x="841248" y="1737360"/>
+            <a:ext cx="10424160" cy="457200"/>
           </a:xfrm>
           <a:prstGeom prst="rect">
             <a:avLst/>
@@ -12814,198 +13614,99 @@
               </a:spcAft>
             </a:pPr>
             <a:r>
-              <a:rPr sz="1600" b="1">
-                <a:solidFill>
-                  <a:srgbClr val="A8503A"/>
-                </a:solidFill>
-                <a:latin typeface="Calibri"/>
-              </a:rPr>
-              <a:t>Tables, grouped by purpose</a:t>
-            </a:r>
-          </a:p>
-        </p:txBody>
-      </p:sp>
-      <p:sp>
-        <p:nvSpPr>
-          <p:cNvPr id="7" name="TextBox 6"/>
-          <p:cNvSpPr txBox="1"/>
-          <p:nvPr/>
-        </p:nvSpPr>
-        <p:spPr>
-          <a:xfrm>
-            <a:off x="841248" y="2331720"/>
-            <a:ext cx="5303520" cy="3840480"/>
-          </a:xfrm>
-          <a:prstGeom prst="rect">
-            <a:avLst/>
-          </a:prstGeom>
-          <a:noFill/>
-        </p:spPr>
-        <p:txBody>
-          <a:bodyPr wrap="square" lIns="0" rIns="0" tIns="0" bIns="0">
-            <a:spAutoFit/>
-          </a:bodyPr>
-          <a:lstStyle/>
-          <a:p>
-            <a:pPr>
-              <a:lnSpc>
-                <a:spcPct val="106000"/>
-              </a:lnSpc>
-              <a:spcAft>
-                <a:spcPts val="1400"/>
-              </a:spcAft>
-            </a:pPr>
-            <a:r>
-              <a:rPr sz="1550" b="1">
-                <a:solidFill>
-                  <a:srgbClr val="A8503A"/>
-                </a:solidFill>
-                <a:latin typeface="Calibri"/>
-              </a:rPr>
-              <a:t>—  </a:t>
-            </a:r>
-            <a:r>
-              <a:rPr sz="1550" b="1">
+              <a:rPr sz="1550" b="0">
                 <a:solidFill>
                   <a:srgbClr val="2C2A26"/>
                 </a:solidFill>
                 <a:latin typeface="Calibri"/>
               </a:rPr>
-              <a:t>Catalogue: </a:t>
-            </a:r>
-            <a:r>
-              <a:rPr sz="1550">
-                <a:solidFill>
-                  <a:srgbClr val="2C2A26"/>
-                </a:solidFill>
-                <a:latin typeface="Calibri"/>
-              </a:rPr>
-              <a:t>publisher, category, author, book, book_author</a:t>
-            </a:r>
-          </a:p>
-          <a:p>
-            <a:pPr>
-              <a:lnSpc>
-                <a:spcPct val="106000"/>
-              </a:lnSpc>
-              <a:spcAft>
-                <a:spcPts val="1400"/>
-              </a:spcAft>
-            </a:pPr>
-            <a:r>
-              <a:rPr sz="1550" b="1">
-                <a:solidFill>
-                  <a:srgbClr val="A8503A"/>
-                </a:solidFill>
-                <a:latin typeface="Calibri"/>
-              </a:rPr>
-              <a:t>—  </a:t>
-            </a:r>
-            <a:r>
-              <a:rPr sz="1550" b="1">
-                <a:solidFill>
-                  <a:srgbClr val="2C2A26"/>
-                </a:solidFill>
-                <a:latin typeface="Calibri"/>
-              </a:rPr>
-              <a:t>Inventory: </a:t>
-            </a:r>
-            <a:r>
-              <a:rPr sz="1550">
-                <a:solidFill>
-                  <a:srgbClr val="2C2A26"/>
-                </a:solidFill>
-                <a:latin typeface="Calibri"/>
-              </a:rPr>
-              <a:t>book_copy (each physical item + status)</a:t>
-            </a:r>
-          </a:p>
-          <a:p>
-            <a:pPr>
-              <a:lnSpc>
-                <a:spcPct val="106000"/>
-              </a:lnSpc>
-              <a:spcAft>
-                <a:spcPts val="1400"/>
-              </a:spcAft>
-            </a:pPr>
-            <a:r>
-              <a:rPr sz="1550" b="1">
-                <a:solidFill>
-                  <a:srgbClr val="A8503A"/>
-                </a:solidFill>
-                <a:latin typeface="Calibri"/>
-              </a:rPr>
-              <a:t>—  </a:t>
-            </a:r>
-            <a:r>
-              <a:rPr sz="1550" b="1">
-                <a:solidFill>
-                  <a:srgbClr val="2C2A26"/>
-                </a:solidFill>
-                <a:latin typeface="Calibri"/>
-              </a:rPr>
-              <a:t>People: </a:t>
-            </a:r>
-            <a:r>
-              <a:rPr sz="1550">
-                <a:solidFill>
-                  <a:srgbClr val="2C2A26"/>
-                </a:solidFill>
-                <a:latin typeface="Calibri"/>
-              </a:rPr>
-              <a:t>member, staff</a:t>
-            </a:r>
-          </a:p>
-          <a:p>
-            <a:pPr>
-              <a:lnSpc>
-                <a:spcPct val="106000"/>
-              </a:lnSpc>
-              <a:spcAft>
-                <a:spcPts val="1400"/>
-              </a:spcAft>
-            </a:pPr>
-            <a:r>
-              <a:rPr sz="1550" b="1">
-                <a:solidFill>
-                  <a:srgbClr val="A8503A"/>
-                </a:solidFill>
-                <a:latin typeface="Calibri"/>
-              </a:rPr>
-              <a:t>—  </a:t>
-            </a:r>
-            <a:r>
-              <a:rPr sz="1550" b="1">
-                <a:solidFill>
-                  <a:srgbClr val="2C2A26"/>
-                </a:solidFill>
-                <a:latin typeface="Calibri"/>
-              </a:rPr>
-              <a:t>Activity: </a:t>
-            </a:r>
-            <a:r>
-              <a:rPr sz="1550">
-                <a:solidFill>
-                  <a:srgbClr val="2C2A26"/>
-                </a:solidFill>
-                <a:latin typeface="Calibri"/>
-              </a:rPr>
-              <a:t>borrowing, fine, reservation</a:t>
-            </a:r>
-          </a:p>
-        </p:txBody>
-      </p:sp>
-      <p:sp>
-        <p:nvSpPr>
-          <p:cNvPr id="8" name="Rounded Rectangle 7"/>
+              <a:t>The entity–relationship design — each box is an entity that becomes one table:</a:t>
+            </a:r>
+          </a:p>
+        </p:txBody>
+      </p:sp>
+      <p:sp>
+        <p:nvSpPr>
+          <p:cNvPr id="7" name="Rounded Rectangle 6"/>
           <p:cNvSpPr/>
           <p:nvPr/>
         </p:nvSpPr>
         <p:spPr>
           <a:xfrm>
-            <a:off x="6400800" y="1920240"/>
-            <a:ext cx="4937760" cy="4297680"/>
+            <a:off x="457200" y="2194560"/>
+            <a:ext cx="8321040" cy="4655832"/>
+          </a:xfrm>
+          <a:prstGeom prst="roundRect">
+            <a:avLst>
+              <a:gd name="adj" fmla="val 2000"/>
+            </a:avLst>
+          </a:prstGeom>
+          <a:solidFill>
+            <a:srgbClr val="FFFFFF"/>
+          </a:solidFill>
+          <a:ln w="15240">
+            <a:solidFill>
+              <a:srgbClr val="E6DCCC"/>
+            </a:solidFill>
+          </a:ln>
+          <a:effectLst/>
+        </p:spPr>
+        <p:style>
+          <a:lnRef idx="1">
+            <a:schemeClr val="accent1"/>
+          </a:lnRef>
+          <a:fillRef idx="3">
+            <a:schemeClr val="accent1"/>
+          </a:fillRef>
+          <a:effectRef idx="2">
+            <a:schemeClr val="accent1"/>
+          </a:effectRef>
+          <a:fontRef idx="minor">
+            <a:schemeClr val="lt1"/>
+          </a:fontRef>
+        </p:style>
+        <p:txBody>
+          <a:bodyPr rtlCol="0" anchor="ctr"/>
+          <a:lstStyle/>
+          <a:p>
+            <a:pPr algn="ctr"/>
+          </a:p>
+        </p:txBody>
+      </p:sp>
+      <p:pic>
+        <p:nvPicPr>
+          <p:cNvPr id="8" name="Picture 7" descr="er.png"/>
+          <p:cNvPicPr>
+            <a:picLocks noChangeAspect="1"/>
+          </p:cNvPicPr>
+          <p:nvPr/>
+        </p:nvPicPr>
+        <p:blipFill>
+          <a:blip r:embed="rId2"/>
+          <a:stretch>
+            <a:fillRect/>
+          </a:stretch>
+        </p:blipFill>
+        <p:spPr>
+          <a:xfrm>
+            <a:off x="502920" y="2240280"/>
+            <a:ext cx="8229600" cy="4564392"/>
+          </a:xfrm>
+          <a:prstGeom prst="rect">
+            <a:avLst/>
+          </a:prstGeom>
+        </p:spPr>
+      </p:pic>
+      <p:sp>
+        <p:nvSpPr>
+          <p:cNvPr id="9" name="Rounded Rectangle 8"/>
+          <p:cNvSpPr/>
+          <p:nvPr/>
+        </p:nvSpPr>
+        <p:spPr>
+          <a:xfrm>
+            <a:off x="9006840" y="2240280"/>
+            <a:ext cx="2743200" cy="4564392"/>
           </a:xfrm>
           <a:prstGeom prst="roundRect">
             <a:avLst>
@@ -13046,14 +13747,14 @@
       </p:sp>
       <p:sp>
         <p:nvSpPr>
-          <p:cNvPr id="9" name="TextBox 8"/>
-          <p:cNvSpPr txBox="1"/>
-          <p:nvPr/>
-        </p:nvSpPr>
-        <p:spPr>
-          <a:xfrm>
-            <a:off x="6675120" y="2103120"/>
-            <a:ext cx="4389120" cy="365760"/>
+          <p:cNvPr id="10" name="TextBox 9"/>
+          <p:cNvSpPr txBox="1"/>
+          <p:nvPr/>
+        </p:nvSpPr>
+        <p:spPr>
+          <a:xfrm>
+            <a:off x="9262872" y="2468880"/>
+            <a:ext cx="2286000" cy="365760"/>
           </a:xfrm>
           <a:prstGeom prst="rect">
             <a:avLst/>
@@ -13075,27 +13776,27 @@
               </a:spcAft>
             </a:pPr>
             <a:r>
-              <a:rPr sz="1500" b="1">
+              <a:rPr sz="1700" b="1">
                 <a:solidFill>
                   <a:srgbClr val="A8503A"/>
                 </a:solidFill>
                 <a:latin typeface="Calibri"/>
               </a:rPr>
-              <a:t>Key relationships</a:t>
-            </a:r>
-          </a:p>
-        </p:txBody>
-      </p:sp>
-      <p:sp>
-        <p:nvSpPr>
-          <p:cNvPr id="10" name="TextBox 9"/>
-          <p:cNvSpPr txBox="1"/>
-          <p:nvPr/>
-        </p:nvSpPr>
-        <p:spPr>
-          <a:xfrm>
-            <a:off x="6675120" y="2606040"/>
-            <a:ext cx="4434840" cy="3383280"/>
+              <a:t>11 tables</a:t>
+            </a:r>
+          </a:p>
+        </p:txBody>
+      </p:sp>
+      <p:sp>
+        <p:nvSpPr>
+          <p:cNvPr id="11" name="TextBox 10"/>
+          <p:cNvSpPr txBox="1"/>
+          <p:nvPr/>
+        </p:nvSpPr>
+        <p:spPr>
+          <a:xfrm>
+            <a:off x="9262872" y="2971800"/>
+            <a:ext cx="2286000" cy="3108960"/>
           </a:xfrm>
           <a:prstGeom prst="rect">
             <a:avLst/>
@@ -13113,11 +13814,11 @@
                 <a:spcPct val="106000"/>
               </a:lnSpc>
               <a:spcAft>
-                <a:spcPts val="1200"/>
-              </a:spcAft>
-            </a:pPr>
-            <a:r>
-              <a:rPr sz="1450" b="1">
+                <a:spcPts val="900"/>
+              </a:spcAft>
+            </a:pPr>
+            <a:r>
+              <a:rPr sz="1400" b="1">
                 <a:solidFill>
                   <a:srgbClr val="A8503A"/>
                 </a:solidFill>
@@ -13126,13 +13827,22 @@
               <a:t>—  </a:t>
             </a:r>
             <a:r>
-              <a:rPr sz="1450">
+              <a:rPr sz="1400" b="1">
                 <a:solidFill>
                   <a:srgbClr val="2C2A26"/>
                 </a:solidFill>
                 <a:latin typeface="Calibri"/>
               </a:rPr>
-              <a:t>publisher → book  (1:M)</a:t>
+              <a:t>5 </a:t>
+            </a:r>
+            <a:r>
+              <a:rPr sz="1400">
+                <a:solidFill>
+                  <a:srgbClr val="2C2A26"/>
+                </a:solidFill>
+                <a:latin typeface="Calibri"/>
+              </a:rPr>
+              <a:t>catalogue</a:t>
             </a:r>
           </a:p>
           <a:p>
@@ -13141,11 +13851,11 @@
                 <a:spcPct val="106000"/>
               </a:lnSpc>
               <a:spcAft>
-                <a:spcPts val="1200"/>
-              </a:spcAft>
-            </a:pPr>
-            <a:r>
-              <a:rPr sz="1450" b="1">
+                <a:spcPts val="900"/>
+              </a:spcAft>
+            </a:pPr>
+            <a:r>
+              <a:rPr sz="1400" b="1">
                 <a:solidFill>
                   <a:srgbClr val="A8503A"/>
                 </a:solidFill>
@@ -13154,13 +13864,22 @@
               <a:t>—  </a:t>
             </a:r>
             <a:r>
-              <a:rPr sz="1450">
+              <a:rPr sz="1400" b="1">
                 <a:solidFill>
                   <a:srgbClr val="2C2A26"/>
                 </a:solidFill>
                 <a:latin typeface="Calibri"/>
               </a:rPr>
-              <a:t>book ↔ author  via book_author  (M:N)</a:t>
+              <a:t>1 </a:t>
+            </a:r>
+            <a:r>
+              <a:rPr sz="1400">
+                <a:solidFill>
+                  <a:srgbClr val="2C2A26"/>
+                </a:solidFill>
+                <a:latin typeface="Calibri"/>
+              </a:rPr>
+              <a:t>inventory (copies)</a:t>
             </a:r>
           </a:p>
           <a:p>
@@ -13169,11 +13888,11 @@
                 <a:spcPct val="106000"/>
               </a:lnSpc>
               <a:spcAft>
-                <a:spcPts val="1200"/>
-              </a:spcAft>
-            </a:pPr>
-            <a:r>
-              <a:rPr sz="1450" b="1">
+                <a:spcPts val="900"/>
+              </a:spcAft>
+            </a:pPr>
+            <a:r>
+              <a:rPr sz="1400" b="1">
                 <a:solidFill>
                   <a:srgbClr val="A8503A"/>
                 </a:solidFill>
@@ -13182,13 +13901,22 @@
               <a:t>—  </a:t>
             </a:r>
             <a:r>
-              <a:rPr sz="1450">
+              <a:rPr sz="1400" b="1">
                 <a:solidFill>
                   <a:srgbClr val="2C2A26"/>
                 </a:solidFill>
                 <a:latin typeface="Calibri"/>
               </a:rPr>
-              <a:t>book → book_copy  (1:M)</a:t>
+              <a:t>2 </a:t>
+            </a:r>
+            <a:r>
+              <a:rPr sz="1400">
+                <a:solidFill>
+                  <a:srgbClr val="2C2A26"/>
+                </a:solidFill>
+                <a:latin typeface="Calibri"/>
+              </a:rPr>
+              <a:t>people</a:t>
             </a:r>
           </a:p>
           <a:p>
@@ -13197,11 +13925,11 @@
                 <a:spcPct val="106000"/>
               </a:lnSpc>
               <a:spcAft>
-                <a:spcPts val="1200"/>
-              </a:spcAft>
-            </a:pPr>
-            <a:r>
-              <a:rPr sz="1450" b="1">
+                <a:spcPts val="900"/>
+              </a:spcAft>
+            </a:pPr>
+            <a:r>
+              <a:rPr sz="1400" b="1">
                 <a:solidFill>
                   <a:srgbClr val="A8503A"/>
                 </a:solidFill>
@@ -13210,76 +13938,71 @@
               <a:t>—  </a:t>
             </a:r>
             <a:r>
-              <a:rPr sz="1450">
+              <a:rPr sz="1400" b="1">
                 <a:solidFill>
                   <a:srgbClr val="2C2A26"/>
                 </a:solidFill>
                 <a:latin typeface="Calibri"/>
               </a:rPr>
-              <a:t>category → category  (recursive)</a:t>
-            </a:r>
-          </a:p>
-          <a:p>
-            <a:pPr>
-              <a:lnSpc>
-                <a:spcPct val="106000"/>
-              </a:lnSpc>
-              <a:spcAft>
-                <a:spcPts val="1200"/>
-              </a:spcAft>
-            </a:pPr>
-            <a:r>
-              <a:rPr sz="1450" b="1">
-                <a:solidFill>
-                  <a:srgbClr val="A8503A"/>
-                </a:solidFill>
-                <a:latin typeface="Calibri"/>
-              </a:rPr>
-              <a:t>—  </a:t>
-            </a:r>
-            <a:r>
-              <a:rPr sz="1450">
+              <a:t>3 </a:t>
+            </a:r>
+            <a:r>
+              <a:rPr sz="1400">
                 <a:solidFill>
                   <a:srgbClr val="2C2A26"/>
                 </a:solidFill>
                 <a:latin typeface="Calibri"/>
               </a:rPr>
-              <a:t>borrowing → fine  (1:1)</a:t>
-            </a:r>
-          </a:p>
-          <a:p>
-            <a:pPr>
-              <a:lnSpc>
-                <a:spcPct val="106000"/>
-              </a:lnSpc>
-              <a:spcAft>
-                <a:spcPts val="1200"/>
-              </a:spcAft>
-            </a:pPr>
-            <a:r>
-              <a:rPr sz="1450" b="1">
-                <a:solidFill>
-                  <a:srgbClr val="A8503A"/>
-                </a:solidFill>
-                <a:latin typeface="Calibri"/>
-              </a:rPr>
-              <a:t>—  </a:t>
-            </a:r>
-            <a:r>
-              <a:rPr sz="1450">
-                <a:solidFill>
-                  <a:srgbClr val="2C2A26"/>
-                </a:solidFill>
-                <a:latin typeface="Calibri"/>
-              </a:rPr>
-              <a:t>member → borrowing  (1:M)</a:t>
-            </a:r>
-          </a:p>
-        </p:txBody>
-      </p:sp>
-      <p:sp>
-        <p:nvSpPr>
-          <p:cNvPr id="11" name="TextBox 10"/>
+              <a:t>activity</a:t>
+            </a:r>
+          </a:p>
+        </p:txBody>
+      </p:sp>
+      <p:sp>
+        <p:nvSpPr>
+          <p:cNvPr id="12" name="TextBox 11"/>
+          <p:cNvSpPr txBox="1"/>
+          <p:nvPr/>
+        </p:nvSpPr>
+        <p:spPr>
+          <a:xfrm>
+            <a:off x="9262872" y="4754880"/>
+            <a:ext cx="2286000" cy="1280160"/>
+          </a:xfrm>
+          <a:prstGeom prst="rect">
+            <a:avLst/>
+          </a:prstGeom>
+          <a:noFill/>
+        </p:spPr>
+        <p:txBody>
+          <a:bodyPr wrap="square" anchor="t" lIns="0" rIns="0" tIns="0" bIns="0">
+            <a:spAutoFit/>
+          </a:bodyPr>
+          <a:lstStyle/>
+          <a:p>
+            <a:pPr algn="l">
+              <a:lnSpc>
+                <a:spcPct val="112000"/>
+              </a:lnSpc>
+              <a:spcAft>
+                <a:spcPts val="400"/>
+              </a:spcAft>
+            </a:pPr>
+            <a:r>
+              <a:rPr sz="1250" b="0">
+                <a:solidFill>
+                  <a:srgbClr val="7A7263"/>
+                </a:solidFill>
+                <a:latin typeface="Calibri"/>
+              </a:rPr>
+              <a:t>Lines show cardinality — the fork (crow's foot) marks the 'many' side.</a:t>
+            </a:r>
+          </a:p>
+        </p:txBody>
+      </p:sp>
+      <p:sp>
+        <p:nvSpPr>
+          <p:cNvPr id="13" name="TextBox 12"/>
           <p:cNvSpPr txBox="1"/>
           <p:nvPr/>
         </p:nvSpPr>
@@ -13321,7 +14044,7 @@
       </p:sp>
       <p:sp>
         <p:nvSpPr>
-          <p:cNvPr id="12" name="TextBox 11"/>
+          <p:cNvPr id="14" name="TextBox 13"/>
           <p:cNvSpPr txBox="1"/>
           <p:nvPr/>
         </p:nvSpPr>
@@ -13503,7 +14226,7 @@
                 </a:solidFill>
                 <a:latin typeface="Georgia"/>
               </a:rPr>
-              <a:t>Normalization to 3NF</a:t>
+              <a:t>The data model — 11 entities</a:t>
             </a:r>
           </a:p>
         </p:txBody>
@@ -13561,7 +14284,7 @@
         <p:spPr>
           <a:xfrm>
             <a:off x="841248" y="1783080"/>
-            <a:ext cx="10424160" cy="457200"/>
+            <a:ext cx="5212080" cy="457200"/>
           </a:xfrm>
           <a:prstGeom prst="rect">
             <a:avLst/>
@@ -13583,27 +14306,198 @@
               </a:spcAft>
             </a:pPr>
             <a:r>
-              <a:rPr sz="1600" b="0">
+              <a:rPr sz="1600" b="1">
+                <a:solidFill>
+                  <a:srgbClr val="A8503A"/>
+                </a:solidFill>
+                <a:latin typeface="Calibri"/>
+              </a:rPr>
+              <a:t>Tables, grouped by purpose</a:t>
+            </a:r>
+          </a:p>
+        </p:txBody>
+      </p:sp>
+      <p:sp>
+        <p:nvSpPr>
+          <p:cNvPr id="7" name="TextBox 6"/>
+          <p:cNvSpPr txBox="1"/>
+          <p:nvPr/>
+        </p:nvSpPr>
+        <p:spPr>
+          <a:xfrm>
+            <a:off x="841248" y="2331720"/>
+            <a:ext cx="5303520" cy="3840480"/>
+          </a:xfrm>
+          <a:prstGeom prst="rect">
+            <a:avLst/>
+          </a:prstGeom>
+          <a:noFill/>
+        </p:spPr>
+        <p:txBody>
+          <a:bodyPr wrap="square" lIns="0" rIns="0" tIns="0" bIns="0">
+            <a:spAutoFit/>
+          </a:bodyPr>
+          <a:lstStyle/>
+          <a:p>
+            <a:pPr>
+              <a:lnSpc>
+                <a:spcPct val="106000"/>
+              </a:lnSpc>
+              <a:spcAft>
+                <a:spcPts val="1400"/>
+              </a:spcAft>
+            </a:pPr>
+            <a:r>
+              <a:rPr sz="1550" b="1">
+                <a:solidFill>
+                  <a:srgbClr val="A8503A"/>
+                </a:solidFill>
+                <a:latin typeface="Calibri"/>
+              </a:rPr>
+              <a:t>—  </a:t>
+            </a:r>
+            <a:r>
+              <a:rPr sz="1550" b="1">
                 <a:solidFill>
                   <a:srgbClr val="2C2A26"/>
                 </a:solidFill>
                 <a:latin typeface="Calibri"/>
               </a:rPr>
-              <a:t>Each fact stored once — removing redundancy and anomalies.</a:t>
-            </a:r>
-          </a:p>
-        </p:txBody>
-      </p:sp>
-      <p:sp>
-        <p:nvSpPr>
-          <p:cNvPr id="7" name="Rounded Rectangle 6"/>
+              <a:t>Catalogue: </a:t>
+            </a:r>
+            <a:r>
+              <a:rPr sz="1550">
+                <a:solidFill>
+                  <a:srgbClr val="2C2A26"/>
+                </a:solidFill>
+                <a:latin typeface="Calibri"/>
+              </a:rPr>
+              <a:t>publisher, category, author, book, book_author</a:t>
+            </a:r>
+          </a:p>
+          <a:p>
+            <a:pPr>
+              <a:lnSpc>
+                <a:spcPct val="106000"/>
+              </a:lnSpc>
+              <a:spcAft>
+                <a:spcPts val="1400"/>
+              </a:spcAft>
+            </a:pPr>
+            <a:r>
+              <a:rPr sz="1550" b="1">
+                <a:solidFill>
+                  <a:srgbClr val="A8503A"/>
+                </a:solidFill>
+                <a:latin typeface="Calibri"/>
+              </a:rPr>
+              <a:t>—  </a:t>
+            </a:r>
+            <a:r>
+              <a:rPr sz="1550" b="1">
+                <a:solidFill>
+                  <a:srgbClr val="2C2A26"/>
+                </a:solidFill>
+                <a:latin typeface="Calibri"/>
+              </a:rPr>
+              <a:t>Inventory: </a:t>
+            </a:r>
+            <a:r>
+              <a:rPr sz="1550">
+                <a:solidFill>
+                  <a:srgbClr val="2C2A26"/>
+                </a:solidFill>
+                <a:latin typeface="Calibri"/>
+              </a:rPr>
+              <a:t>book_copy (each physical item + status)</a:t>
+            </a:r>
+          </a:p>
+          <a:p>
+            <a:pPr>
+              <a:lnSpc>
+                <a:spcPct val="106000"/>
+              </a:lnSpc>
+              <a:spcAft>
+                <a:spcPts val="1400"/>
+              </a:spcAft>
+            </a:pPr>
+            <a:r>
+              <a:rPr sz="1550" b="1">
+                <a:solidFill>
+                  <a:srgbClr val="A8503A"/>
+                </a:solidFill>
+                <a:latin typeface="Calibri"/>
+              </a:rPr>
+              <a:t>—  </a:t>
+            </a:r>
+            <a:r>
+              <a:rPr sz="1550" b="1">
+                <a:solidFill>
+                  <a:srgbClr val="2C2A26"/>
+                </a:solidFill>
+                <a:latin typeface="Calibri"/>
+              </a:rPr>
+              <a:t>People: </a:t>
+            </a:r>
+            <a:r>
+              <a:rPr sz="1550">
+                <a:solidFill>
+                  <a:srgbClr val="2C2A26"/>
+                </a:solidFill>
+                <a:latin typeface="Calibri"/>
+              </a:rPr>
+              <a:t>member, staff</a:t>
+            </a:r>
+          </a:p>
+          <a:p>
+            <a:pPr>
+              <a:lnSpc>
+                <a:spcPct val="106000"/>
+              </a:lnSpc>
+              <a:spcAft>
+                <a:spcPts val="1400"/>
+              </a:spcAft>
+            </a:pPr>
+            <a:r>
+              <a:rPr sz="1550" b="1">
+                <a:solidFill>
+                  <a:srgbClr val="A8503A"/>
+                </a:solidFill>
+                <a:latin typeface="Calibri"/>
+              </a:rPr>
+              <a:t>—  </a:t>
+            </a:r>
+            <a:r>
+              <a:rPr sz="1550" b="1">
+                <a:solidFill>
+                  <a:srgbClr val="2C2A26"/>
+                </a:solidFill>
+                <a:latin typeface="Calibri"/>
+              </a:rPr>
+              <a:t>Activity: </a:t>
+            </a:r>
+            <a:r>
+              <a:rPr sz="1550">
+                <a:solidFill>
+                  <a:srgbClr val="2C2A26"/>
+                </a:solidFill>
+                <a:latin typeface="Calibri"/>
+              </a:rPr>
+              <a:t>borrowing, fine, reservation</a:t>
+            </a:r>
+          </a:p>
+        </p:txBody>
+      </p:sp>
+      <p:sp>
+        <p:nvSpPr>
+          <p:cNvPr id="8" name="Rounded Rectangle 7"/>
           <p:cNvSpPr/>
           <p:nvPr/>
         </p:nvSpPr>
         <p:spPr>
           <a:xfrm>
-            <a:off x="841248" y="2468880"/>
-            <a:ext cx="3456432" cy="3017520"/>
+            <a:off x="6400800" y="1920240"/>
+            <a:ext cx="4937760" cy="4297680"/>
           </a:xfrm>
           <a:prstGeom prst="roundRect">
             <a:avLst>
@@ -13611,7 +14505,7 @@
             </a:avLst>
           </a:prstGeom>
           <a:solidFill>
-            <a:srgbClr val="FFFFFF"/>
+            <a:srgbClr val="F6EFE4"/>
           </a:solidFill>
           <a:ln w="15240">
             <a:solidFill>
@@ -13644,58 +14538,14 @@
       </p:sp>
       <p:sp>
         <p:nvSpPr>
-          <p:cNvPr id="8" name="Rectangle 7"/>
-          <p:cNvSpPr/>
-          <p:nvPr/>
-        </p:nvSpPr>
-        <p:spPr>
-          <a:xfrm>
-            <a:off x="841248" y="2468880"/>
-            <a:ext cx="3456432" cy="146304"/>
-          </a:xfrm>
-          <a:prstGeom prst="rect">
-            <a:avLst/>
-          </a:prstGeom>
-          <a:solidFill>
-            <a:srgbClr val="26415E"/>
-          </a:solidFill>
-          <a:ln>
-            <a:noFill/>
-          </a:ln>
-          <a:effectLst/>
-        </p:spPr>
-        <p:style>
-          <a:lnRef idx="1">
-            <a:schemeClr val="accent1"/>
-          </a:lnRef>
-          <a:fillRef idx="3">
-            <a:schemeClr val="accent1"/>
-          </a:fillRef>
-          <a:effectRef idx="2">
-            <a:schemeClr val="accent1"/>
-          </a:effectRef>
-          <a:fontRef idx="minor">
-            <a:schemeClr val="lt1"/>
-          </a:fontRef>
-        </p:style>
-        <p:txBody>
-          <a:bodyPr rtlCol="0" anchor="ctr"/>
-          <a:lstStyle/>
-          <a:p>
-            <a:pPr algn="ctr"/>
-          </a:p>
-        </p:txBody>
-      </p:sp>
-      <p:sp>
-        <p:nvSpPr>
           <p:cNvPr id="9" name="TextBox 8"/>
           <p:cNvSpPr txBox="1"/>
           <p:nvPr/>
         </p:nvSpPr>
         <p:spPr>
           <a:xfrm>
-            <a:off x="1115568" y="2788920"/>
-            <a:ext cx="2926080" cy="640080"/>
+            <a:off x="6675120" y="2103120"/>
+            <a:ext cx="4389120" cy="365760"/>
           </a:xfrm>
           <a:prstGeom prst="rect">
             <a:avLst/>
@@ -13717,13 +14567,13 @@
               </a:spcAft>
             </a:pPr>
             <a:r>
-              <a:rPr sz="2600" b="1">
-                <a:solidFill>
-                  <a:srgbClr val="26415E"/>
-                </a:solidFill>
-                <a:latin typeface="Georgia"/>
-              </a:rPr>
-              <a:t>1NF</a:t>
+              <a:rPr sz="1500" b="1">
+                <a:solidFill>
+                  <a:srgbClr val="A8503A"/>
+                </a:solidFill>
+                <a:latin typeface="Calibri"/>
+              </a:rPr>
+              <a:t>Key relationships</a:t>
             </a:r>
           </a:p>
         </p:txBody>
@@ -13736,36 +14586,185 @@
         </p:nvSpPr>
         <p:spPr>
           <a:xfrm>
-            <a:off x="1115568" y="3474720"/>
-            <a:ext cx="2926080" cy="457200"/>
-          </a:xfrm>
-          <a:prstGeom prst="rect">
-            <a:avLst/>
-          </a:prstGeom>
-          <a:noFill/>
-        </p:spPr>
-        <p:txBody>
-          <a:bodyPr wrap="square" anchor="t" lIns="0" rIns="0" tIns="0" bIns="0">
-            <a:spAutoFit/>
-          </a:bodyPr>
-          <a:lstStyle/>
-          <a:p>
-            <a:pPr algn="l">
-              <a:lnSpc>
-                <a:spcPct val="104000"/>
-              </a:lnSpc>
-              <a:spcAft>
-                <a:spcPts val="400"/>
-              </a:spcAft>
-            </a:pPr>
-            <a:r>
-              <a:rPr sz="1550" b="1">
+            <a:off x="6675120" y="2606040"/>
+            <a:ext cx="4434840" cy="3383280"/>
+          </a:xfrm>
+          <a:prstGeom prst="rect">
+            <a:avLst/>
+          </a:prstGeom>
+          <a:noFill/>
+        </p:spPr>
+        <p:txBody>
+          <a:bodyPr wrap="square" lIns="0" rIns="0" tIns="0" bIns="0">
+            <a:spAutoFit/>
+          </a:bodyPr>
+          <a:lstStyle/>
+          <a:p>
+            <a:pPr>
+              <a:lnSpc>
+                <a:spcPct val="106000"/>
+              </a:lnSpc>
+              <a:spcAft>
+                <a:spcPts val="1200"/>
+              </a:spcAft>
+            </a:pPr>
+            <a:r>
+              <a:rPr sz="1450" b="1">
+                <a:solidFill>
+                  <a:srgbClr val="A8503A"/>
+                </a:solidFill>
+                <a:latin typeface="Calibri"/>
+              </a:rPr>
+              <a:t>—  </a:t>
+            </a:r>
+            <a:r>
+              <a:rPr sz="1450">
                 <a:solidFill>
                   <a:srgbClr val="2C2A26"/>
                 </a:solidFill>
                 <a:latin typeface="Calibri"/>
               </a:rPr>
-              <a:t>Atomic values</a:t>
+              <a:t>publisher → book  (1:M)</a:t>
+            </a:r>
+          </a:p>
+          <a:p>
+            <a:pPr>
+              <a:lnSpc>
+                <a:spcPct val="106000"/>
+              </a:lnSpc>
+              <a:spcAft>
+                <a:spcPts val="1200"/>
+              </a:spcAft>
+            </a:pPr>
+            <a:r>
+              <a:rPr sz="1450" b="1">
+                <a:solidFill>
+                  <a:srgbClr val="A8503A"/>
+                </a:solidFill>
+                <a:latin typeface="Calibri"/>
+              </a:rPr>
+              <a:t>—  </a:t>
+            </a:r>
+            <a:r>
+              <a:rPr sz="1450">
+                <a:solidFill>
+                  <a:srgbClr val="2C2A26"/>
+                </a:solidFill>
+                <a:latin typeface="Calibri"/>
+              </a:rPr>
+              <a:t>book ↔ author  via book_author  (M:N)</a:t>
+            </a:r>
+          </a:p>
+          <a:p>
+            <a:pPr>
+              <a:lnSpc>
+                <a:spcPct val="106000"/>
+              </a:lnSpc>
+              <a:spcAft>
+                <a:spcPts val="1200"/>
+              </a:spcAft>
+            </a:pPr>
+            <a:r>
+              <a:rPr sz="1450" b="1">
+                <a:solidFill>
+                  <a:srgbClr val="A8503A"/>
+                </a:solidFill>
+                <a:latin typeface="Calibri"/>
+              </a:rPr>
+              <a:t>—  </a:t>
+            </a:r>
+            <a:r>
+              <a:rPr sz="1450">
+                <a:solidFill>
+                  <a:srgbClr val="2C2A26"/>
+                </a:solidFill>
+                <a:latin typeface="Calibri"/>
+              </a:rPr>
+              <a:t>book → book_copy  (1:M)</a:t>
+            </a:r>
+          </a:p>
+          <a:p>
+            <a:pPr>
+              <a:lnSpc>
+                <a:spcPct val="106000"/>
+              </a:lnSpc>
+              <a:spcAft>
+                <a:spcPts val="1200"/>
+              </a:spcAft>
+            </a:pPr>
+            <a:r>
+              <a:rPr sz="1450" b="1">
+                <a:solidFill>
+                  <a:srgbClr val="A8503A"/>
+                </a:solidFill>
+                <a:latin typeface="Calibri"/>
+              </a:rPr>
+              <a:t>—  </a:t>
+            </a:r>
+            <a:r>
+              <a:rPr sz="1450">
+                <a:solidFill>
+                  <a:srgbClr val="2C2A26"/>
+                </a:solidFill>
+                <a:latin typeface="Calibri"/>
+              </a:rPr>
+              <a:t>category → category  (recursive)</a:t>
+            </a:r>
+          </a:p>
+          <a:p>
+            <a:pPr>
+              <a:lnSpc>
+                <a:spcPct val="106000"/>
+              </a:lnSpc>
+              <a:spcAft>
+                <a:spcPts val="1200"/>
+              </a:spcAft>
+            </a:pPr>
+            <a:r>
+              <a:rPr sz="1450" b="1">
+                <a:solidFill>
+                  <a:srgbClr val="A8503A"/>
+                </a:solidFill>
+                <a:latin typeface="Calibri"/>
+              </a:rPr>
+              <a:t>—  </a:t>
+            </a:r>
+            <a:r>
+              <a:rPr sz="1450">
+                <a:solidFill>
+                  <a:srgbClr val="2C2A26"/>
+                </a:solidFill>
+                <a:latin typeface="Calibri"/>
+              </a:rPr>
+              <a:t>borrowing → fine  (1:1)</a:t>
+            </a:r>
+          </a:p>
+          <a:p>
+            <a:pPr>
+              <a:lnSpc>
+                <a:spcPct val="106000"/>
+              </a:lnSpc>
+              <a:spcAft>
+                <a:spcPts val="1200"/>
+              </a:spcAft>
+            </a:pPr>
+            <a:r>
+              <a:rPr sz="1450" b="1">
+                <a:solidFill>
+                  <a:srgbClr val="A8503A"/>
+                </a:solidFill>
+                <a:latin typeface="Calibri"/>
+              </a:rPr>
+              <a:t>—  </a:t>
+            </a:r>
+            <a:r>
+              <a:rPr sz="1450">
+                <a:solidFill>
+                  <a:srgbClr val="2C2A26"/>
+                </a:solidFill>
+                <a:latin typeface="Calibri"/>
+              </a:rPr>
+              <a:t>member → borrowing  (1:M)</a:t>
             </a:r>
           </a:p>
         </p:txBody>
@@ -13773,484 +14772,6 @@
       <p:sp>
         <p:nvSpPr>
           <p:cNvPr id="11" name="TextBox 10"/>
-          <p:cNvSpPr txBox="1"/>
-          <p:nvPr/>
-        </p:nvSpPr>
-        <p:spPr>
-          <a:xfrm>
-            <a:off x="1115568" y="3977639"/>
-            <a:ext cx="2926080" cy="1371600"/>
-          </a:xfrm>
-          <a:prstGeom prst="rect">
-            <a:avLst/>
-          </a:prstGeom>
-          <a:noFill/>
-        </p:spPr>
-        <p:txBody>
-          <a:bodyPr wrap="square" anchor="t" lIns="0" rIns="0" tIns="0" bIns="0">
-            <a:spAutoFit/>
-          </a:bodyPr>
-          <a:lstStyle/>
-          <a:p>
-            <a:pPr algn="l">
-              <a:lnSpc>
-                <a:spcPct val="112000"/>
-              </a:lnSpc>
-              <a:spcAft>
-                <a:spcPts val="400"/>
-              </a:spcAft>
-            </a:pPr>
-            <a:r>
-              <a:rPr sz="1350" b="0">
-                <a:solidFill>
-                  <a:srgbClr val="7A7263"/>
-                </a:solidFill>
-                <a:latin typeface="Calibri"/>
-              </a:rPr>
-              <a:t>Multi-valued authors &amp; copies moved to their own tables.</a:t>
-            </a:r>
-          </a:p>
-        </p:txBody>
-      </p:sp>
-      <p:sp>
-        <p:nvSpPr>
-          <p:cNvPr id="12" name="Rounded Rectangle 11"/>
-          <p:cNvSpPr/>
-          <p:nvPr/>
-        </p:nvSpPr>
-        <p:spPr>
-          <a:xfrm>
-            <a:off x="4425696" y="2468880"/>
-            <a:ext cx="3456432" cy="3017520"/>
-          </a:xfrm>
-          <a:prstGeom prst="roundRect">
-            <a:avLst>
-              <a:gd name="adj" fmla="val 5000"/>
-            </a:avLst>
-          </a:prstGeom>
-          <a:solidFill>
-            <a:srgbClr val="FFFFFF"/>
-          </a:solidFill>
-          <a:ln w="15240">
-            <a:solidFill>
-              <a:srgbClr val="E6DCCC"/>
-            </a:solidFill>
-          </a:ln>
-          <a:effectLst/>
-        </p:spPr>
-        <p:style>
-          <a:lnRef idx="1">
-            <a:schemeClr val="accent1"/>
-          </a:lnRef>
-          <a:fillRef idx="3">
-            <a:schemeClr val="accent1"/>
-          </a:fillRef>
-          <a:effectRef idx="2">
-            <a:schemeClr val="accent1"/>
-          </a:effectRef>
-          <a:fontRef idx="minor">
-            <a:schemeClr val="lt1"/>
-          </a:fontRef>
-        </p:style>
-        <p:txBody>
-          <a:bodyPr rtlCol="0" anchor="ctr"/>
-          <a:lstStyle/>
-          <a:p>
-            <a:pPr algn="ctr"/>
-          </a:p>
-        </p:txBody>
-      </p:sp>
-      <p:sp>
-        <p:nvSpPr>
-          <p:cNvPr id="13" name="Rectangle 12"/>
-          <p:cNvSpPr/>
-          <p:nvPr/>
-        </p:nvSpPr>
-        <p:spPr>
-          <a:xfrm>
-            <a:off x="4425696" y="2468880"/>
-            <a:ext cx="3456432" cy="146304"/>
-          </a:xfrm>
-          <a:prstGeom prst="rect">
-            <a:avLst/>
-          </a:prstGeom>
-          <a:solidFill>
-            <a:srgbClr val="A8503A"/>
-          </a:solidFill>
-          <a:ln>
-            <a:noFill/>
-          </a:ln>
-          <a:effectLst/>
-        </p:spPr>
-        <p:style>
-          <a:lnRef idx="1">
-            <a:schemeClr val="accent1"/>
-          </a:lnRef>
-          <a:fillRef idx="3">
-            <a:schemeClr val="accent1"/>
-          </a:fillRef>
-          <a:effectRef idx="2">
-            <a:schemeClr val="accent1"/>
-          </a:effectRef>
-          <a:fontRef idx="minor">
-            <a:schemeClr val="lt1"/>
-          </a:fontRef>
-        </p:style>
-        <p:txBody>
-          <a:bodyPr rtlCol="0" anchor="ctr"/>
-          <a:lstStyle/>
-          <a:p>
-            <a:pPr algn="ctr"/>
-          </a:p>
-        </p:txBody>
-      </p:sp>
-      <p:sp>
-        <p:nvSpPr>
-          <p:cNvPr id="14" name="TextBox 13"/>
-          <p:cNvSpPr txBox="1"/>
-          <p:nvPr/>
-        </p:nvSpPr>
-        <p:spPr>
-          <a:xfrm>
-            <a:off x="4700016" y="2788920"/>
-            <a:ext cx="2926080" cy="640080"/>
-          </a:xfrm>
-          <a:prstGeom prst="rect">
-            <a:avLst/>
-          </a:prstGeom>
-          <a:noFill/>
-        </p:spPr>
-        <p:txBody>
-          <a:bodyPr wrap="square" anchor="t" lIns="0" rIns="0" tIns="0" bIns="0">
-            <a:spAutoFit/>
-          </a:bodyPr>
-          <a:lstStyle/>
-          <a:p>
-            <a:pPr algn="l">
-              <a:lnSpc>
-                <a:spcPct val="104000"/>
-              </a:lnSpc>
-              <a:spcAft>
-                <a:spcPts val="400"/>
-              </a:spcAft>
-            </a:pPr>
-            <a:r>
-              <a:rPr sz="2600" b="1">
-                <a:solidFill>
-                  <a:srgbClr val="A8503A"/>
-                </a:solidFill>
-                <a:latin typeface="Georgia"/>
-              </a:rPr>
-              <a:t>2NF</a:t>
-            </a:r>
-          </a:p>
-        </p:txBody>
-      </p:sp>
-      <p:sp>
-        <p:nvSpPr>
-          <p:cNvPr id="15" name="TextBox 14"/>
-          <p:cNvSpPr txBox="1"/>
-          <p:nvPr/>
-        </p:nvSpPr>
-        <p:spPr>
-          <a:xfrm>
-            <a:off x="4700016" y="3474720"/>
-            <a:ext cx="2926080" cy="457200"/>
-          </a:xfrm>
-          <a:prstGeom prst="rect">
-            <a:avLst/>
-          </a:prstGeom>
-          <a:noFill/>
-        </p:spPr>
-        <p:txBody>
-          <a:bodyPr wrap="square" anchor="t" lIns="0" rIns="0" tIns="0" bIns="0">
-            <a:spAutoFit/>
-          </a:bodyPr>
-          <a:lstStyle/>
-          <a:p>
-            <a:pPr algn="l">
-              <a:lnSpc>
-                <a:spcPct val="104000"/>
-              </a:lnSpc>
-              <a:spcAft>
-                <a:spcPts val="400"/>
-              </a:spcAft>
-            </a:pPr>
-            <a:r>
-              <a:rPr sz="1550" b="1">
-                <a:solidFill>
-                  <a:srgbClr val="2C2A26"/>
-                </a:solidFill>
-                <a:latin typeface="Calibri"/>
-              </a:rPr>
-              <a:t>No partial dependency</a:t>
-            </a:r>
-          </a:p>
-        </p:txBody>
-      </p:sp>
-      <p:sp>
-        <p:nvSpPr>
-          <p:cNvPr id="16" name="TextBox 15"/>
-          <p:cNvSpPr txBox="1"/>
-          <p:nvPr/>
-        </p:nvSpPr>
-        <p:spPr>
-          <a:xfrm>
-            <a:off x="4700016" y="3977639"/>
-            <a:ext cx="2926080" cy="1371600"/>
-          </a:xfrm>
-          <a:prstGeom prst="rect">
-            <a:avLst/>
-          </a:prstGeom>
-          <a:noFill/>
-        </p:spPr>
-        <p:txBody>
-          <a:bodyPr wrap="square" anchor="t" lIns="0" rIns="0" tIns="0" bIns="0">
-            <a:spAutoFit/>
-          </a:bodyPr>
-          <a:lstStyle/>
-          <a:p>
-            <a:pPr algn="l">
-              <a:lnSpc>
-                <a:spcPct val="112000"/>
-              </a:lnSpc>
-              <a:spcAft>
-                <a:spcPts val="400"/>
-              </a:spcAft>
-            </a:pPr>
-            <a:r>
-              <a:rPr sz="1350" b="0">
-                <a:solidFill>
-                  <a:srgbClr val="7A7263"/>
-                </a:solidFill>
-                <a:latin typeface="Calibri"/>
-              </a:rPr>
-              <a:t>Non-key columns depend on the whole composite key.</a:t>
-            </a:r>
-          </a:p>
-        </p:txBody>
-      </p:sp>
-      <p:sp>
-        <p:nvSpPr>
-          <p:cNvPr id="17" name="Rounded Rectangle 16"/>
-          <p:cNvSpPr/>
-          <p:nvPr/>
-        </p:nvSpPr>
-        <p:spPr>
-          <a:xfrm>
-            <a:off x="8010144" y="2468880"/>
-            <a:ext cx="3456432" cy="3017520"/>
-          </a:xfrm>
-          <a:prstGeom prst="roundRect">
-            <a:avLst>
-              <a:gd name="adj" fmla="val 5000"/>
-            </a:avLst>
-          </a:prstGeom>
-          <a:solidFill>
-            <a:srgbClr val="FFFFFF"/>
-          </a:solidFill>
-          <a:ln w="15240">
-            <a:solidFill>
-              <a:srgbClr val="E6DCCC"/>
-            </a:solidFill>
-          </a:ln>
-          <a:effectLst/>
-        </p:spPr>
-        <p:style>
-          <a:lnRef idx="1">
-            <a:schemeClr val="accent1"/>
-          </a:lnRef>
-          <a:fillRef idx="3">
-            <a:schemeClr val="accent1"/>
-          </a:fillRef>
-          <a:effectRef idx="2">
-            <a:schemeClr val="accent1"/>
-          </a:effectRef>
-          <a:fontRef idx="minor">
-            <a:schemeClr val="lt1"/>
-          </a:fontRef>
-        </p:style>
-        <p:txBody>
-          <a:bodyPr rtlCol="0" anchor="ctr"/>
-          <a:lstStyle/>
-          <a:p>
-            <a:pPr algn="ctr"/>
-          </a:p>
-        </p:txBody>
-      </p:sp>
-      <p:sp>
-        <p:nvSpPr>
-          <p:cNvPr id="18" name="Rectangle 17"/>
-          <p:cNvSpPr/>
-          <p:nvPr/>
-        </p:nvSpPr>
-        <p:spPr>
-          <a:xfrm>
-            <a:off x="8010144" y="2468880"/>
-            <a:ext cx="3456432" cy="146304"/>
-          </a:xfrm>
-          <a:prstGeom prst="rect">
-            <a:avLst/>
-          </a:prstGeom>
-          <a:solidFill>
-            <a:srgbClr val="2F5170"/>
-          </a:solidFill>
-          <a:ln>
-            <a:noFill/>
-          </a:ln>
-          <a:effectLst/>
-        </p:spPr>
-        <p:style>
-          <a:lnRef idx="1">
-            <a:schemeClr val="accent1"/>
-          </a:lnRef>
-          <a:fillRef idx="3">
-            <a:schemeClr val="accent1"/>
-          </a:fillRef>
-          <a:effectRef idx="2">
-            <a:schemeClr val="accent1"/>
-          </a:effectRef>
-          <a:fontRef idx="minor">
-            <a:schemeClr val="lt1"/>
-          </a:fontRef>
-        </p:style>
-        <p:txBody>
-          <a:bodyPr rtlCol="0" anchor="ctr"/>
-          <a:lstStyle/>
-          <a:p>
-            <a:pPr algn="ctr"/>
-          </a:p>
-        </p:txBody>
-      </p:sp>
-      <p:sp>
-        <p:nvSpPr>
-          <p:cNvPr id="19" name="TextBox 18"/>
-          <p:cNvSpPr txBox="1"/>
-          <p:nvPr/>
-        </p:nvSpPr>
-        <p:spPr>
-          <a:xfrm>
-            <a:off x="8284464" y="2788920"/>
-            <a:ext cx="2926080" cy="640080"/>
-          </a:xfrm>
-          <a:prstGeom prst="rect">
-            <a:avLst/>
-          </a:prstGeom>
-          <a:noFill/>
-        </p:spPr>
-        <p:txBody>
-          <a:bodyPr wrap="square" anchor="t" lIns="0" rIns="0" tIns="0" bIns="0">
-            <a:spAutoFit/>
-          </a:bodyPr>
-          <a:lstStyle/>
-          <a:p>
-            <a:pPr algn="l">
-              <a:lnSpc>
-                <a:spcPct val="104000"/>
-              </a:lnSpc>
-              <a:spcAft>
-                <a:spcPts val="400"/>
-              </a:spcAft>
-            </a:pPr>
-            <a:r>
-              <a:rPr sz="2600" b="1">
-                <a:solidFill>
-                  <a:srgbClr val="2F5170"/>
-                </a:solidFill>
-                <a:latin typeface="Georgia"/>
-              </a:rPr>
-              <a:t>3NF</a:t>
-            </a:r>
-          </a:p>
-        </p:txBody>
-      </p:sp>
-      <p:sp>
-        <p:nvSpPr>
-          <p:cNvPr id="20" name="TextBox 19"/>
-          <p:cNvSpPr txBox="1"/>
-          <p:nvPr/>
-        </p:nvSpPr>
-        <p:spPr>
-          <a:xfrm>
-            <a:off x="8284464" y="3474720"/>
-            <a:ext cx="2926080" cy="457200"/>
-          </a:xfrm>
-          <a:prstGeom prst="rect">
-            <a:avLst/>
-          </a:prstGeom>
-          <a:noFill/>
-        </p:spPr>
-        <p:txBody>
-          <a:bodyPr wrap="square" anchor="t" lIns="0" rIns="0" tIns="0" bIns="0">
-            <a:spAutoFit/>
-          </a:bodyPr>
-          <a:lstStyle/>
-          <a:p>
-            <a:pPr algn="l">
-              <a:lnSpc>
-                <a:spcPct val="104000"/>
-              </a:lnSpc>
-              <a:spcAft>
-                <a:spcPts val="400"/>
-              </a:spcAft>
-            </a:pPr>
-            <a:r>
-              <a:rPr sz="1550" b="1">
-                <a:solidFill>
-                  <a:srgbClr val="2C2A26"/>
-                </a:solidFill>
-                <a:latin typeface="Calibri"/>
-              </a:rPr>
-              <a:t>No transitive dependency</a:t>
-            </a:r>
-          </a:p>
-        </p:txBody>
-      </p:sp>
-      <p:sp>
-        <p:nvSpPr>
-          <p:cNvPr id="21" name="TextBox 20"/>
-          <p:cNvSpPr txBox="1"/>
-          <p:nvPr/>
-        </p:nvSpPr>
-        <p:spPr>
-          <a:xfrm>
-            <a:off x="8284464" y="3977639"/>
-            <a:ext cx="2926080" cy="1371600"/>
-          </a:xfrm>
-          <a:prstGeom prst="rect">
-            <a:avLst/>
-          </a:prstGeom>
-          <a:noFill/>
-        </p:spPr>
-        <p:txBody>
-          <a:bodyPr wrap="square" anchor="t" lIns="0" rIns="0" tIns="0" bIns="0">
-            <a:spAutoFit/>
-          </a:bodyPr>
-          <a:lstStyle/>
-          <a:p>
-            <a:pPr algn="l">
-              <a:lnSpc>
-                <a:spcPct val="112000"/>
-              </a:lnSpc>
-              <a:spcAft>
-                <a:spcPts val="400"/>
-              </a:spcAft>
-            </a:pPr>
-            <a:r>
-              <a:rPr sz="1350" b="0">
-                <a:solidFill>
-                  <a:srgbClr val="7A7263"/>
-                </a:solidFill>
-                <a:latin typeface="Calibri"/>
-              </a:rPr>
-              <a:t>Publisher / category details split into their own tables.</a:t>
-            </a:r>
-          </a:p>
-        </p:txBody>
-      </p:sp>
-      <p:sp>
-        <p:nvSpPr>
-          <p:cNvPr id="22" name="TextBox 21"/>
           <p:cNvSpPr txBox="1"/>
           <p:nvPr/>
         </p:nvSpPr>
@@ -14292,7 +14813,7 @@
       </p:sp>
       <p:sp>
         <p:nvSpPr>
-          <p:cNvPr id="23" name="TextBox 22"/>
+          <p:cNvPr id="12" name="TextBox 11"/>
           <p:cNvSpPr txBox="1"/>
           <p:nvPr/>
         </p:nvSpPr>
@@ -14423,7 +14944,7 @@
                 </a:solidFill>
                 <a:latin typeface="Calibri"/>
               </a:rPr>
-              <a:t>PART 3   </a:t>
+              <a:t>PART 2   </a:t>
             </a:r>
             <a:r>
               <a:rPr sz="1300" b="1">
@@ -14432,7 +14953,7 @@
                 </a:solidFill>
                 <a:latin typeface="Calibri"/>
               </a:rPr>
-              <a:t>WHAT WE BUILT</a:t>
+              <a:t>HOW WE DID IT</a:t>
             </a:r>
           </a:p>
         </p:txBody>
@@ -14474,7 +14995,7 @@
                 </a:solidFill>
                 <a:latin typeface="Georgia"/>
               </a:rPr>
-              <a:t>The database layer</a:t>
+              <a:t>Normalization to 3NF</a:t>
             </a:r>
           </a:p>
         </p:txBody>
@@ -14525,24 +15046,66 @@
       </p:sp>
       <p:sp>
         <p:nvSpPr>
-          <p:cNvPr id="6" name="Rounded Rectangle 5"/>
+          <p:cNvPr id="6" name="TextBox 5"/>
+          <p:cNvSpPr txBox="1"/>
+          <p:nvPr/>
+        </p:nvSpPr>
+        <p:spPr>
+          <a:xfrm>
+            <a:off x="841248" y="1783080"/>
+            <a:ext cx="10424160" cy="457200"/>
+          </a:xfrm>
+          <a:prstGeom prst="rect">
+            <a:avLst/>
+          </a:prstGeom>
+          <a:noFill/>
+        </p:spPr>
+        <p:txBody>
+          <a:bodyPr wrap="square" anchor="t" lIns="0" rIns="0" tIns="0" bIns="0">
+            <a:spAutoFit/>
+          </a:bodyPr>
+          <a:lstStyle/>
+          <a:p>
+            <a:pPr algn="l">
+              <a:lnSpc>
+                <a:spcPct val="104000"/>
+              </a:lnSpc>
+              <a:spcAft>
+                <a:spcPts val="400"/>
+              </a:spcAft>
+            </a:pPr>
+            <a:r>
+              <a:rPr sz="1600" b="0">
+                <a:solidFill>
+                  <a:srgbClr val="2C2A26"/>
+                </a:solidFill>
+                <a:latin typeface="Calibri"/>
+              </a:rPr>
+              <a:t>Each fact stored once — removing redundancy and anomalies.</a:t>
+            </a:r>
+          </a:p>
+        </p:txBody>
+      </p:sp>
+      <p:sp>
+        <p:nvSpPr>
+          <p:cNvPr id="7" name="Rounded Rectangle 6"/>
           <p:cNvSpPr/>
           <p:nvPr/>
         </p:nvSpPr>
         <p:spPr>
           <a:xfrm>
-            <a:off x="841248" y="1874519"/>
-            <a:ext cx="10515600" cy="786384"/>
+            <a:off x="841248" y="2468880"/>
+            <a:ext cx="3456432" cy="3017520"/>
           </a:xfrm>
           <a:prstGeom prst="roundRect">
             <a:avLst>
-              <a:gd name="adj" fmla="val 12000"/>
+              <a:gd name="adj" fmla="val 5000"/>
             </a:avLst>
           </a:prstGeom>
           <a:solidFill>
             <a:srgbClr val="FFFFFF"/>
           </a:solidFill>
-          <a:ln w="13970">
+          <a:ln w="15240">
             <a:solidFill>
               <a:srgbClr val="E6DCCC"/>
             </a:solidFill>
@@ -14573,14 +15136,58 @@
       </p:sp>
       <p:sp>
         <p:nvSpPr>
-          <p:cNvPr id="7" name="TextBox 6"/>
-          <p:cNvSpPr txBox="1"/>
-          <p:nvPr/>
-        </p:nvSpPr>
-        <p:spPr>
-          <a:xfrm>
-            <a:off x="1097280" y="2029967"/>
-            <a:ext cx="2103120" cy="548640"/>
+          <p:cNvPr id="8" name="Rectangle 7"/>
+          <p:cNvSpPr/>
+          <p:nvPr/>
+        </p:nvSpPr>
+        <p:spPr>
+          <a:xfrm>
+            <a:off x="841248" y="2468880"/>
+            <a:ext cx="3456432" cy="146304"/>
+          </a:xfrm>
+          <a:prstGeom prst="rect">
+            <a:avLst/>
+          </a:prstGeom>
+          <a:solidFill>
+            <a:srgbClr val="26415E"/>
+          </a:solidFill>
+          <a:ln>
+            <a:noFill/>
+          </a:ln>
+          <a:effectLst/>
+        </p:spPr>
+        <p:style>
+          <a:lnRef idx="1">
+            <a:schemeClr val="accent1"/>
+          </a:lnRef>
+          <a:fillRef idx="3">
+            <a:schemeClr val="accent1"/>
+          </a:fillRef>
+          <a:effectRef idx="2">
+            <a:schemeClr val="accent1"/>
+          </a:effectRef>
+          <a:fontRef idx="minor">
+            <a:schemeClr val="lt1"/>
+          </a:fontRef>
+        </p:style>
+        <p:txBody>
+          <a:bodyPr rtlCol="0" anchor="ctr"/>
+          <a:lstStyle/>
+          <a:p>
+            <a:pPr algn="ctr"/>
+          </a:p>
+        </p:txBody>
+      </p:sp>
+      <p:sp>
+        <p:nvSpPr>
+          <p:cNvPr id="9" name="TextBox 8"/>
+          <p:cNvSpPr txBox="1"/>
+          <p:nvPr/>
+        </p:nvSpPr>
+        <p:spPr>
+          <a:xfrm>
+            <a:off x="1115568" y="2788920"/>
+            <a:ext cx="2926080" cy="640080"/>
           </a:xfrm>
           <a:prstGeom prst="rect">
             <a:avLst/>
@@ -14602,27 +15209,27 @@
               </a:spcAft>
             </a:pPr>
             <a:r>
-              <a:rPr sz="1700" b="1">
+              <a:rPr sz="2600" b="1">
                 <a:solidFill>
                   <a:srgbClr val="26415E"/>
                 </a:solidFill>
                 <a:latin typeface="Georgia"/>
               </a:rPr>
-              <a:t>Schema</a:t>
-            </a:r>
-          </a:p>
-        </p:txBody>
-      </p:sp>
-      <p:sp>
-        <p:nvSpPr>
-          <p:cNvPr id="8" name="TextBox 7"/>
-          <p:cNvSpPr txBox="1"/>
-          <p:nvPr/>
-        </p:nvSpPr>
-        <p:spPr>
-          <a:xfrm>
-            <a:off x="3200400" y="2057400"/>
-            <a:ext cx="2834640" cy="457200"/>
+              <a:t>1NF</a:t>
+            </a:r>
+          </a:p>
+        </p:txBody>
+      </p:sp>
+      <p:sp>
+        <p:nvSpPr>
+          <p:cNvPr id="10" name="TextBox 9"/>
+          <p:cNvSpPr txBox="1"/>
+          <p:nvPr/>
+        </p:nvSpPr>
+        <p:spPr>
+          <a:xfrm>
+            <a:off x="1115568" y="3474720"/>
+            <a:ext cx="2926080" cy="457200"/>
           </a:xfrm>
           <a:prstGeom prst="rect">
             <a:avLst/>
@@ -14644,27 +15251,27 @@
               </a:spcAft>
             </a:pPr>
             <a:r>
-              <a:rPr sz="1300" b="1">
-                <a:solidFill>
-                  <a:srgbClr val="A8503A"/>
-                </a:solidFill>
-                <a:latin typeface="Calibri"/>
-              </a:rPr>
-              <a:t>sql/01_schema.sql</a:t>
-            </a:r>
-          </a:p>
-        </p:txBody>
-      </p:sp>
-      <p:sp>
-        <p:nvSpPr>
-          <p:cNvPr id="9" name="TextBox 8"/>
-          <p:cNvSpPr txBox="1"/>
-          <p:nvPr/>
-        </p:nvSpPr>
-        <p:spPr>
-          <a:xfrm>
-            <a:off x="6126480" y="2057400"/>
-            <a:ext cx="5120640" cy="457200"/>
+              <a:rPr sz="1550" b="1">
+                <a:solidFill>
+                  <a:srgbClr val="2C2A26"/>
+                </a:solidFill>
+                <a:latin typeface="Calibri"/>
+              </a:rPr>
+              <a:t>Atomic values</a:t>
+            </a:r>
+          </a:p>
+        </p:txBody>
+      </p:sp>
+      <p:sp>
+        <p:nvSpPr>
+          <p:cNvPr id="11" name="TextBox 10"/>
+          <p:cNvSpPr txBox="1"/>
+          <p:nvPr/>
+        </p:nvSpPr>
+        <p:spPr>
+          <a:xfrm>
+            <a:off x="1115568" y="3977639"/>
+            <a:ext cx="2926080" cy="1371600"/>
           </a:xfrm>
           <a:prstGeom prst="rect">
             <a:avLst/>
@@ -14679,7 +15286,7 @@
           <a:p>
             <a:pPr algn="l">
               <a:lnSpc>
-                <a:spcPct val="104000"/>
+                <a:spcPct val="112000"/>
               </a:lnSpc>
               <a:spcAft>
                 <a:spcPts val="400"/>
@@ -14692,31 +15299,31 @@
                 </a:solidFill>
                 <a:latin typeface="Calibri"/>
               </a:rPr>
-              <a:t>11 tables · all constraints · indexes · ALTER demo</a:t>
-            </a:r>
-          </a:p>
-        </p:txBody>
-      </p:sp>
-      <p:sp>
-        <p:nvSpPr>
-          <p:cNvPr id="10" name="Rounded Rectangle 9"/>
+              <a:t>Multi-valued authors &amp; copies moved to their own tables.</a:t>
+            </a:r>
+          </a:p>
+        </p:txBody>
+      </p:sp>
+      <p:sp>
+        <p:nvSpPr>
+          <p:cNvPr id="12" name="Rounded Rectangle 11"/>
           <p:cNvSpPr/>
           <p:nvPr/>
         </p:nvSpPr>
         <p:spPr>
           <a:xfrm>
-            <a:off x="841248" y="2770632"/>
-            <a:ext cx="10515600" cy="786384"/>
+            <a:off x="4425696" y="2468880"/>
+            <a:ext cx="3456432" cy="3017520"/>
           </a:xfrm>
           <a:prstGeom prst="roundRect">
             <a:avLst>
-              <a:gd name="adj" fmla="val 12000"/>
+              <a:gd name="adj" fmla="val 5000"/>
             </a:avLst>
           </a:prstGeom>
           <a:solidFill>
             <a:srgbClr val="FFFFFF"/>
           </a:solidFill>
-          <a:ln w="13970">
+          <a:ln w="15240">
             <a:solidFill>
               <a:srgbClr val="E6DCCC"/>
             </a:solidFill>
@@ -14747,14 +15354,58 @@
       </p:sp>
       <p:sp>
         <p:nvSpPr>
-          <p:cNvPr id="11" name="TextBox 10"/>
-          <p:cNvSpPr txBox="1"/>
-          <p:nvPr/>
-        </p:nvSpPr>
-        <p:spPr>
-          <a:xfrm>
-            <a:off x="1097280" y="2926079"/>
-            <a:ext cx="2103120" cy="548640"/>
+          <p:cNvPr id="13" name="Rectangle 12"/>
+          <p:cNvSpPr/>
+          <p:nvPr/>
+        </p:nvSpPr>
+        <p:spPr>
+          <a:xfrm>
+            <a:off x="4425696" y="2468880"/>
+            <a:ext cx="3456432" cy="146304"/>
+          </a:xfrm>
+          <a:prstGeom prst="rect">
+            <a:avLst/>
+          </a:prstGeom>
+          <a:solidFill>
+            <a:srgbClr val="A8503A"/>
+          </a:solidFill>
+          <a:ln>
+            <a:noFill/>
+          </a:ln>
+          <a:effectLst/>
+        </p:spPr>
+        <p:style>
+          <a:lnRef idx="1">
+            <a:schemeClr val="accent1"/>
+          </a:lnRef>
+          <a:fillRef idx="3">
+            <a:schemeClr val="accent1"/>
+          </a:fillRef>
+          <a:effectRef idx="2">
+            <a:schemeClr val="accent1"/>
+          </a:effectRef>
+          <a:fontRef idx="minor">
+            <a:schemeClr val="lt1"/>
+          </a:fontRef>
+        </p:style>
+        <p:txBody>
+          <a:bodyPr rtlCol="0" anchor="ctr"/>
+          <a:lstStyle/>
+          <a:p>
+            <a:pPr algn="ctr"/>
+          </a:p>
+        </p:txBody>
+      </p:sp>
+      <p:sp>
+        <p:nvSpPr>
+          <p:cNvPr id="14" name="TextBox 13"/>
+          <p:cNvSpPr txBox="1"/>
+          <p:nvPr/>
+        </p:nvSpPr>
+        <p:spPr>
+          <a:xfrm>
+            <a:off x="4700016" y="2788920"/>
+            <a:ext cx="2926080" cy="640080"/>
           </a:xfrm>
           <a:prstGeom prst="rect">
             <a:avLst/>
@@ -14776,27 +15427,27 @@
               </a:spcAft>
             </a:pPr>
             <a:r>
-              <a:rPr sz="1700" b="1">
-                <a:solidFill>
-                  <a:srgbClr val="26415E"/>
+              <a:rPr sz="2600" b="1">
+                <a:solidFill>
+                  <a:srgbClr val="A8503A"/>
                 </a:solidFill>
                 <a:latin typeface="Georgia"/>
               </a:rPr>
-              <a:t>Sample data</a:t>
-            </a:r>
-          </a:p>
-        </p:txBody>
-      </p:sp>
-      <p:sp>
-        <p:nvSpPr>
-          <p:cNvPr id="12" name="TextBox 11"/>
-          <p:cNvSpPr txBox="1"/>
-          <p:nvPr/>
-        </p:nvSpPr>
-        <p:spPr>
-          <a:xfrm>
-            <a:off x="3200400" y="2953512"/>
-            <a:ext cx="2834640" cy="457200"/>
+              <a:t>2NF</a:t>
+            </a:r>
+          </a:p>
+        </p:txBody>
+      </p:sp>
+      <p:sp>
+        <p:nvSpPr>
+          <p:cNvPr id="15" name="TextBox 14"/>
+          <p:cNvSpPr txBox="1"/>
+          <p:nvPr/>
+        </p:nvSpPr>
+        <p:spPr>
+          <a:xfrm>
+            <a:off x="4700016" y="3474720"/>
+            <a:ext cx="2926080" cy="457200"/>
           </a:xfrm>
           <a:prstGeom prst="rect">
             <a:avLst/>
@@ -14818,27 +15469,27 @@
               </a:spcAft>
             </a:pPr>
             <a:r>
-              <a:rPr sz="1300" b="1">
-                <a:solidFill>
-                  <a:srgbClr val="A8503A"/>
-                </a:solidFill>
-                <a:latin typeface="Calibri"/>
-              </a:rPr>
-              <a:t>sql/02_data.sql</a:t>
-            </a:r>
-          </a:p>
-        </p:txBody>
-      </p:sp>
-      <p:sp>
-        <p:nvSpPr>
-          <p:cNvPr id="13" name="TextBox 12"/>
-          <p:cNvSpPr txBox="1"/>
-          <p:nvPr/>
-        </p:nvSpPr>
-        <p:spPr>
-          <a:xfrm>
-            <a:off x="6126480" y="2953512"/>
-            <a:ext cx="5120640" cy="457200"/>
+              <a:rPr sz="1550" b="1">
+                <a:solidFill>
+                  <a:srgbClr val="2C2A26"/>
+                </a:solidFill>
+                <a:latin typeface="Calibri"/>
+              </a:rPr>
+              <a:t>No partial dependency</a:t>
+            </a:r>
+          </a:p>
+        </p:txBody>
+      </p:sp>
+      <p:sp>
+        <p:nvSpPr>
+          <p:cNvPr id="16" name="TextBox 15"/>
+          <p:cNvSpPr txBox="1"/>
+          <p:nvPr/>
+        </p:nvSpPr>
+        <p:spPr>
+          <a:xfrm>
+            <a:off x="4700016" y="3977639"/>
+            <a:ext cx="2926080" cy="1371600"/>
           </a:xfrm>
           <a:prstGeom prst="rect">
             <a:avLst/>
@@ -14853,7 +15504,7 @@
           <a:p>
             <a:pPr algn="l">
               <a:lnSpc>
-                <a:spcPct val="104000"/>
+                <a:spcPct val="112000"/>
               </a:lnSpc>
               <a:spcAft>
                 <a:spcPts val="400"/>
@@ -14866,31 +15517,31 @@
                 </a:solidFill>
                 <a:latin typeface="Calibri"/>
               </a:rPr>
-              <a:t>~200 meaningful rows (over the 100 minimum)</a:t>
-            </a:r>
-          </a:p>
-        </p:txBody>
-      </p:sp>
-      <p:sp>
-        <p:nvSpPr>
-          <p:cNvPr id="14" name="Rounded Rectangle 13"/>
+              <a:t>Non-key columns depend on the whole composite key.</a:t>
+            </a:r>
+          </a:p>
+        </p:txBody>
+      </p:sp>
+      <p:sp>
+        <p:nvSpPr>
+          <p:cNvPr id="17" name="Rounded Rectangle 16"/>
           <p:cNvSpPr/>
           <p:nvPr/>
         </p:nvSpPr>
         <p:spPr>
           <a:xfrm>
-            <a:off x="841248" y="3666744"/>
-            <a:ext cx="10515600" cy="786384"/>
+            <a:off x="8010144" y="2468880"/>
+            <a:ext cx="3456432" cy="3017520"/>
           </a:xfrm>
           <a:prstGeom prst="roundRect">
             <a:avLst>
-              <a:gd name="adj" fmla="val 12000"/>
+              <a:gd name="adj" fmla="val 5000"/>
             </a:avLst>
           </a:prstGeom>
           <a:solidFill>
             <a:srgbClr val="FFFFFF"/>
           </a:solidFill>
-          <a:ln w="13970">
+          <a:ln w="15240">
             <a:solidFill>
               <a:srgbClr val="E6DCCC"/>
             </a:solidFill>
@@ -14921,153 +15572,23 @@
       </p:sp>
       <p:sp>
         <p:nvSpPr>
-          <p:cNvPr id="15" name="TextBox 14"/>
-          <p:cNvSpPr txBox="1"/>
-          <p:nvPr/>
-        </p:nvSpPr>
-        <p:spPr>
-          <a:xfrm>
-            <a:off x="1097280" y="3822191"/>
-            <a:ext cx="2103120" cy="548640"/>
-          </a:xfrm>
-          <a:prstGeom prst="rect">
-            <a:avLst/>
-          </a:prstGeom>
-          <a:noFill/>
-        </p:spPr>
-        <p:txBody>
-          <a:bodyPr wrap="square" anchor="t" lIns="0" rIns="0" tIns="0" bIns="0">
-            <a:spAutoFit/>
-          </a:bodyPr>
-          <a:lstStyle/>
-          <a:p>
-            <a:pPr algn="l">
-              <a:lnSpc>
-                <a:spcPct val="104000"/>
-              </a:lnSpc>
-              <a:spcAft>
-                <a:spcPts val="400"/>
-              </a:spcAft>
-            </a:pPr>
-            <a:r>
-              <a:rPr sz="1700" b="1">
-                <a:solidFill>
-                  <a:srgbClr val="26415E"/>
-                </a:solidFill>
-                <a:latin typeface="Georgia"/>
-              </a:rPr>
-              <a:t>Views</a:t>
-            </a:r>
-          </a:p>
-        </p:txBody>
-      </p:sp>
-      <p:sp>
-        <p:nvSpPr>
-          <p:cNvPr id="16" name="TextBox 15"/>
-          <p:cNvSpPr txBox="1"/>
-          <p:nvPr/>
-        </p:nvSpPr>
-        <p:spPr>
-          <a:xfrm>
-            <a:off x="3200400" y="3849624"/>
-            <a:ext cx="2834640" cy="457200"/>
-          </a:xfrm>
-          <a:prstGeom prst="rect">
-            <a:avLst/>
-          </a:prstGeom>
-          <a:noFill/>
-        </p:spPr>
-        <p:txBody>
-          <a:bodyPr wrap="square" anchor="t" lIns="0" rIns="0" tIns="0" bIns="0">
-            <a:spAutoFit/>
-          </a:bodyPr>
-          <a:lstStyle/>
-          <a:p>
-            <a:pPr algn="l">
-              <a:lnSpc>
-                <a:spcPct val="104000"/>
-              </a:lnSpc>
-              <a:spcAft>
-                <a:spcPts val="400"/>
-              </a:spcAft>
-            </a:pPr>
-            <a:r>
-              <a:rPr sz="1300" b="1">
-                <a:solidFill>
-                  <a:srgbClr val="A8503A"/>
-                </a:solidFill>
-                <a:latin typeface="Calibri"/>
-              </a:rPr>
-              <a:t>sql/03_views.sql</a:t>
-            </a:r>
-          </a:p>
-        </p:txBody>
-      </p:sp>
-      <p:sp>
-        <p:nvSpPr>
-          <p:cNvPr id="17" name="TextBox 16"/>
-          <p:cNvSpPr txBox="1"/>
-          <p:nvPr/>
-        </p:nvSpPr>
-        <p:spPr>
-          <a:xfrm>
-            <a:off x="6126480" y="3849624"/>
-            <a:ext cx="5120640" cy="457200"/>
-          </a:xfrm>
-          <a:prstGeom prst="rect">
-            <a:avLst/>
-          </a:prstGeom>
-          <a:noFill/>
-        </p:spPr>
-        <p:txBody>
-          <a:bodyPr wrap="square" anchor="t" lIns="0" rIns="0" tIns="0" bIns="0">
-            <a:spAutoFit/>
-          </a:bodyPr>
-          <a:lstStyle/>
-          <a:p>
-            <a:pPr algn="l">
-              <a:lnSpc>
-                <a:spcPct val="104000"/>
-              </a:lnSpc>
-              <a:spcAft>
-                <a:spcPts val="400"/>
-              </a:spcAft>
-            </a:pPr>
-            <a:r>
-              <a:rPr sz="1350" b="0">
-                <a:solidFill>
-                  <a:srgbClr val="7A7263"/>
-                </a:solidFill>
-                <a:latin typeface="Calibri"/>
-              </a:rPr>
-              <a:t>catalogue, availability, active loans, fines</a:t>
-            </a:r>
-          </a:p>
-        </p:txBody>
-      </p:sp>
-      <p:sp>
-        <p:nvSpPr>
-          <p:cNvPr id="18" name="Rounded Rectangle 17"/>
+          <p:cNvPr id="18" name="Rectangle 17"/>
           <p:cNvSpPr/>
           <p:nvPr/>
         </p:nvSpPr>
         <p:spPr>
           <a:xfrm>
-            <a:off x="841248" y="4562856"/>
-            <a:ext cx="10515600" cy="786384"/>
-          </a:xfrm>
-          <a:prstGeom prst="roundRect">
-            <a:avLst>
-              <a:gd name="adj" fmla="val 12000"/>
-            </a:avLst>
+            <a:off x="8010144" y="2468880"/>
+            <a:ext cx="3456432" cy="146304"/>
+          </a:xfrm>
+          <a:prstGeom prst="rect">
+            <a:avLst/>
           </a:prstGeom>
           <a:solidFill>
-            <a:srgbClr val="FFFFFF"/>
+            <a:srgbClr val="2F5170"/>
           </a:solidFill>
-          <a:ln w="13970">
-            <a:solidFill>
-              <a:srgbClr val="E6DCCC"/>
-            </a:solidFill>
+          <a:ln>
+            <a:noFill/>
           </a:ln>
           <a:effectLst/>
         </p:spPr>
@@ -15101,8 +15622,8 @@
         </p:nvSpPr>
         <p:spPr>
           <a:xfrm>
-            <a:off x="1097280" y="4718304"/>
-            <a:ext cx="2103120" cy="548640"/>
+            <a:off x="8284464" y="2788920"/>
+            <a:ext cx="2926080" cy="640080"/>
           </a:xfrm>
           <a:prstGeom prst="rect">
             <a:avLst/>
@@ -15124,13 +15645,13 @@
               </a:spcAft>
             </a:pPr>
             <a:r>
-              <a:rPr sz="1700" b="1">
-                <a:solidFill>
-                  <a:srgbClr val="26415E"/>
+              <a:rPr sz="2600" b="1">
+                <a:solidFill>
+                  <a:srgbClr val="2F5170"/>
                 </a:solidFill>
                 <a:latin typeface="Georgia"/>
               </a:rPr>
-              <a:t>Queries</a:t>
+              <a:t>3NF</a:t>
             </a:r>
           </a:p>
         </p:txBody>
@@ -15143,8 +15664,8 @@
         </p:nvSpPr>
         <p:spPr>
           <a:xfrm>
-            <a:off x="3200400" y="4745736"/>
-            <a:ext cx="2834640" cy="457200"/>
+            <a:off x="8284464" y="3474720"/>
+            <a:ext cx="2926080" cy="457200"/>
           </a:xfrm>
           <a:prstGeom prst="rect">
             <a:avLst/>
@@ -15166,13 +15687,13 @@
               </a:spcAft>
             </a:pPr>
             <a:r>
-              <a:rPr sz="1300" b="1">
-                <a:solidFill>
-                  <a:srgbClr val="A8503A"/>
-                </a:solidFill>
-                <a:latin typeface="Calibri"/>
-              </a:rPr>
-              <a:t>sql/04_queries.sql</a:t>
+              <a:rPr sz="1550" b="1">
+                <a:solidFill>
+                  <a:srgbClr val="2C2A26"/>
+                </a:solidFill>
+                <a:latin typeface="Calibri"/>
+              </a:rPr>
+              <a:t>No transitive dependency</a:t>
             </a:r>
           </a:p>
         </p:txBody>
@@ -15185,8 +15706,8 @@
         </p:nvSpPr>
         <p:spPr>
           <a:xfrm>
-            <a:off x="6126480" y="4745736"/>
-            <a:ext cx="5120640" cy="457200"/>
+            <a:off x="8284464" y="3977639"/>
+            <a:ext cx="2926080" cy="1371600"/>
           </a:xfrm>
           <a:prstGeom prst="rect">
             <a:avLst/>
@@ -15201,7 +15722,7 @@
           <a:p>
             <a:pPr algn="l">
               <a:lnSpc>
-                <a:spcPct val="104000"/>
+                <a:spcPct val="112000"/>
               </a:lnSpc>
               <a:spcAft>
                 <a:spcPts val="400"/>
@@ -15214,188 +15735,14 @@
                 </a:solidFill>
                 <a:latin typeface="Calibri"/>
               </a:rPr>
-              <a:t>joins · subqueries · aggregates · GROUP BY / HAVING</a:t>
-            </a:r>
-          </a:p>
-        </p:txBody>
-      </p:sp>
-      <p:sp>
-        <p:nvSpPr>
-          <p:cNvPr id="22" name="Rounded Rectangle 21"/>
-          <p:cNvSpPr/>
-          <p:nvPr/>
-        </p:nvSpPr>
-        <p:spPr>
-          <a:xfrm>
-            <a:off x="841248" y="5458968"/>
-            <a:ext cx="10515600" cy="786384"/>
-          </a:xfrm>
-          <a:prstGeom prst="roundRect">
-            <a:avLst>
-              <a:gd name="adj" fmla="val 12000"/>
-            </a:avLst>
-          </a:prstGeom>
-          <a:solidFill>
-            <a:srgbClr val="FFFFFF"/>
-          </a:solidFill>
-          <a:ln w="13970">
-            <a:solidFill>
-              <a:srgbClr val="E6DCCC"/>
-            </a:solidFill>
-          </a:ln>
-          <a:effectLst/>
-        </p:spPr>
-        <p:style>
-          <a:lnRef idx="1">
-            <a:schemeClr val="accent1"/>
-          </a:lnRef>
-          <a:fillRef idx="3">
-            <a:schemeClr val="accent1"/>
-          </a:fillRef>
-          <a:effectRef idx="2">
-            <a:schemeClr val="accent1"/>
-          </a:effectRef>
-          <a:fontRef idx="minor">
-            <a:schemeClr val="lt1"/>
-          </a:fontRef>
-        </p:style>
-        <p:txBody>
-          <a:bodyPr rtlCol="0" anchor="ctr"/>
-          <a:lstStyle/>
-          <a:p>
-            <a:pPr algn="ctr"/>
-          </a:p>
-        </p:txBody>
-      </p:sp>
-      <p:sp>
-        <p:nvSpPr>
-          <p:cNvPr id="23" name="TextBox 22"/>
-          <p:cNvSpPr txBox="1"/>
-          <p:nvPr/>
-        </p:nvSpPr>
-        <p:spPr>
-          <a:xfrm>
-            <a:off x="1097280" y="5614416"/>
-            <a:ext cx="2103120" cy="548640"/>
-          </a:xfrm>
-          <a:prstGeom prst="rect">
-            <a:avLst/>
-          </a:prstGeom>
-          <a:noFill/>
-        </p:spPr>
-        <p:txBody>
-          <a:bodyPr wrap="square" anchor="t" lIns="0" rIns="0" tIns="0" bIns="0">
-            <a:spAutoFit/>
-          </a:bodyPr>
-          <a:lstStyle/>
-          <a:p>
-            <a:pPr algn="l">
-              <a:lnSpc>
-                <a:spcPct val="104000"/>
-              </a:lnSpc>
-              <a:spcAft>
-                <a:spcPts val="400"/>
-              </a:spcAft>
-            </a:pPr>
-            <a:r>
-              <a:rPr sz="1700" b="1">
-                <a:solidFill>
-                  <a:srgbClr val="26415E"/>
-                </a:solidFill>
-                <a:latin typeface="Georgia"/>
-              </a:rPr>
-              <a:t>Procedures</a:t>
-            </a:r>
-          </a:p>
-        </p:txBody>
-      </p:sp>
-      <p:sp>
-        <p:nvSpPr>
-          <p:cNvPr id="24" name="TextBox 23"/>
-          <p:cNvSpPr txBox="1"/>
-          <p:nvPr/>
-        </p:nvSpPr>
-        <p:spPr>
-          <a:xfrm>
-            <a:off x="3200400" y="5641848"/>
-            <a:ext cx="2834640" cy="457200"/>
-          </a:xfrm>
-          <a:prstGeom prst="rect">
-            <a:avLst/>
-          </a:prstGeom>
-          <a:noFill/>
-        </p:spPr>
-        <p:txBody>
-          <a:bodyPr wrap="square" anchor="t" lIns="0" rIns="0" tIns="0" bIns="0">
-            <a:spAutoFit/>
-          </a:bodyPr>
-          <a:lstStyle/>
-          <a:p>
-            <a:pPr algn="l">
-              <a:lnSpc>
-                <a:spcPct val="104000"/>
-              </a:lnSpc>
-              <a:spcAft>
-                <a:spcPts val="400"/>
-              </a:spcAft>
-            </a:pPr>
-            <a:r>
-              <a:rPr sz="1300" b="1">
-                <a:solidFill>
-                  <a:srgbClr val="A8503A"/>
-                </a:solidFill>
-                <a:latin typeface="Calibri"/>
-              </a:rPr>
-              <a:t>sql/05_procedures.sql</a:t>
-            </a:r>
-          </a:p>
-        </p:txBody>
-      </p:sp>
-      <p:sp>
-        <p:nvSpPr>
-          <p:cNvPr id="25" name="TextBox 24"/>
-          <p:cNvSpPr txBox="1"/>
-          <p:nvPr/>
-        </p:nvSpPr>
-        <p:spPr>
-          <a:xfrm>
-            <a:off x="6126480" y="5641848"/>
-            <a:ext cx="5120640" cy="457200"/>
-          </a:xfrm>
-          <a:prstGeom prst="rect">
-            <a:avLst/>
-          </a:prstGeom>
-          <a:noFill/>
-        </p:spPr>
-        <p:txBody>
-          <a:bodyPr wrap="square" anchor="t" lIns="0" rIns="0" tIns="0" bIns="0">
-            <a:spAutoFit/>
-          </a:bodyPr>
-          <a:lstStyle/>
-          <a:p>
-            <a:pPr algn="l">
-              <a:lnSpc>
-                <a:spcPct val="104000"/>
-              </a:lnSpc>
-              <a:spcAft>
-                <a:spcPts val="400"/>
-              </a:spcAft>
-            </a:pPr>
-            <a:r>
-              <a:rPr sz="1350" b="0">
-                <a:solidFill>
-                  <a:srgbClr val="7A7263"/>
-                </a:solidFill>
-                <a:latin typeface="Calibri"/>
-              </a:rPr>
-              <a:t>3 triggers · 3 procedures · 1 function · transactions</a:t>
-            </a:r>
-          </a:p>
-        </p:txBody>
-      </p:sp>
-      <p:sp>
-        <p:nvSpPr>
-          <p:cNvPr id="26" name="TextBox 25"/>
+              <a:t>Publisher / category details split into their own tables.</a:t>
+            </a:r>
+          </a:p>
+        </p:txBody>
+      </p:sp>
+      <p:sp>
+        <p:nvSpPr>
+          <p:cNvPr id="22" name="TextBox 21"/>
           <p:cNvSpPr txBox="1"/>
           <p:nvPr/>
         </p:nvSpPr>
@@ -15437,7 +15784,7 @@
       </p:sp>
       <p:sp>
         <p:nvSpPr>
-          <p:cNvPr id="27" name="TextBox 26"/>
+          <p:cNvPr id="23" name="TextBox 22"/>
           <p:cNvSpPr txBox="1"/>
           <p:nvPr/>
         </p:nvSpPr>
@@ -15619,7 +15966,7 @@
                 </a:solidFill>
                 <a:latin typeface="Georgia"/>
               </a:rPr>
-              <a:t>Logic inside the database</a:t>
+              <a:t>The database layer</a:t>
             </a:r>
           </a:p>
         </p:txBody>
@@ -15670,66 +16017,24 @@
       </p:sp>
       <p:sp>
         <p:nvSpPr>
-          <p:cNvPr id="6" name="TextBox 5"/>
-          <p:cNvSpPr txBox="1"/>
-          <p:nvPr/>
-        </p:nvSpPr>
-        <p:spPr>
-          <a:xfrm>
-            <a:off x="841248" y="1783080"/>
-            <a:ext cx="10424160" cy="548640"/>
-          </a:xfrm>
-          <a:prstGeom prst="rect">
-            <a:avLst/>
-          </a:prstGeom>
-          <a:noFill/>
-        </p:spPr>
-        <p:txBody>
-          <a:bodyPr wrap="square" anchor="t" lIns="0" rIns="0" tIns="0" bIns="0">
-            <a:spAutoFit/>
-          </a:bodyPr>
-          <a:lstStyle/>
-          <a:p>
-            <a:pPr algn="l">
-              <a:lnSpc>
-                <a:spcPct val="104000"/>
-              </a:lnSpc>
-              <a:spcAft>
-                <a:spcPts val="400"/>
-              </a:spcAft>
-            </a:pPr>
-            <a:r>
-              <a:rPr sz="1700" b="0">
-                <a:solidFill>
-                  <a:srgbClr val="2C2A26"/>
-                </a:solidFill>
-                <a:latin typeface="Calibri"/>
-              </a:rPr>
-              <a:t>Rules live in MySQL, so data stays correct however it is accessed.</a:t>
-            </a:r>
-          </a:p>
-        </p:txBody>
-      </p:sp>
-      <p:sp>
-        <p:nvSpPr>
-          <p:cNvPr id="7" name="Rounded Rectangle 6"/>
+          <p:cNvPr id="6" name="Rounded Rectangle 5"/>
           <p:cNvSpPr/>
           <p:nvPr/>
         </p:nvSpPr>
         <p:spPr>
           <a:xfrm>
-            <a:off x="841248" y="2514600"/>
-            <a:ext cx="5166360" cy="3291840"/>
+            <a:off x="841248" y="1874519"/>
+            <a:ext cx="10515600" cy="786384"/>
           </a:xfrm>
           <a:prstGeom prst="roundRect">
             <a:avLst>
-              <a:gd name="adj" fmla="val 5000"/>
+              <a:gd name="adj" fmla="val 12000"/>
             </a:avLst>
           </a:prstGeom>
           <a:solidFill>
             <a:srgbClr val="FFFFFF"/>
           </a:solidFill>
-          <a:ln w="15240">
+          <a:ln w="13970">
             <a:solidFill>
               <a:srgbClr val="E6DCCC"/>
             </a:solidFill>
@@ -15760,23 +16065,153 @@
       </p:sp>
       <p:sp>
         <p:nvSpPr>
-          <p:cNvPr id="8" name="Rectangle 7"/>
+          <p:cNvPr id="7" name="TextBox 6"/>
+          <p:cNvSpPr txBox="1"/>
+          <p:nvPr/>
+        </p:nvSpPr>
+        <p:spPr>
+          <a:xfrm>
+            <a:off x="1097280" y="2029967"/>
+            <a:ext cx="2103120" cy="548640"/>
+          </a:xfrm>
+          <a:prstGeom prst="rect">
+            <a:avLst/>
+          </a:prstGeom>
+          <a:noFill/>
+        </p:spPr>
+        <p:txBody>
+          <a:bodyPr wrap="square" anchor="t" lIns="0" rIns="0" tIns="0" bIns="0">
+            <a:spAutoFit/>
+          </a:bodyPr>
+          <a:lstStyle/>
+          <a:p>
+            <a:pPr algn="l">
+              <a:lnSpc>
+                <a:spcPct val="104000"/>
+              </a:lnSpc>
+              <a:spcAft>
+                <a:spcPts val="400"/>
+              </a:spcAft>
+            </a:pPr>
+            <a:r>
+              <a:rPr sz="1700" b="1">
+                <a:solidFill>
+                  <a:srgbClr val="26415E"/>
+                </a:solidFill>
+                <a:latin typeface="Georgia"/>
+              </a:rPr>
+              <a:t>Schema</a:t>
+            </a:r>
+          </a:p>
+        </p:txBody>
+      </p:sp>
+      <p:sp>
+        <p:nvSpPr>
+          <p:cNvPr id="8" name="TextBox 7"/>
+          <p:cNvSpPr txBox="1"/>
+          <p:nvPr/>
+        </p:nvSpPr>
+        <p:spPr>
+          <a:xfrm>
+            <a:off x="3200400" y="2057400"/>
+            <a:ext cx="2834640" cy="457200"/>
+          </a:xfrm>
+          <a:prstGeom prst="rect">
+            <a:avLst/>
+          </a:prstGeom>
+          <a:noFill/>
+        </p:spPr>
+        <p:txBody>
+          <a:bodyPr wrap="square" anchor="t" lIns="0" rIns="0" tIns="0" bIns="0">
+            <a:spAutoFit/>
+          </a:bodyPr>
+          <a:lstStyle/>
+          <a:p>
+            <a:pPr algn="l">
+              <a:lnSpc>
+                <a:spcPct val="104000"/>
+              </a:lnSpc>
+              <a:spcAft>
+                <a:spcPts val="400"/>
+              </a:spcAft>
+            </a:pPr>
+            <a:r>
+              <a:rPr sz="1300" b="1">
+                <a:solidFill>
+                  <a:srgbClr val="A8503A"/>
+                </a:solidFill>
+                <a:latin typeface="Calibri"/>
+              </a:rPr>
+              <a:t>sql/01_schema.sql</a:t>
+            </a:r>
+          </a:p>
+        </p:txBody>
+      </p:sp>
+      <p:sp>
+        <p:nvSpPr>
+          <p:cNvPr id="9" name="TextBox 8"/>
+          <p:cNvSpPr txBox="1"/>
+          <p:nvPr/>
+        </p:nvSpPr>
+        <p:spPr>
+          <a:xfrm>
+            <a:off x="6126480" y="2057400"/>
+            <a:ext cx="5120640" cy="457200"/>
+          </a:xfrm>
+          <a:prstGeom prst="rect">
+            <a:avLst/>
+          </a:prstGeom>
+          <a:noFill/>
+        </p:spPr>
+        <p:txBody>
+          <a:bodyPr wrap="square" anchor="t" lIns="0" rIns="0" tIns="0" bIns="0">
+            <a:spAutoFit/>
+          </a:bodyPr>
+          <a:lstStyle/>
+          <a:p>
+            <a:pPr algn="l">
+              <a:lnSpc>
+                <a:spcPct val="104000"/>
+              </a:lnSpc>
+              <a:spcAft>
+                <a:spcPts val="400"/>
+              </a:spcAft>
+            </a:pPr>
+            <a:r>
+              <a:rPr sz="1350" b="0">
+                <a:solidFill>
+                  <a:srgbClr val="7A7263"/>
+                </a:solidFill>
+                <a:latin typeface="Calibri"/>
+              </a:rPr>
+              <a:t>11 tables · all constraints · indexes · ALTER demo</a:t>
+            </a:r>
+          </a:p>
+        </p:txBody>
+      </p:sp>
+      <p:sp>
+        <p:nvSpPr>
+          <p:cNvPr id="10" name="Rounded Rectangle 9"/>
           <p:cNvSpPr/>
           <p:nvPr/>
         </p:nvSpPr>
         <p:spPr>
           <a:xfrm>
-            <a:off x="841248" y="2514600"/>
-            <a:ext cx="146304" cy="3291840"/>
-          </a:xfrm>
-          <a:prstGeom prst="rect">
-            <a:avLst/>
+            <a:off x="841248" y="2770632"/>
+            <a:ext cx="10515600" cy="786384"/>
+          </a:xfrm>
+          <a:prstGeom prst="roundRect">
+            <a:avLst>
+              <a:gd name="adj" fmla="val 12000"/>
+            </a:avLst>
           </a:prstGeom>
           <a:solidFill>
-            <a:srgbClr val="A8503A"/>
+            <a:srgbClr val="FFFFFF"/>
           </a:solidFill>
-          <a:ln>
-            <a:noFill/>
+          <a:ln w="13970">
+            <a:solidFill>
+              <a:srgbClr val="E6DCCC"/>
+            </a:solidFill>
           </a:ln>
           <a:effectLst/>
         </p:spPr>
@@ -15804,14 +16239,14 @@
       </p:sp>
       <p:sp>
         <p:nvSpPr>
-          <p:cNvPr id="9" name="TextBox 8"/>
-          <p:cNvSpPr txBox="1"/>
-          <p:nvPr/>
-        </p:nvSpPr>
-        <p:spPr>
-          <a:xfrm>
-            <a:off x="1207008" y="2743200"/>
-            <a:ext cx="4572000" cy="457200"/>
+          <p:cNvPr id="11" name="TextBox 10"/>
+          <p:cNvSpPr txBox="1"/>
+          <p:nvPr/>
+        </p:nvSpPr>
+        <p:spPr>
+          <a:xfrm>
+            <a:off x="1097280" y="2926079"/>
+            <a:ext cx="2103120" cy="548640"/>
           </a:xfrm>
           <a:prstGeom prst="rect">
             <a:avLst/>
@@ -15833,144 +16268,121 @@
               </a:spcAft>
             </a:pPr>
             <a:r>
-              <a:rPr sz="1900" b="1">
+              <a:rPr sz="1700" b="1">
                 <a:solidFill>
                   <a:srgbClr val="26415E"/>
                 </a:solidFill>
                 <a:latin typeface="Georgia"/>
               </a:rPr>
-              <a:t>Triggers</a:t>
-            </a:r>
-          </a:p>
-        </p:txBody>
-      </p:sp>
-      <p:sp>
-        <p:nvSpPr>
-          <p:cNvPr id="10" name="TextBox 9"/>
-          <p:cNvSpPr txBox="1"/>
-          <p:nvPr/>
-        </p:nvSpPr>
-        <p:spPr>
-          <a:xfrm>
-            <a:off x="1207008" y="3383280"/>
-            <a:ext cx="4572000" cy="2286000"/>
-          </a:xfrm>
-          <a:prstGeom prst="rect">
-            <a:avLst/>
-          </a:prstGeom>
-          <a:noFill/>
-        </p:spPr>
-        <p:txBody>
-          <a:bodyPr wrap="square" lIns="0" rIns="0" tIns="0" bIns="0">
-            <a:spAutoFit/>
-          </a:bodyPr>
-          <a:lstStyle/>
-          <a:p>
-            <a:pPr>
-              <a:lnSpc>
-                <a:spcPct val="106000"/>
-              </a:lnSpc>
-              <a:spcAft>
-                <a:spcPts val="1200"/>
-              </a:spcAft>
-            </a:pPr>
-            <a:r>
-              <a:rPr sz="1500" b="1">
+              <a:t>Sample data</a:t>
+            </a:r>
+          </a:p>
+        </p:txBody>
+      </p:sp>
+      <p:sp>
+        <p:nvSpPr>
+          <p:cNvPr id="12" name="TextBox 11"/>
+          <p:cNvSpPr txBox="1"/>
+          <p:nvPr/>
+        </p:nvSpPr>
+        <p:spPr>
+          <a:xfrm>
+            <a:off x="3200400" y="2953512"/>
+            <a:ext cx="2834640" cy="457200"/>
+          </a:xfrm>
+          <a:prstGeom prst="rect">
+            <a:avLst/>
+          </a:prstGeom>
+          <a:noFill/>
+        </p:spPr>
+        <p:txBody>
+          <a:bodyPr wrap="square" anchor="t" lIns="0" rIns="0" tIns="0" bIns="0">
+            <a:spAutoFit/>
+          </a:bodyPr>
+          <a:lstStyle/>
+          <a:p>
+            <a:pPr algn="l">
+              <a:lnSpc>
+                <a:spcPct val="104000"/>
+              </a:lnSpc>
+              <a:spcAft>
+                <a:spcPts val="400"/>
+              </a:spcAft>
+            </a:pPr>
+            <a:r>
+              <a:rPr sz="1300" b="1">
                 <a:solidFill>
                   <a:srgbClr val="A8503A"/>
                 </a:solidFill>
                 <a:latin typeface="Calibri"/>
               </a:rPr>
-              <a:t>—  </a:t>
-            </a:r>
-            <a:r>
-              <a:rPr sz="1500">
-                <a:solidFill>
-                  <a:srgbClr val="2C2A26"/>
-                </a:solidFill>
-                <a:latin typeface="Calibri"/>
-              </a:rPr>
-              <a:t>Block issuing a copy that is not Available</a:t>
-            </a:r>
-          </a:p>
-          <a:p>
-            <a:pPr>
-              <a:lnSpc>
-                <a:spcPct val="106000"/>
-              </a:lnSpc>
-              <a:spcAft>
-                <a:spcPts val="1200"/>
-              </a:spcAft>
-            </a:pPr>
-            <a:r>
-              <a:rPr sz="1500" b="1">
-                <a:solidFill>
-                  <a:srgbClr val="A8503A"/>
-                </a:solidFill>
-                <a:latin typeface="Calibri"/>
-              </a:rPr>
-              <a:t>—  </a:t>
-            </a:r>
-            <a:r>
-              <a:rPr sz="1500">
-                <a:solidFill>
-                  <a:srgbClr val="2C2A26"/>
-                </a:solidFill>
-                <a:latin typeface="Calibri"/>
-              </a:rPr>
-              <a:t>Auto-mark a copy 'Borrowed' when issued</a:t>
-            </a:r>
-          </a:p>
-          <a:p>
-            <a:pPr>
-              <a:lnSpc>
-                <a:spcPct val="106000"/>
-              </a:lnSpc>
-              <a:spcAft>
-                <a:spcPts val="1200"/>
-              </a:spcAft>
-            </a:pPr>
-            <a:r>
-              <a:rPr sz="1500" b="1">
-                <a:solidFill>
-                  <a:srgbClr val="A8503A"/>
-                </a:solidFill>
-                <a:latin typeface="Calibri"/>
-              </a:rPr>
-              <a:t>—  </a:t>
-            </a:r>
-            <a:r>
-              <a:rPr sz="1500">
-                <a:solidFill>
-                  <a:srgbClr val="2C2A26"/>
-                </a:solidFill>
-                <a:latin typeface="Calibri"/>
-              </a:rPr>
-              <a:t>Auto-free the copy + add a fine on late return</a:t>
-            </a:r>
-          </a:p>
-        </p:txBody>
-      </p:sp>
-      <p:sp>
-        <p:nvSpPr>
-          <p:cNvPr id="11" name="Rounded Rectangle 10"/>
+              <a:t>sql/02_data.sql</a:t>
+            </a:r>
+          </a:p>
+        </p:txBody>
+      </p:sp>
+      <p:sp>
+        <p:nvSpPr>
+          <p:cNvPr id="13" name="TextBox 12"/>
+          <p:cNvSpPr txBox="1"/>
+          <p:nvPr/>
+        </p:nvSpPr>
+        <p:spPr>
+          <a:xfrm>
+            <a:off x="6126480" y="2953512"/>
+            <a:ext cx="5120640" cy="457200"/>
+          </a:xfrm>
+          <a:prstGeom prst="rect">
+            <a:avLst/>
+          </a:prstGeom>
+          <a:noFill/>
+        </p:spPr>
+        <p:txBody>
+          <a:bodyPr wrap="square" anchor="t" lIns="0" rIns="0" tIns="0" bIns="0">
+            <a:spAutoFit/>
+          </a:bodyPr>
+          <a:lstStyle/>
+          <a:p>
+            <a:pPr algn="l">
+              <a:lnSpc>
+                <a:spcPct val="104000"/>
+              </a:lnSpc>
+              <a:spcAft>
+                <a:spcPts val="400"/>
+              </a:spcAft>
+            </a:pPr>
+            <a:r>
+              <a:rPr sz="1350" b="0">
+                <a:solidFill>
+                  <a:srgbClr val="7A7263"/>
+                </a:solidFill>
+                <a:latin typeface="Calibri"/>
+              </a:rPr>
+              <a:t>~200 meaningful rows (over the 100 minimum)</a:t>
+            </a:r>
+          </a:p>
+        </p:txBody>
+      </p:sp>
+      <p:sp>
+        <p:nvSpPr>
+          <p:cNvPr id="14" name="Rounded Rectangle 13"/>
           <p:cNvSpPr/>
           <p:nvPr/>
         </p:nvSpPr>
         <p:spPr>
           <a:xfrm>
-            <a:off x="6281928" y="2514600"/>
-            <a:ext cx="5166360" cy="3291840"/>
+            <a:off x="841248" y="3666744"/>
+            <a:ext cx="10515600" cy="786384"/>
           </a:xfrm>
           <a:prstGeom prst="roundRect">
             <a:avLst>
-              <a:gd name="adj" fmla="val 5000"/>
+              <a:gd name="adj" fmla="val 12000"/>
             </a:avLst>
           </a:prstGeom>
           <a:solidFill>
             <a:srgbClr val="FFFFFF"/>
           </a:solidFill>
-          <a:ln w="15240">
+          <a:ln w="13970">
             <a:solidFill>
               <a:srgbClr val="E6DCCC"/>
             </a:solidFill>
@@ -16001,23 +16413,153 @@
       </p:sp>
       <p:sp>
         <p:nvSpPr>
-          <p:cNvPr id="12" name="Rectangle 11"/>
+          <p:cNvPr id="15" name="TextBox 14"/>
+          <p:cNvSpPr txBox="1"/>
+          <p:nvPr/>
+        </p:nvSpPr>
+        <p:spPr>
+          <a:xfrm>
+            <a:off x="1097280" y="3822191"/>
+            <a:ext cx="2103120" cy="548640"/>
+          </a:xfrm>
+          <a:prstGeom prst="rect">
+            <a:avLst/>
+          </a:prstGeom>
+          <a:noFill/>
+        </p:spPr>
+        <p:txBody>
+          <a:bodyPr wrap="square" anchor="t" lIns="0" rIns="0" tIns="0" bIns="0">
+            <a:spAutoFit/>
+          </a:bodyPr>
+          <a:lstStyle/>
+          <a:p>
+            <a:pPr algn="l">
+              <a:lnSpc>
+                <a:spcPct val="104000"/>
+              </a:lnSpc>
+              <a:spcAft>
+                <a:spcPts val="400"/>
+              </a:spcAft>
+            </a:pPr>
+            <a:r>
+              <a:rPr sz="1700" b="1">
+                <a:solidFill>
+                  <a:srgbClr val="26415E"/>
+                </a:solidFill>
+                <a:latin typeface="Georgia"/>
+              </a:rPr>
+              <a:t>Views</a:t>
+            </a:r>
+          </a:p>
+        </p:txBody>
+      </p:sp>
+      <p:sp>
+        <p:nvSpPr>
+          <p:cNvPr id="16" name="TextBox 15"/>
+          <p:cNvSpPr txBox="1"/>
+          <p:nvPr/>
+        </p:nvSpPr>
+        <p:spPr>
+          <a:xfrm>
+            <a:off x="3200400" y="3849624"/>
+            <a:ext cx="2834640" cy="457200"/>
+          </a:xfrm>
+          <a:prstGeom prst="rect">
+            <a:avLst/>
+          </a:prstGeom>
+          <a:noFill/>
+        </p:spPr>
+        <p:txBody>
+          <a:bodyPr wrap="square" anchor="t" lIns="0" rIns="0" tIns="0" bIns="0">
+            <a:spAutoFit/>
+          </a:bodyPr>
+          <a:lstStyle/>
+          <a:p>
+            <a:pPr algn="l">
+              <a:lnSpc>
+                <a:spcPct val="104000"/>
+              </a:lnSpc>
+              <a:spcAft>
+                <a:spcPts val="400"/>
+              </a:spcAft>
+            </a:pPr>
+            <a:r>
+              <a:rPr sz="1300" b="1">
+                <a:solidFill>
+                  <a:srgbClr val="A8503A"/>
+                </a:solidFill>
+                <a:latin typeface="Calibri"/>
+              </a:rPr>
+              <a:t>sql/03_views.sql</a:t>
+            </a:r>
+          </a:p>
+        </p:txBody>
+      </p:sp>
+      <p:sp>
+        <p:nvSpPr>
+          <p:cNvPr id="17" name="TextBox 16"/>
+          <p:cNvSpPr txBox="1"/>
+          <p:nvPr/>
+        </p:nvSpPr>
+        <p:spPr>
+          <a:xfrm>
+            <a:off x="6126480" y="3849624"/>
+            <a:ext cx="5120640" cy="457200"/>
+          </a:xfrm>
+          <a:prstGeom prst="rect">
+            <a:avLst/>
+          </a:prstGeom>
+          <a:noFill/>
+        </p:spPr>
+        <p:txBody>
+          <a:bodyPr wrap="square" anchor="t" lIns="0" rIns="0" tIns="0" bIns="0">
+            <a:spAutoFit/>
+          </a:bodyPr>
+          <a:lstStyle/>
+          <a:p>
+            <a:pPr algn="l">
+              <a:lnSpc>
+                <a:spcPct val="104000"/>
+              </a:lnSpc>
+              <a:spcAft>
+                <a:spcPts val="400"/>
+              </a:spcAft>
+            </a:pPr>
+            <a:r>
+              <a:rPr sz="1350" b="0">
+                <a:solidFill>
+                  <a:srgbClr val="7A7263"/>
+                </a:solidFill>
+                <a:latin typeface="Calibri"/>
+              </a:rPr>
+              <a:t>catalogue, availability, active loans, fines</a:t>
+            </a:r>
+          </a:p>
+        </p:txBody>
+      </p:sp>
+      <p:sp>
+        <p:nvSpPr>
+          <p:cNvPr id="18" name="Rounded Rectangle 17"/>
           <p:cNvSpPr/>
           <p:nvPr/>
         </p:nvSpPr>
         <p:spPr>
           <a:xfrm>
-            <a:off x="6281928" y="2514600"/>
-            <a:ext cx="146304" cy="3291840"/>
-          </a:xfrm>
-          <a:prstGeom prst="rect">
-            <a:avLst/>
+            <a:off x="841248" y="4562856"/>
+            <a:ext cx="10515600" cy="786384"/>
+          </a:xfrm>
+          <a:prstGeom prst="roundRect">
+            <a:avLst>
+              <a:gd name="adj" fmla="val 12000"/>
+            </a:avLst>
           </a:prstGeom>
           <a:solidFill>
-            <a:srgbClr val="2F5170"/>
+            <a:srgbClr val="FFFFFF"/>
           </a:solidFill>
-          <a:ln>
-            <a:noFill/>
+          <a:ln w="13970">
+            <a:solidFill>
+              <a:srgbClr val="E6DCCC"/>
+            </a:solidFill>
           </a:ln>
           <a:effectLst/>
         </p:spPr>
@@ -16045,14 +16587,14 @@
       </p:sp>
       <p:sp>
         <p:nvSpPr>
-          <p:cNvPr id="13" name="TextBox 12"/>
-          <p:cNvSpPr txBox="1"/>
-          <p:nvPr/>
-        </p:nvSpPr>
-        <p:spPr>
-          <a:xfrm>
-            <a:off x="6647688" y="2743200"/>
-            <a:ext cx="4572000" cy="457200"/>
+          <p:cNvPr id="19" name="TextBox 18"/>
+          <p:cNvSpPr txBox="1"/>
+          <p:nvPr/>
+        </p:nvSpPr>
+        <p:spPr>
+          <a:xfrm>
+            <a:off x="1097280" y="4718304"/>
+            <a:ext cx="2103120" cy="548640"/>
           </a:xfrm>
           <a:prstGeom prst="rect">
             <a:avLst/>
@@ -16074,127 +16616,278 @@
               </a:spcAft>
             </a:pPr>
             <a:r>
-              <a:rPr sz="1900" b="1">
+              <a:rPr sz="1700" b="1">
                 <a:solidFill>
                   <a:srgbClr val="26415E"/>
                 </a:solidFill>
                 <a:latin typeface="Georgia"/>
               </a:rPr>
-              <a:t>Procedures &amp; transactions</a:t>
-            </a:r>
-          </a:p>
-        </p:txBody>
-      </p:sp>
-      <p:sp>
-        <p:nvSpPr>
-          <p:cNvPr id="14" name="TextBox 13"/>
-          <p:cNvSpPr txBox="1"/>
-          <p:nvPr/>
-        </p:nvSpPr>
-        <p:spPr>
-          <a:xfrm>
-            <a:off x="6647688" y="3383280"/>
-            <a:ext cx="4572000" cy="2286000"/>
-          </a:xfrm>
-          <a:prstGeom prst="rect">
-            <a:avLst/>
-          </a:prstGeom>
-          <a:noFill/>
-        </p:spPr>
-        <p:txBody>
-          <a:bodyPr wrap="square" lIns="0" rIns="0" tIns="0" bIns="0">
-            <a:spAutoFit/>
-          </a:bodyPr>
-          <a:lstStyle/>
-          <a:p>
-            <a:pPr>
-              <a:lnSpc>
-                <a:spcPct val="106000"/>
-              </a:lnSpc>
-              <a:spcAft>
-                <a:spcPts val="1200"/>
-              </a:spcAft>
-            </a:pPr>
-            <a:r>
-              <a:rPr sz="1500" b="1">
+              <a:t>Queries</a:t>
+            </a:r>
+          </a:p>
+        </p:txBody>
+      </p:sp>
+      <p:sp>
+        <p:nvSpPr>
+          <p:cNvPr id="20" name="TextBox 19"/>
+          <p:cNvSpPr txBox="1"/>
+          <p:nvPr/>
+        </p:nvSpPr>
+        <p:spPr>
+          <a:xfrm>
+            <a:off x="3200400" y="4745736"/>
+            <a:ext cx="2834640" cy="457200"/>
+          </a:xfrm>
+          <a:prstGeom prst="rect">
+            <a:avLst/>
+          </a:prstGeom>
+          <a:noFill/>
+        </p:spPr>
+        <p:txBody>
+          <a:bodyPr wrap="square" anchor="t" lIns="0" rIns="0" tIns="0" bIns="0">
+            <a:spAutoFit/>
+          </a:bodyPr>
+          <a:lstStyle/>
+          <a:p>
+            <a:pPr algn="l">
+              <a:lnSpc>
+                <a:spcPct val="104000"/>
+              </a:lnSpc>
+              <a:spcAft>
+                <a:spcPts val="400"/>
+              </a:spcAft>
+            </a:pPr>
+            <a:r>
+              <a:rPr sz="1300" b="1">
                 <a:solidFill>
                   <a:srgbClr val="A8503A"/>
                 </a:solidFill>
                 <a:latin typeface="Calibri"/>
               </a:rPr>
-              <a:t>—  </a:t>
-            </a:r>
-            <a:r>
-              <a:rPr sz="1500">
-                <a:solidFill>
-                  <a:srgbClr val="2C2A26"/>
-                </a:solidFill>
-                <a:latin typeface="Calibri"/>
-              </a:rPr>
-              <a:t>sp_issue_book / sp_return_book / sp_pay_member_fines</a:t>
-            </a:r>
-          </a:p>
-          <a:p>
-            <a:pPr>
-              <a:lnSpc>
-                <a:spcPct val="106000"/>
-              </a:lnSpc>
-              <a:spcAft>
-                <a:spcPts val="1200"/>
-              </a:spcAft>
-            </a:pPr>
-            <a:r>
-              <a:rPr sz="1500" b="1">
+              <a:t>sql/04_queries.sql</a:t>
+            </a:r>
+          </a:p>
+        </p:txBody>
+      </p:sp>
+      <p:sp>
+        <p:nvSpPr>
+          <p:cNvPr id="21" name="TextBox 20"/>
+          <p:cNvSpPr txBox="1"/>
+          <p:nvPr/>
+        </p:nvSpPr>
+        <p:spPr>
+          <a:xfrm>
+            <a:off x="6126480" y="4745736"/>
+            <a:ext cx="5120640" cy="457200"/>
+          </a:xfrm>
+          <a:prstGeom prst="rect">
+            <a:avLst/>
+          </a:prstGeom>
+          <a:noFill/>
+        </p:spPr>
+        <p:txBody>
+          <a:bodyPr wrap="square" anchor="t" lIns="0" rIns="0" tIns="0" bIns="0">
+            <a:spAutoFit/>
+          </a:bodyPr>
+          <a:lstStyle/>
+          <a:p>
+            <a:pPr algn="l">
+              <a:lnSpc>
+                <a:spcPct val="104000"/>
+              </a:lnSpc>
+              <a:spcAft>
+                <a:spcPts val="400"/>
+              </a:spcAft>
+            </a:pPr>
+            <a:r>
+              <a:rPr sz="1350" b="0">
+                <a:solidFill>
+                  <a:srgbClr val="7A7263"/>
+                </a:solidFill>
+                <a:latin typeface="Calibri"/>
+              </a:rPr>
+              <a:t>joins · subqueries · aggregates · GROUP BY / HAVING</a:t>
+            </a:r>
+          </a:p>
+        </p:txBody>
+      </p:sp>
+      <p:sp>
+        <p:nvSpPr>
+          <p:cNvPr id="22" name="Rounded Rectangle 21"/>
+          <p:cNvSpPr/>
+          <p:nvPr/>
+        </p:nvSpPr>
+        <p:spPr>
+          <a:xfrm>
+            <a:off x="841248" y="5458968"/>
+            <a:ext cx="10515600" cy="786384"/>
+          </a:xfrm>
+          <a:prstGeom prst="roundRect">
+            <a:avLst>
+              <a:gd name="adj" fmla="val 12000"/>
+            </a:avLst>
+          </a:prstGeom>
+          <a:solidFill>
+            <a:srgbClr val="FFFFFF"/>
+          </a:solidFill>
+          <a:ln w="13970">
+            <a:solidFill>
+              <a:srgbClr val="E6DCCC"/>
+            </a:solidFill>
+          </a:ln>
+          <a:effectLst/>
+        </p:spPr>
+        <p:style>
+          <a:lnRef idx="1">
+            <a:schemeClr val="accent1"/>
+          </a:lnRef>
+          <a:fillRef idx="3">
+            <a:schemeClr val="accent1"/>
+          </a:fillRef>
+          <a:effectRef idx="2">
+            <a:schemeClr val="accent1"/>
+          </a:effectRef>
+          <a:fontRef idx="minor">
+            <a:schemeClr val="lt1"/>
+          </a:fontRef>
+        </p:style>
+        <p:txBody>
+          <a:bodyPr rtlCol="0" anchor="ctr"/>
+          <a:lstStyle/>
+          <a:p>
+            <a:pPr algn="ctr"/>
+          </a:p>
+        </p:txBody>
+      </p:sp>
+      <p:sp>
+        <p:nvSpPr>
+          <p:cNvPr id="23" name="TextBox 22"/>
+          <p:cNvSpPr txBox="1"/>
+          <p:nvPr/>
+        </p:nvSpPr>
+        <p:spPr>
+          <a:xfrm>
+            <a:off x="1097280" y="5614416"/>
+            <a:ext cx="2103120" cy="548640"/>
+          </a:xfrm>
+          <a:prstGeom prst="rect">
+            <a:avLst/>
+          </a:prstGeom>
+          <a:noFill/>
+        </p:spPr>
+        <p:txBody>
+          <a:bodyPr wrap="square" anchor="t" lIns="0" rIns="0" tIns="0" bIns="0">
+            <a:spAutoFit/>
+          </a:bodyPr>
+          <a:lstStyle/>
+          <a:p>
+            <a:pPr algn="l">
+              <a:lnSpc>
+                <a:spcPct val="104000"/>
+              </a:lnSpc>
+              <a:spcAft>
+                <a:spcPts val="400"/>
+              </a:spcAft>
+            </a:pPr>
+            <a:r>
+              <a:rPr sz="1700" b="1">
+                <a:solidFill>
+                  <a:srgbClr val="26415E"/>
+                </a:solidFill>
+                <a:latin typeface="Georgia"/>
+              </a:rPr>
+              <a:t>Procedures</a:t>
+            </a:r>
+          </a:p>
+        </p:txBody>
+      </p:sp>
+      <p:sp>
+        <p:nvSpPr>
+          <p:cNvPr id="24" name="TextBox 23"/>
+          <p:cNvSpPr txBox="1"/>
+          <p:nvPr/>
+        </p:nvSpPr>
+        <p:spPr>
+          <a:xfrm>
+            <a:off x="3200400" y="5641848"/>
+            <a:ext cx="2834640" cy="457200"/>
+          </a:xfrm>
+          <a:prstGeom prst="rect">
+            <a:avLst/>
+          </a:prstGeom>
+          <a:noFill/>
+        </p:spPr>
+        <p:txBody>
+          <a:bodyPr wrap="square" anchor="t" lIns="0" rIns="0" tIns="0" bIns="0">
+            <a:spAutoFit/>
+          </a:bodyPr>
+          <a:lstStyle/>
+          <a:p>
+            <a:pPr algn="l">
+              <a:lnSpc>
+                <a:spcPct val="104000"/>
+              </a:lnSpc>
+              <a:spcAft>
+                <a:spcPts val="400"/>
+              </a:spcAft>
+            </a:pPr>
+            <a:r>
+              <a:rPr sz="1300" b="1">
                 <a:solidFill>
                   <a:srgbClr val="A8503A"/>
                 </a:solidFill>
                 <a:latin typeface="Calibri"/>
               </a:rPr>
-              <a:t>—  </a:t>
-            </a:r>
-            <a:r>
-              <a:rPr sz="1500">
-                <a:solidFill>
-                  <a:srgbClr val="2C2A26"/>
-                </a:solidFill>
-                <a:latin typeface="Calibri"/>
-              </a:rPr>
-              <a:t>fn_member_balance() — outstanding dues</a:t>
-            </a:r>
-          </a:p>
-          <a:p>
-            <a:pPr>
-              <a:lnSpc>
-                <a:spcPct val="106000"/>
-              </a:lnSpc>
-              <a:spcAft>
-                <a:spcPts val="1200"/>
-              </a:spcAft>
-            </a:pPr>
-            <a:r>
-              <a:rPr sz="1500" b="1">
-                <a:solidFill>
-                  <a:srgbClr val="A8503A"/>
-                </a:solidFill>
-                <a:latin typeface="Calibri"/>
-              </a:rPr>
-              <a:t>—  </a:t>
-            </a:r>
-            <a:r>
-              <a:rPr sz="1500">
-                <a:solidFill>
-                  <a:srgbClr val="2C2A26"/>
-                </a:solidFill>
-                <a:latin typeface="Calibri"/>
-              </a:rPr>
-              <a:t>Wrapped in transactions with ROLLBACK (ACID)</a:t>
-            </a:r>
-          </a:p>
-        </p:txBody>
-      </p:sp>
-      <p:sp>
-        <p:nvSpPr>
-          <p:cNvPr id="15" name="TextBox 14"/>
+              <a:t>sql/05_procedures.sql</a:t>
+            </a:r>
+          </a:p>
+        </p:txBody>
+      </p:sp>
+      <p:sp>
+        <p:nvSpPr>
+          <p:cNvPr id="25" name="TextBox 24"/>
+          <p:cNvSpPr txBox="1"/>
+          <p:nvPr/>
+        </p:nvSpPr>
+        <p:spPr>
+          <a:xfrm>
+            <a:off x="6126480" y="5641848"/>
+            <a:ext cx="5120640" cy="457200"/>
+          </a:xfrm>
+          <a:prstGeom prst="rect">
+            <a:avLst/>
+          </a:prstGeom>
+          <a:noFill/>
+        </p:spPr>
+        <p:txBody>
+          <a:bodyPr wrap="square" anchor="t" lIns="0" rIns="0" tIns="0" bIns="0">
+            <a:spAutoFit/>
+          </a:bodyPr>
+          <a:lstStyle/>
+          <a:p>
+            <a:pPr algn="l">
+              <a:lnSpc>
+                <a:spcPct val="104000"/>
+              </a:lnSpc>
+              <a:spcAft>
+                <a:spcPts val="400"/>
+              </a:spcAft>
+            </a:pPr>
+            <a:r>
+              <a:rPr sz="1350" b="0">
+                <a:solidFill>
+                  <a:srgbClr val="7A7263"/>
+                </a:solidFill>
+                <a:latin typeface="Calibri"/>
+              </a:rPr>
+              <a:t>3 triggers · 3 procedures · 1 function · transactions</a:t>
+            </a:r>
+          </a:p>
+        </p:txBody>
+      </p:sp>
+      <p:sp>
+        <p:nvSpPr>
+          <p:cNvPr id="26" name="TextBox 25"/>
           <p:cNvSpPr txBox="1"/>
           <p:nvPr/>
         </p:nvSpPr>
@@ -16236,7 +16929,7 @@
       </p:sp>
       <p:sp>
         <p:nvSpPr>
-          <p:cNvPr id="16" name="TextBox 15"/>
+          <p:cNvPr id="27" name="TextBox 26"/>
           <p:cNvSpPr txBox="1"/>
           <p:nvPr/>
         </p:nvSpPr>
